--- a/KAMIN-Deck-editable_v2.pptx
+++ b/KAMIN-Deck-editable_v2.pptx
@@ -21,19 +21,12 @@
     <p:sldId id="269" r:id="rId20"/>
     <p:sldId id="270" r:id="rId21"/>
     <p:sldId id="271" r:id="rId22"/>
-    <p:sldId id="272" r:id="rId23"/>
-    <p:sldId id="273" r:id="rId24"/>
   </p:sldIdLst>
   <p:embeddedFontLst>
     <p:embeddedFont>
       <p:font typeface="IBM Plex Sans Arabic" pitchFamily="34" charset="0"/>
-      <p:regular r:id="rId25"/>
-      <p:bold r:id="rId26"/>
-    </p:embeddedFont>
-    <p:embeddedFont>
-      <p:font typeface="IBM Plex Mono" pitchFamily="34" charset="0"/>
-      <p:regular r:id="rId27"/>
-      <p:bold r:id="rId28"/>
+      <p:regular r:id="rId23"/>
+      <p:bold r:id="rId24"/>
     </p:embeddedFont>
   </p:embeddedFontLst>
   <p:sldSz cx="15240000" cy="8572500" type="screen4x3"/>
@@ -3443,7 +3436,7 @@
                 <a:ea typeface="IBM Plex Mono"/>
                 <a:cs typeface="IBM Plex Mono"/>
               </a:rPr>
-              <a:t>01 / 18</a:t>
+              <a:t>01 / 16</a:t>
             </a:r>
           </a:p>
         </p:txBody>
@@ -3709,7 +3702,7 @@
                 <a:ea typeface="IBM Plex Mono"/>
                 <a:cs typeface="IBM Plex Mono"/>
               </a:rPr>
-              <a:t>10 / 18</a:t>
+              <a:t>10 / 16</a:t>
             </a:r>
           </a:p>
         </p:txBody>
@@ -4898,7 +4891,7 @@
                 <a:ea typeface="IBM Plex Mono"/>
                 <a:cs typeface="IBM Plex Mono"/>
               </a:rPr>
-              <a:t>11 / 18</a:t>
+              <a:t>11 / 16</a:t>
             </a:r>
           </a:p>
         </p:txBody>
@@ -6861,7 +6854,7 @@
                 <a:ea typeface="IBM Plex Sans Arabic"/>
                 <a:cs typeface="IBM Plex Sans Arabic"/>
               </a:rPr>
-              <a:t>ما الذي يبنونه</a:t>
+              <a:t>المُخرج</a:t>
             </a:r>
           </a:p>
         </p:txBody>
@@ -6944,7 +6937,7 @@
                 <a:ea typeface="IBM Plex Mono"/>
                 <a:cs typeface="IBM Plex Mono"/>
               </a:rPr>
-              <a:t>12 / 18</a:t>
+              <a:t>12 / 16</a:t>
             </a:r>
           </a:p>
         </p:txBody>
@@ -6990,50 +6983,9 @@
           </a:p>
         </p:txBody>
       </p:sp>
-      <p:sp>
-        <p:nvSpPr>
-          <p:cNvPr id="8" name="TextBox 7"/>
-          <p:cNvSpPr txBox="1"/>
-          <p:nvPr/>
-        </p:nvSpPr>
-        <p:spPr>
-          <a:xfrm>
-            <a:off x="990600" y="2171700"/>
-            <a:ext cx="13258800" cy="704850"/>
-          </a:xfrm>
-          <a:prstGeom prst="rect">
-            <a:avLst/>
-          </a:prstGeom>
-          <a:noFill/>
-        </p:spPr>
-        <p:txBody>
-          <a:bodyPr wrap="square" lIns="0" rIns="0" tIns="0" bIns="0" anchor="t">
-            <a:spAutoFit/>
-          </a:bodyPr>
-          <a:lstStyle/>
-          <a:p>
-            <a:pPr algn="r" rtl="1">
-              <a:lnSpc>
-                <a:spcPct val="135000"/>
-              </a:lnSpc>
-            </a:pPr>
-            <a:r>
-              <a:rPr sz="3900" b="1">
-                <a:solidFill>
-                  <a:srgbClr val="F7F3EC"/>
-                </a:solidFill>
-                <a:latin typeface="IBM Plex Sans Arabic"/>
-                <a:ea typeface="IBM Plex Sans Arabic"/>
-                <a:cs typeface="IBM Plex Sans Arabic"/>
-              </a:rPr>
-              <a:t>خريطة كامن للقدرات المحلية</a:t>
-            </a:r>
-          </a:p>
-        </p:txBody>
-      </p:sp>
       <p:pic>
         <p:nvPicPr>
-          <p:cNvPr id="9" name="Picture 8" descr="map.png"/>
+          <p:cNvPr id="8" name="Picture 7" descr="suppliers.png"/>
           <p:cNvPicPr>
             <a:picLocks noChangeAspect="1"/>
           </p:cNvPicPr>
@@ -7047,8 +6999,8 @@
         </p:blipFill>
         <p:spPr>
           <a:xfrm>
-            <a:off x="990600" y="3048000"/>
-            <a:ext cx="13258800" cy="3238500"/>
+            <a:off x="990600" y="1400175"/>
+            <a:ext cx="13258800" cy="5467350"/>
           </a:xfrm>
           <a:prstGeom prst="rect">
             <a:avLst/>
@@ -7192,7 +7144,7 @@
                 <a:ea typeface="IBM Plex Sans Arabic"/>
                 <a:cs typeface="IBM Plex Sans Arabic"/>
               </a:rPr>
-              <a:t>خلف الكواليس</a:t>
+              <a:t>الحساب</a:t>
             </a:r>
           </a:p>
         </p:txBody>
@@ -7275,7 +7227,7 @@
                 <a:ea typeface="IBM Plex Mono"/>
                 <a:cs typeface="IBM Plex Mono"/>
               </a:rPr>
-              <a:t>13 / 18</a:t>
+              <a:t>13 / 16</a:t>
             </a:r>
           </a:p>
         </p:txBody>
@@ -7329,8 +7281,132 @@
         </p:nvSpPr>
         <p:spPr>
           <a:xfrm>
-            <a:off x="990600" y="1600200"/>
-            <a:ext cx="13258800" cy="533400"/>
+            <a:off x="10439400" y="2324100"/>
+            <a:ext cx="3810000" cy="323850"/>
+          </a:xfrm>
+          <a:prstGeom prst="rect">
+            <a:avLst/>
+          </a:prstGeom>
+          <a:noFill/>
+        </p:spPr>
+        <p:txBody>
+          <a:bodyPr wrap="square" lIns="0" rIns="0" tIns="0" bIns="0" anchor="t">
+            <a:spAutoFit/>
+          </a:bodyPr>
+          <a:lstStyle/>
+          <a:p>
+            <a:pPr algn="l" rtl="1">
+              <a:lnSpc>
+                <a:spcPct val="135000"/>
+              </a:lnSpc>
+            </a:pPr>
+            <a:r>
+              <a:rPr sz="1275" b="0">
+                <a:solidFill>
+                  <a:srgbClr val="7C766D"/>
+                </a:solidFill>
+                <a:latin typeface="IBM Plex Sans Arabic"/>
+                <a:ea typeface="IBM Plex Sans Arabic"/>
+                <a:cs typeface="IBM Plex Sans Arabic"/>
+              </a:rPr>
+              <a:t>الطريقة القديمة</a:t>
+            </a:r>
+          </a:p>
+        </p:txBody>
+      </p:sp>
+      <p:sp>
+        <p:nvSpPr>
+          <p:cNvPr id="9" name="TextBox 8"/>
+          <p:cNvSpPr txBox="1"/>
+          <p:nvPr/>
+        </p:nvSpPr>
+        <p:spPr>
+          <a:xfrm>
+            <a:off x="5676900" y="2324100"/>
+            <a:ext cx="3810000" cy="323850"/>
+          </a:xfrm>
+          <a:prstGeom prst="rect">
+            <a:avLst/>
+          </a:prstGeom>
+          <a:noFill/>
+        </p:spPr>
+        <p:txBody>
+          <a:bodyPr wrap="square" lIns="0" rIns="0" tIns="0" bIns="0" anchor="t">
+            <a:spAutoFit/>
+          </a:bodyPr>
+          <a:lstStyle/>
+          <a:p>
+            <a:pPr algn="l" rtl="1">
+              <a:lnSpc>
+                <a:spcPct val="135000"/>
+              </a:lnSpc>
+            </a:pPr>
+            <a:r>
+              <a:rPr sz="1275" b="0">
+                <a:solidFill>
+                  <a:srgbClr val="FF5C1A"/>
+                </a:solidFill>
+                <a:latin typeface="IBM Plex Sans Arabic"/>
+                <a:ea typeface="IBM Plex Sans Arabic"/>
+                <a:cs typeface="IBM Plex Sans Arabic"/>
+              </a:rPr>
+              <a:t>كامن</a:t>
+            </a:r>
+          </a:p>
+        </p:txBody>
+      </p:sp>
+      <p:sp>
+        <p:nvSpPr>
+          <p:cNvPr id="10" name="Rectangle 9"/>
+          <p:cNvSpPr/>
+          <p:nvPr/>
+        </p:nvSpPr>
+        <p:spPr>
+          <a:xfrm>
+            <a:off x="990600" y="2724150"/>
+            <a:ext cx="13258800" cy="9525"/>
+          </a:xfrm>
+          <a:prstGeom prst="rect">
+            <a:avLst/>
+          </a:prstGeom>
+          <a:solidFill>
+            <a:srgbClr val="241F1B"/>
+          </a:solidFill>
+          <a:ln>
+            <a:noFill/>
+          </a:ln>
+          <a:effectLst/>
+        </p:spPr>
+        <p:style>
+          <a:lnRef idx="1">
+            <a:schemeClr val="accent1"/>
+          </a:lnRef>
+          <a:fillRef idx="3">
+            <a:schemeClr val="accent1"/>
+          </a:fillRef>
+          <a:effectRef idx="2">
+            <a:schemeClr val="accent1"/>
+          </a:effectRef>
+          <a:fontRef idx="minor">
+            <a:schemeClr val="lt1"/>
+          </a:fontRef>
+        </p:style>
+        <p:txBody>
+          <a:bodyPr rtlCol="0" anchor="ctr"/>
+          <a:lstStyle/>
+          <a:p/>
+        </p:txBody>
+      </p:sp>
+      <p:sp>
+        <p:nvSpPr>
+          <p:cNvPr id="11" name="TextBox 10"/>
+          <p:cNvSpPr txBox="1"/>
+          <p:nvPr/>
+        </p:nvSpPr>
+        <p:spPr>
+          <a:xfrm>
+            <a:off x="12344400" y="2971800"/>
+            <a:ext cx="1905000" cy="552450"/>
           </a:xfrm>
           <a:prstGeom prst="rect">
             <a:avLst/>
@@ -7349,7 +7425,89 @@
               </a:lnSpc>
             </a:pPr>
             <a:r>
-              <a:rPr sz="3000" b="1">
+              <a:rPr sz="2175" b="1">
+                <a:solidFill>
+                  <a:srgbClr val="7C766D"/>
+                </a:solidFill>
+                <a:latin typeface="IBM Plex Sans Arabic"/>
+                <a:ea typeface="IBM Plex Sans Arabic"/>
+                <a:cs typeface="IBM Plex Sans Arabic"/>
+              </a:rPr>
+              <a:t>الوقت</a:t>
+            </a:r>
+          </a:p>
+        </p:txBody>
+      </p:sp>
+      <p:sp>
+        <p:nvSpPr>
+          <p:cNvPr id="12" name="TextBox 11"/>
+          <p:cNvSpPr txBox="1"/>
+          <p:nvPr/>
+        </p:nvSpPr>
+        <p:spPr>
+          <a:xfrm>
+            <a:off x="8534400" y="2990850"/>
+            <a:ext cx="3619500" cy="514350"/>
+          </a:xfrm>
+          <a:prstGeom prst="rect">
+            <a:avLst/>
+          </a:prstGeom>
+          <a:noFill/>
+        </p:spPr>
+        <p:txBody>
+          <a:bodyPr wrap="square" lIns="0" rIns="0" tIns="0" bIns="0" anchor="t">
+            <a:spAutoFit/>
+          </a:bodyPr>
+          <a:lstStyle/>
+          <a:p>
+            <a:pPr algn="l" rtl="1">
+              <a:lnSpc>
+                <a:spcPct val="135000"/>
+              </a:lnSpc>
+            </a:pPr>
+            <a:r>
+              <a:rPr sz="2025" b="0">
+                <a:solidFill>
+                  <a:srgbClr val="7C766D"/>
+                </a:solidFill>
+                <a:latin typeface="IBM Plex Sans Arabic"/>
+                <a:ea typeface="IBM Plex Sans Arabic"/>
+                <a:cs typeface="IBM Plex Sans Arabic"/>
+              </a:rPr>
+              <a:t>٣٥ سنة</a:t>
+            </a:r>
+          </a:p>
+        </p:txBody>
+      </p:sp>
+      <p:sp>
+        <p:nvSpPr>
+          <p:cNvPr id="13" name="TextBox 12"/>
+          <p:cNvSpPr txBox="1"/>
+          <p:nvPr/>
+        </p:nvSpPr>
+        <p:spPr>
+          <a:xfrm>
+            <a:off x="4724400" y="2990850"/>
+            <a:ext cx="3619500" cy="514350"/>
+          </a:xfrm>
+          <a:prstGeom prst="rect">
+            <a:avLst/>
+          </a:prstGeom>
+          <a:noFill/>
+        </p:spPr>
+        <p:txBody>
+          <a:bodyPr wrap="square" lIns="0" rIns="0" tIns="0" bIns="0" anchor="t">
+            <a:spAutoFit/>
+          </a:bodyPr>
+          <a:lstStyle/>
+          <a:p>
+            <a:pPr algn="l" rtl="1">
+              <a:lnSpc>
+                <a:spcPct val="135000"/>
+              </a:lnSpc>
+            </a:pPr>
+            <a:r>
+              <a:rPr sz="2025" b="1">
                 <a:solidFill>
                   <a:srgbClr val="F7F3EC"/>
                 </a:solidFill>
@@ -7357,21 +7515,104 @@
                 <a:ea typeface="IBM Plex Sans Arabic"/>
                 <a:cs typeface="IBM Plex Sans Arabic"/>
               </a:rPr>
-              <a:t>وش يشغّل الخريطة؟</a:t>
-            </a:r>
-          </a:p>
-        </p:txBody>
-      </p:sp>
-      <p:sp>
-        <p:nvSpPr>
-          <p:cNvPr id="9" name="TextBox 8"/>
-          <p:cNvSpPr txBox="1"/>
-          <p:nvPr/>
-        </p:nvSpPr>
-        <p:spPr>
-          <a:xfrm>
-            <a:off x="3619500" y="1695450"/>
-            <a:ext cx="5715000" cy="342900"/>
+              <a:t>أقل من ١٠ ساعات</a:t>
+            </a:r>
+          </a:p>
+        </p:txBody>
+      </p:sp>
+      <p:sp>
+        <p:nvSpPr>
+          <p:cNvPr id="14" name="Rectangle 13"/>
+          <p:cNvSpPr/>
+          <p:nvPr/>
+        </p:nvSpPr>
+        <p:spPr>
+          <a:xfrm>
+            <a:off x="990600" y="3581400"/>
+            <a:ext cx="13258800" cy="9525"/>
+          </a:xfrm>
+          <a:prstGeom prst="rect">
+            <a:avLst/>
+          </a:prstGeom>
+          <a:solidFill>
+            <a:srgbClr val="241F1B"/>
+          </a:solidFill>
+          <a:ln>
+            <a:noFill/>
+          </a:ln>
+          <a:effectLst/>
+        </p:spPr>
+        <p:style>
+          <a:lnRef idx="1">
+            <a:schemeClr val="accent1"/>
+          </a:lnRef>
+          <a:fillRef idx="3">
+            <a:schemeClr val="accent1"/>
+          </a:fillRef>
+          <a:effectRef idx="2">
+            <a:schemeClr val="accent1"/>
+          </a:effectRef>
+          <a:fontRef idx="minor">
+            <a:schemeClr val="lt1"/>
+          </a:fontRef>
+        </p:style>
+        <p:txBody>
+          <a:bodyPr rtlCol="0" anchor="ctr"/>
+          <a:lstStyle/>
+          <a:p/>
+        </p:txBody>
+      </p:sp>
+      <p:sp>
+        <p:nvSpPr>
+          <p:cNvPr id="15" name="TextBox 14"/>
+          <p:cNvSpPr txBox="1"/>
+          <p:nvPr/>
+        </p:nvSpPr>
+        <p:spPr>
+          <a:xfrm>
+            <a:off x="12344400" y="3829050"/>
+            <a:ext cx="1905000" cy="552450"/>
+          </a:xfrm>
+          <a:prstGeom prst="rect">
+            <a:avLst/>
+          </a:prstGeom>
+          <a:noFill/>
+        </p:spPr>
+        <p:txBody>
+          <a:bodyPr wrap="square" lIns="0" rIns="0" tIns="0" bIns="0" anchor="t">
+            <a:spAutoFit/>
+          </a:bodyPr>
+          <a:lstStyle/>
+          <a:p>
+            <a:pPr algn="r" rtl="1">
+              <a:lnSpc>
+                <a:spcPct val="135000"/>
+              </a:lnSpc>
+            </a:pPr>
+            <a:r>
+              <a:rPr sz="2175" b="1">
+                <a:solidFill>
+                  <a:srgbClr val="7C766D"/>
+                </a:solidFill>
+                <a:latin typeface="IBM Plex Sans Arabic"/>
+                <a:ea typeface="IBM Plex Sans Arabic"/>
+                <a:cs typeface="IBM Plex Sans Arabic"/>
+              </a:rPr>
+              <a:t>التكلفة</a:t>
+            </a:r>
+          </a:p>
+        </p:txBody>
+      </p:sp>
+      <p:sp>
+        <p:nvSpPr>
+          <p:cNvPr id="16" name="TextBox 15"/>
+          <p:cNvSpPr txBox="1"/>
+          <p:nvPr/>
+        </p:nvSpPr>
+        <p:spPr>
+          <a:xfrm>
+            <a:off x="8534400" y="3848100"/>
+            <a:ext cx="3619500" cy="514350"/>
           </a:xfrm>
           <a:prstGeom prst="rect">
             <a:avLst/>
@@ -7390,7 +7631,7 @@
               </a:lnSpc>
             </a:pPr>
             <a:r>
-              <a:rPr sz="1350" b="0">
+              <a:rPr sz="2025" b="0">
                 <a:solidFill>
                   <a:srgbClr val="7C766D"/>
                 </a:solidFill>
@@ -7398,21 +7639,104 @@
                 <a:ea typeface="IBM Plex Sans Arabic"/>
                 <a:cs typeface="IBM Plex Sans Arabic"/>
               </a:rPr>
-              <a:t>نفس الخريطة، والمنقّط تحتها هو اللي يغذّي الوكلاء</a:t>
-            </a:r>
-          </a:p>
-        </p:txBody>
-      </p:sp>
-      <p:sp>
-        <p:nvSpPr>
-          <p:cNvPr id="10" name="TextBox 9"/>
-          <p:cNvSpPr txBox="1"/>
-          <p:nvPr/>
-        </p:nvSpPr>
-        <p:spPr>
-          <a:xfrm>
-            <a:off x="990600" y="1695450"/>
-            <a:ext cx="2476500" cy="323850"/>
+              <a:t>ملايين الريالات</a:t>
+            </a:r>
+          </a:p>
+        </p:txBody>
+      </p:sp>
+      <p:sp>
+        <p:nvSpPr>
+          <p:cNvPr id="17" name="TextBox 16"/>
+          <p:cNvSpPr txBox="1"/>
+          <p:nvPr/>
+        </p:nvSpPr>
+        <p:spPr>
+          <a:xfrm>
+            <a:off x="4724400" y="3848100"/>
+            <a:ext cx="3619500" cy="514350"/>
+          </a:xfrm>
+          <a:prstGeom prst="rect">
+            <a:avLst/>
+          </a:prstGeom>
+          <a:noFill/>
+        </p:spPr>
+        <p:txBody>
+          <a:bodyPr wrap="square" lIns="0" rIns="0" tIns="0" bIns="0" anchor="t">
+            <a:spAutoFit/>
+          </a:bodyPr>
+          <a:lstStyle/>
+          <a:p>
+            <a:pPr algn="l" rtl="1">
+              <a:lnSpc>
+                <a:spcPct val="135000"/>
+              </a:lnSpc>
+            </a:pPr>
+            <a:r>
+              <a:rPr sz="2025" b="1">
+                <a:solidFill>
+                  <a:srgbClr val="F7F3EC"/>
+                </a:solidFill>
+                <a:latin typeface="IBM Plex Sans Arabic"/>
+                <a:ea typeface="IBM Plex Sans Arabic"/>
+                <a:cs typeface="IBM Plex Sans Arabic"/>
+              </a:rPr>
+              <a:t>أقل من ٤ آلاف دولار</a:t>
+            </a:r>
+          </a:p>
+        </p:txBody>
+      </p:sp>
+      <p:sp>
+        <p:nvSpPr>
+          <p:cNvPr id="18" name="Rectangle 17"/>
+          <p:cNvSpPr/>
+          <p:nvPr/>
+        </p:nvSpPr>
+        <p:spPr>
+          <a:xfrm>
+            <a:off x="990600" y="4438650"/>
+            <a:ext cx="13258800" cy="9525"/>
+          </a:xfrm>
+          <a:prstGeom prst="rect">
+            <a:avLst/>
+          </a:prstGeom>
+          <a:solidFill>
+            <a:srgbClr val="241F1B"/>
+          </a:solidFill>
+          <a:ln>
+            <a:noFill/>
+          </a:ln>
+          <a:effectLst/>
+        </p:spPr>
+        <p:style>
+          <a:lnRef idx="1">
+            <a:schemeClr val="accent1"/>
+          </a:lnRef>
+          <a:fillRef idx="3">
+            <a:schemeClr val="accent1"/>
+          </a:fillRef>
+          <a:effectRef idx="2">
+            <a:schemeClr val="accent1"/>
+          </a:effectRef>
+          <a:fontRef idx="minor">
+            <a:schemeClr val="lt1"/>
+          </a:fontRef>
+        </p:style>
+        <p:txBody>
+          <a:bodyPr rtlCol="0" anchor="ctr"/>
+          <a:lstStyle/>
+          <a:p/>
+        </p:txBody>
+      </p:sp>
+      <p:sp>
+        <p:nvSpPr>
+          <p:cNvPr id="19" name="TextBox 18"/>
+          <p:cNvSpPr txBox="1"/>
+          <p:nvPr/>
+        </p:nvSpPr>
+        <p:spPr>
+          <a:xfrm>
+            <a:off x="12344400" y="4686300"/>
+            <a:ext cx="1905000" cy="552450"/>
           </a:xfrm>
           <a:prstGeom prst="rect">
             <a:avLst/>
@@ -7431,7 +7755,7 @@
               </a:lnSpc>
             </a:pPr>
             <a:r>
-              <a:rPr sz="1275" b="0">
+              <a:rPr sz="2175" b="1">
                 <a:solidFill>
                   <a:srgbClr val="7C766D"/>
                 </a:solidFill>
@@ -7439,35 +7763,134 @@
                 <a:ea typeface="IBM Plex Sans Arabic"/>
                 <a:cs typeface="IBM Plex Sans Arabic"/>
               </a:rPr>
-              <a:t>●  وكيل ذكاء اصطناعي</a:t>
-            </a:r>
-          </a:p>
-        </p:txBody>
-      </p:sp>
-      <p:pic>
-        <p:nvPicPr>
-          <p:cNvPr id="11" name="Picture 10" descr="engine.png"/>
-          <p:cNvPicPr>
-            <a:picLocks noChangeAspect="1"/>
-          </p:cNvPicPr>
-          <p:nvPr/>
-        </p:nvPicPr>
-        <p:blipFill>
-          <a:blip r:embed="rId2"/>
-          <a:stretch>
-            <a:fillRect/>
-          </a:stretch>
-        </p:blipFill>
-        <p:spPr>
-          <a:xfrm>
-            <a:off x="990600" y="2152650"/>
-            <a:ext cx="13258800" cy="4876800"/>
-          </a:xfrm>
-          <a:prstGeom prst="rect">
-            <a:avLst/>
-          </a:prstGeom>
-        </p:spPr>
-      </p:pic>
+              <a:t>الحداثة</a:t>
+            </a:r>
+          </a:p>
+        </p:txBody>
+      </p:sp>
+      <p:sp>
+        <p:nvSpPr>
+          <p:cNvPr id="20" name="TextBox 19"/>
+          <p:cNvSpPr txBox="1"/>
+          <p:nvPr/>
+        </p:nvSpPr>
+        <p:spPr>
+          <a:xfrm>
+            <a:off x="8534400" y="4705350"/>
+            <a:ext cx="3619500" cy="514350"/>
+          </a:xfrm>
+          <a:prstGeom prst="rect">
+            <a:avLst/>
+          </a:prstGeom>
+          <a:noFill/>
+        </p:spPr>
+        <p:txBody>
+          <a:bodyPr wrap="square" lIns="0" rIns="0" tIns="0" bIns="0" anchor="t">
+            <a:spAutoFit/>
+          </a:bodyPr>
+          <a:lstStyle/>
+          <a:p>
+            <a:pPr algn="l" rtl="1">
+              <a:lnSpc>
+                <a:spcPct val="135000"/>
+              </a:lnSpc>
+            </a:pPr>
+            <a:r>
+              <a:rPr sz="2025" b="0">
+                <a:solidFill>
+                  <a:srgbClr val="7C766D"/>
+                </a:solidFill>
+                <a:latin typeface="IBM Plex Sans Arabic"/>
+                <a:ea typeface="IBM Plex Sans Arabic"/>
+                <a:cs typeface="IBM Plex Sans Arabic"/>
+              </a:rPr>
+              <a:t>تقرير يطلع قديم</a:t>
+            </a:r>
+          </a:p>
+        </p:txBody>
+      </p:sp>
+      <p:sp>
+        <p:nvSpPr>
+          <p:cNvPr id="21" name="TextBox 20"/>
+          <p:cNvSpPr txBox="1"/>
+          <p:nvPr/>
+        </p:nvSpPr>
+        <p:spPr>
+          <a:xfrm>
+            <a:off x="4724400" y="4705350"/>
+            <a:ext cx="3619500" cy="514350"/>
+          </a:xfrm>
+          <a:prstGeom prst="rect">
+            <a:avLst/>
+          </a:prstGeom>
+          <a:noFill/>
+        </p:spPr>
+        <p:txBody>
+          <a:bodyPr wrap="square" lIns="0" rIns="0" tIns="0" bIns="0" anchor="t">
+            <a:spAutoFit/>
+          </a:bodyPr>
+          <a:lstStyle/>
+          <a:p>
+            <a:pPr algn="l" rtl="1">
+              <a:lnSpc>
+                <a:spcPct val="135000"/>
+              </a:lnSpc>
+            </a:pPr>
+            <a:r>
+              <a:rPr sz="2025" b="1">
+                <a:solidFill>
+                  <a:srgbClr val="F7F3EC"/>
+                </a:solidFill>
+                <a:latin typeface="IBM Plex Sans Arabic"/>
+                <a:ea typeface="IBM Plex Sans Arabic"/>
+                <a:cs typeface="IBM Plex Sans Arabic"/>
+              </a:rPr>
+              <a:t>يحدّث نفسه</a:t>
+            </a:r>
+          </a:p>
+        </p:txBody>
+      </p:sp>
+      <p:sp>
+        <p:nvSpPr>
+          <p:cNvPr id="22" name="TextBox 21"/>
+          <p:cNvSpPr txBox="1"/>
+          <p:nvPr/>
+        </p:nvSpPr>
+        <p:spPr>
+          <a:xfrm>
+            <a:off x="990600" y="5676900"/>
+            <a:ext cx="13258800" cy="800100"/>
+          </a:xfrm>
+          <a:prstGeom prst="rect">
+            <a:avLst/>
+          </a:prstGeom>
+          <a:noFill/>
+        </p:spPr>
+        <p:txBody>
+          <a:bodyPr wrap="square" lIns="0" rIns="0" tIns="0" bIns="0" anchor="t">
+            <a:spAutoFit/>
+          </a:bodyPr>
+          <a:lstStyle/>
+          <a:p>
+            <a:pPr algn="r" rtl="1">
+              <a:lnSpc>
+                <a:spcPct val="135000"/>
+              </a:lnSpc>
+            </a:pPr>
+            <a:r>
+              <a:rPr sz="4200" b="1">
+                <a:solidFill>
+                  <a:srgbClr val="F7F3EC"/>
+                </a:solidFill>
+                <a:latin typeface="IBM Plex Sans Arabic"/>
+                <a:ea typeface="IBM Plex Sans Arabic"/>
+                <a:cs typeface="IBM Plex Sans Arabic"/>
+              </a:rPr>
+              <a:t>نفس الشغل. بس بساعات، مو بسنوات.</a:t>
+            </a:r>
+          </a:p>
+        </p:txBody>
+      </p:sp>
     </p:spTree>
   </p:cSld>
   <p:clrMapOvr>
@@ -7605,7 +8028,7 @@
                 <a:ea typeface="IBM Plex Sans Arabic"/>
                 <a:cs typeface="IBM Plex Sans Arabic"/>
               </a:rPr>
-              <a:t>المُخرج</a:t>
+              <a:t>كامن اليوم</a:t>
             </a:r>
           </a:p>
         </p:txBody>
@@ -7688,7 +8111,7 @@
                 <a:ea typeface="IBM Plex Mono"/>
                 <a:cs typeface="IBM Plex Mono"/>
               </a:rPr>
-              <a:t>14 / 18</a:t>
+              <a:t>14 / 16</a:t>
             </a:r>
           </a:p>
         </p:txBody>
@@ -7734,30 +8157,1657 @@
           </a:p>
         </p:txBody>
       </p:sp>
-      <p:pic>
-        <p:nvPicPr>
-          <p:cNvPr id="8" name="Picture 7" descr="suppliers.png"/>
-          <p:cNvPicPr>
-            <a:picLocks noChangeAspect="1"/>
-          </p:cNvPicPr>
-          <p:nvPr/>
-        </p:nvPicPr>
-        <p:blipFill>
-          <a:blip r:embed="rId2"/>
-          <a:stretch>
-            <a:fillRect/>
-          </a:stretch>
-        </p:blipFill>
-        <p:spPr>
-          <a:xfrm>
-            <a:off x="990600" y="1400175"/>
-            <a:ext cx="13258800" cy="5467350"/>
-          </a:xfrm>
-          <a:prstGeom prst="rect">
-            <a:avLst/>
-          </a:prstGeom>
-        </p:spPr>
-      </p:pic>
+      <p:sp>
+        <p:nvSpPr>
+          <p:cNvPr id="8" name="TextBox 7"/>
+          <p:cNvSpPr txBox="1"/>
+          <p:nvPr/>
+        </p:nvSpPr>
+        <p:spPr>
+          <a:xfrm>
+            <a:off x="990600" y="1524000"/>
+            <a:ext cx="13258800" cy="838200"/>
+          </a:xfrm>
+          <a:prstGeom prst="rect">
+            <a:avLst/>
+          </a:prstGeom>
+          <a:noFill/>
+        </p:spPr>
+        <p:txBody>
+          <a:bodyPr wrap="square" lIns="0" rIns="0" tIns="0" bIns="0" anchor="t">
+            <a:spAutoFit/>
+          </a:bodyPr>
+          <a:lstStyle/>
+          <a:p>
+            <a:pPr algn="r" rtl="1">
+              <a:lnSpc>
+                <a:spcPct val="135000"/>
+              </a:lnSpc>
+            </a:pPr>
+            <a:r>
+              <a:rPr sz="4650" b="1">
+                <a:solidFill>
+                  <a:srgbClr val="F7F3EC"/>
+                </a:solidFill>
+                <a:latin typeface="IBM Plex Sans Arabic"/>
+                <a:ea typeface="IBM Plex Sans Arabic"/>
+                <a:cs typeface="IBM Plex Sans Arabic"/>
+              </a:rPr>
+              <a:t>كامن اليوم.</a:t>
+            </a:r>
+          </a:p>
+        </p:txBody>
+      </p:sp>
+      <p:sp>
+        <p:nvSpPr>
+          <p:cNvPr id="9" name="TextBox 8"/>
+          <p:cNvSpPr txBox="1"/>
+          <p:nvPr/>
+        </p:nvSpPr>
+        <p:spPr>
+          <a:xfrm>
+            <a:off x="990600" y="2400300"/>
+            <a:ext cx="13258800" cy="457200"/>
+          </a:xfrm>
+          <a:prstGeom prst="rect">
+            <a:avLst/>
+          </a:prstGeom>
+          <a:noFill/>
+        </p:spPr>
+        <p:txBody>
+          <a:bodyPr wrap="square" lIns="0" rIns="0" tIns="0" bIns="0" anchor="t">
+            <a:spAutoFit/>
+          </a:bodyPr>
+          <a:lstStyle/>
+          <a:p>
+            <a:pPr algn="r" rtl="1">
+              <a:lnSpc>
+                <a:spcPct val="135000"/>
+              </a:lnSpc>
+            </a:pPr>
+            <a:r>
+              <a:rPr sz="1800" b="0">
+                <a:solidFill>
+                  <a:srgbClr val="7C766D"/>
+                </a:solidFill>
+                <a:latin typeface="IBM Plex Sans Arabic"/>
+                <a:ea typeface="IBM Plex Sans Arabic"/>
+                <a:cs typeface="IBM Plex Sans Arabic"/>
+              </a:rPr>
+              <a:t>الأرقام من قاعدة البيانات، والتكلفة من الفواتير.</a:t>
+            </a:r>
+          </a:p>
+        </p:txBody>
+      </p:sp>
+      <p:sp>
+        <p:nvSpPr>
+          <p:cNvPr id="10" name="Rectangle 9"/>
+          <p:cNvSpPr/>
+          <p:nvPr/>
+        </p:nvSpPr>
+        <p:spPr>
+          <a:xfrm>
+            <a:off x="7581900" y="3009900"/>
+            <a:ext cx="9525" cy="4305300"/>
+          </a:xfrm>
+          <a:prstGeom prst="rect">
+            <a:avLst/>
+          </a:prstGeom>
+          <a:solidFill>
+            <a:srgbClr val="241F1B"/>
+          </a:solidFill>
+          <a:ln>
+            <a:noFill/>
+          </a:ln>
+          <a:effectLst/>
+        </p:spPr>
+        <p:style>
+          <a:lnRef idx="1">
+            <a:schemeClr val="accent1"/>
+          </a:lnRef>
+          <a:fillRef idx="3">
+            <a:schemeClr val="accent1"/>
+          </a:fillRef>
+          <a:effectRef idx="2">
+            <a:schemeClr val="accent1"/>
+          </a:effectRef>
+          <a:fontRef idx="minor">
+            <a:schemeClr val="lt1"/>
+          </a:fontRef>
+        </p:style>
+        <p:txBody>
+          <a:bodyPr rtlCol="0" anchor="ctr"/>
+          <a:lstStyle/>
+          <a:p/>
+        </p:txBody>
+      </p:sp>
+      <p:sp>
+        <p:nvSpPr>
+          <p:cNvPr id="11" name="TextBox 10"/>
+          <p:cNvSpPr txBox="1"/>
+          <p:nvPr/>
+        </p:nvSpPr>
+        <p:spPr>
+          <a:xfrm>
+            <a:off x="10439400" y="3028950"/>
+            <a:ext cx="3810000" cy="323850"/>
+          </a:xfrm>
+          <a:prstGeom prst="rect">
+            <a:avLst/>
+          </a:prstGeom>
+          <a:noFill/>
+        </p:spPr>
+        <p:txBody>
+          <a:bodyPr wrap="square" lIns="0" rIns="0" tIns="0" bIns="0" anchor="t">
+            <a:spAutoFit/>
+          </a:bodyPr>
+          <a:lstStyle/>
+          <a:p>
+            <a:pPr algn="l" rtl="1">
+              <a:lnSpc>
+                <a:spcPct val="135000"/>
+              </a:lnSpc>
+            </a:pPr>
+            <a:r>
+              <a:rPr sz="1275" b="0">
+                <a:solidFill>
+                  <a:srgbClr val="FF5C1A"/>
+                </a:solidFill>
+                <a:latin typeface="IBM Plex Sans Arabic"/>
+                <a:ea typeface="IBM Plex Sans Arabic"/>
+                <a:cs typeface="IBM Plex Sans Arabic"/>
+              </a:rPr>
+              <a:t>وش بناه</a:t>
+            </a:r>
+          </a:p>
+        </p:txBody>
+      </p:sp>
+      <p:sp>
+        <p:nvSpPr>
+          <p:cNvPr id="12" name="Rectangle 11"/>
+          <p:cNvSpPr/>
+          <p:nvPr/>
+        </p:nvSpPr>
+        <p:spPr>
+          <a:xfrm>
+            <a:off x="7962900" y="3352800"/>
+            <a:ext cx="6286500" cy="9525"/>
+          </a:xfrm>
+          <a:prstGeom prst="rect">
+            <a:avLst/>
+          </a:prstGeom>
+          <a:solidFill>
+            <a:srgbClr val="241F1B"/>
+          </a:solidFill>
+          <a:ln>
+            <a:noFill/>
+          </a:ln>
+          <a:effectLst/>
+        </p:spPr>
+        <p:style>
+          <a:lnRef idx="1">
+            <a:schemeClr val="accent1"/>
+          </a:lnRef>
+          <a:fillRef idx="3">
+            <a:schemeClr val="accent1"/>
+          </a:fillRef>
+          <a:effectRef idx="2">
+            <a:schemeClr val="accent1"/>
+          </a:effectRef>
+          <a:fontRef idx="minor">
+            <a:schemeClr val="lt1"/>
+          </a:fontRef>
+        </p:style>
+        <p:txBody>
+          <a:bodyPr rtlCol="0" anchor="ctr"/>
+          <a:lstStyle/>
+          <a:p/>
+        </p:txBody>
+      </p:sp>
+      <p:sp>
+        <p:nvSpPr>
+          <p:cNvPr id="13" name="TextBox 12"/>
+          <p:cNvSpPr txBox="1"/>
+          <p:nvPr/>
+        </p:nvSpPr>
+        <p:spPr>
+          <a:xfrm>
+            <a:off x="12439650" y="3543300"/>
+            <a:ext cx="1809750" cy="800100"/>
+          </a:xfrm>
+          <a:prstGeom prst="rect">
+            <a:avLst/>
+          </a:prstGeom>
+          <a:noFill/>
+        </p:spPr>
+        <p:txBody>
+          <a:bodyPr wrap="square" lIns="0" rIns="0" tIns="0" bIns="0" anchor="t">
+            <a:spAutoFit/>
+          </a:bodyPr>
+          <a:lstStyle/>
+          <a:p>
+            <a:pPr algn="r" rtl="1">
+              <a:lnSpc>
+                <a:spcPct val="135000"/>
+              </a:lnSpc>
+            </a:pPr>
+            <a:r>
+              <a:rPr sz="3150" b="1">
+                <a:solidFill>
+                  <a:srgbClr val="FF5C1A"/>
+                </a:solidFill>
+                <a:latin typeface="IBM Plex Sans Arabic"/>
+                <a:ea typeface="IBM Plex Sans Arabic"/>
+                <a:cs typeface="IBM Plex Sans Arabic"/>
+              </a:rPr>
+              <a:t>١٥,٠٢٥</a:t>
+            </a:r>
+          </a:p>
+        </p:txBody>
+      </p:sp>
+      <p:sp>
+        <p:nvSpPr>
+          <p:cNvPr id="14" name="TextBox 13"/>
+          <p:cNvSpPr txBox="1"/>
+          <p:nvPr/>
+        </p:nvSpPr>
+        <p:spPr>
+          <a:xfrm>
+            <a:off x="7962900" y="3657600"/>
+            <a:ext cx="4286250" cy="571500"/>
+          </a:xfrm>
+          <a:prstGeom prst="rect">
+            <a:avLst/>
+          </a:prstGeom>
+          <a:noFill/>
+        </p:spPr>
+        <p:txBody>
+          <a:bodyPr wrap="square" lIns="0" rIns="0" tIns="0" bIns="0" anchor="t">
+            <a:spAutoFit/>
+          </a:bodyPr>
+          <a:lstStyle/>
+          <a:p>
+            <a:pPr algn="l" rtl="1">
+              <a:lnSpc>
+                <a:spcPct val="150000"/>
+              </a:lnSpc>
+            </a:pPr>
+            <a:r>
+              <a:rPr sz="1575" b="0">
+                <a:solidFill>
+                  <a:srgbClr val="7C766D"/>
+                </a:solidFill>
+                <a:latin typeface="IBM Plex Sans Arabic"/>
+                <a:ea typeface="IBM Plex Sans Arabic"/>
+                <a:cs typeface="IBM Plex Sans Arabic"/>
+              </a:rPr>
+              <a:t>مورّد. شركة وحدة.</a:t>
+            </a:r>
+          </a:p>
+        </p:txBody>
+      </p:sp>
+      <p:sp>
+        <p:nvSpPr>
+          <p:cNvPr id="15" name="TextBox 14"/>
+          <p:cNvSpPr txBox="1"/>
+          <p:nvPr/>
+        </p:nvSpPr>
+        <p:spPr>
+          <a:xfrm>
+            <a:off x="7962900" y="4019550"/>
+            <a:ext cx="4381500" cy="419100"/>
+          </a:xfrm>
+          <a:prstGeom prst="rect">
+            <a:avLst/>
+          </a:prstGeom>
+          <a:noFill/>
+        </p:spPr>
+        <p:txBody>
+          <a:bodyPr wrap="square" lIns="0" rIns="0" tIns="0" bIns="0" anchor="t">
+            <a:spAutoFit/>
+          </a:bodyPr>
+          <a:lstStyle/>
+          <a:p>
+            <a:pPr algn="l" rtl="1">
+              <a:lnSpc>
+                <a:spcPct val="150000"/>
+              </a:lnSpc>
+            </a:pPr>
+            <a:r>
+              <a:rPr sz="1275" b="0">
+                <a:solidFill>
+                  <a:srgbClr val="4C463F"/>
+                </a:solidFill>
+                <a:latin typeface="IBM Plex Sans Arabic"/>
+                <a:ea typeface="IBM Plex Sans Arabic"/>
+                <a:cs typeface="IBM Plex Sans Arabic"/>
+              </a:rPr>
+              <a:t>ترميز ١٤,٨٧٣ · غرفة المدينة ١١٤ · صنع في السعودية ٢٨ · بلا سجل ١٠</a:t>
+            </a:r>
+          </a:p>
+        </p:txBody>
+      </p:sp>
+      <p:sp>
+        <p:nvSpPr>
+          <p:cNvPr id="16" name="Rectangle 15"/>
+          <p:cNvSpPr/>
+          <p:nvPr/>
+        </p:nvSpPr>
+        <p:spPr>
+          <a:xfrm>
+            <a:off x="7962900" y="4381500"/>
+            <a:ext cx="6286500" cy="9525"/>
+          </a:xfrm>
+          <a:prstGeom prst="rect">
+            <a:avLst/>
+          </a:prstGeom>
+          <a:solidFill>
+            <a:srgbClr val="241F1B"/>
+          </a:solidFill>
+          <a:ln>
+            <a:noFill/>
+          </a:ln>
+          <a:effectLst/>
+        </p:spPr>
+        <p:style>
+          <a:lnRef idx="1">
+            <a:schemeClr val="accent1"/>
+          </a:lnRef>
+          <a:fillRef idx="3">
+            <a:schemeClr val="accent1"/>
+          </a:fillRef>
+          <a:effectRef idx="2">
+            <a:schemeClr val="accent1"/>
+          </a:effectRef>
+          <a:fontRef idx="minor">
+            <a:schemeClr val="lt1"/>
+          </a:fontRef>
+        </p:style>
+        <p:txBody>
+          <a:bodyPr rtlCol="0" anchor="ctr"/>
+          <a:lstStyle/>
+          <a:p/>
+        </p:txBody>
+      </p:sp>
+      <p:sp>
+        <p:nvSpPr>
+          <p:cNvPr id="17" name="TextBox 16"/>
+          <p:cNvSpPr txBox="1"/>
+          <p:nvPr/>
+        </p:nvSpPr>
+        <p:spPr>
+          <a:xfrm>
+            <a:off x="12439650" y="4572000"/>
+            <a:ext cx="1809750" cy="800100"/>
+          </a:xfrm>
+          <a:prstGeom prst="rect">
+            <a:avLst/>
+          </a:prstGeom>
+          <a:noFill/>
+        </p:spPr>
+        <p:txBody>
+          <a:bodyPr wrap="square" lIns="0" rIns="0" tIns="0" bIns="0" anchor="t">
+            <a:spAutoFit/>
+          </a:bodyPr>
+          <a:lstStyle/>
+          <a:p>
+            <a:pPr algn="r" rtl="1">
+              <a:lnSpc>
+                <a:spcPct val="135000"/>
+              </a:lnSpc>
+            </a:pPr>
+            <a:r>
+              <a:rPr sz="3150" b="1">
+                <a:solidFill>
+                  <a:srgbClr val="F7F3EC"/>
+                </a:solidFill>
+                <a:latin typeface="IBM Plex Sans Arabic"/>
+                <a:ea typeface="IBM Plex Sans Arabic"/>
+                <a:cs typeface="IBM Plex Sans Arabic"/>
+              </a:rPr>
+              <a:t>٥١,٩٩٢</a:t>
+            </a:r>
+          </a:p>
+        </p:txBody>
+      </p:sp>
+      <p:sp>
+        <p:nvSpPr>
+          <p:cNvPr id="18" name="TextBox 17"/>
+          <p:cNvSpPr txBox="1"/>
+          <p:nvPr/>
+        </p:nvSpPr>
+        <p:spPr>
+          <a:xfrm>
+            <a:off x="7962900" y="4686300"/>
+            <a:ext cx="4286250" cy="571500"/>
+          </a:xfrm>
+          <a:prstGeom prst="rect">
+            <a:avLst/>
+          </a:prstGeom>
+          <a:noFill/>
+        </p:spPr>
+        <p:txBody>
+          <a:bodyPr wrap="square" lIns="0" rIns="0" tIns="0" bIns="0" anchor="t">
+            <a:spAutoFit/>
+          </a:bodyPr>
+          <a:lstStyle/>
+          <a:p>
+            <a:pPr algn="l" rtl="1">
+              <a:lnSpc>
+                <a:spcPct val="150000"/>
+              </a:lnSpc>
+            </a:pPr>
+            <a:r>
+              <a:rPr sz="1575" b="0">
+                <a:solidFill>
+                  <a:srgbClr val="7C766D"/>
+                </a:solidFill>
+                <a:latin typeface="IBM Plex Sans Arabic"/>
+                <a:ea typeface="IBM Plex Sans Arabic"/>
+                <a:cs typeface="IBM Plex Sans Arabic"/>
+              </a:rPr>
+              <a:t>قدرة. مورّد واحد. منتج واحد. بمواصفات محددة.</a:t>
+            </a:r>
+          </a:p>
+        </p:txBody>
+      </p:sp>
+      <p:sp>
+        <p:nvSpPr>
+          <p:cNvPr id="19" name="Rectangle 18"/>
+          <p:cNvSpPr/>
+          <p:nvPr/>
+        </p:nvSpPr>
+        <p:spPr>
+          <a:xfrm>
+            <a:off x="7962900" y="5410200"/>
+            <a:ext cx="6286500" cy="9525"/>
+          </a:xfrm>
+          <a:prstGeom prst="rect">
+            <a:avLst/>
+          </a:prstGeom>
+          <a:solidFill>
+            <a:srgbClr val="241F1B"/>
+          </a:solidFill>
+          <a:ln>
+            <a:noFill/>
+          </a:ln>
+          <a:effectLst/>
+        </p:spPr>
+        <p:style>
+          <a:lnRef idx="1">
+            <a:schemeClr val="accent1"/>
+          </a:lnRef>
+          <a:fillRef idx="3">
+            <a:schemeClr val="accent1"/>
+          </a:fillRef>
+          <a:effectRef idx="2">
+            <a:schemeClr val="accent1"/>
+          </a:effectRef>
+          <a:fontRef idx="minor">
+            <a:schemeClr val="lt1"/>
+          </a:fontRef>
+        </p:style>
+        <p:txBody>
+          <a:bodyPr rtlCol="0" anchor="ctr"/>
+          <a:lstStyle/>
+          <a:p/>
+        </p:txBody>
+      </p:sp>
+      <p:sp>
+        <p:nvSpPr>
+          <p:cNvPr id="20" name="TextBox 19"/>
+          <p:cNvSpPr txBox="1"/>
+          <p:nvPr/>
+        </p:nvSpPr>
+        <p:spPr>
+          <a:xfrm>
+            <a:off x="12439650" y="5600700"/>
+            <a:ext cx="1809750" cy="800100"/>
+          </a:xfrm>
+          <a:prstGeom prst="rect">
+            <a:avLst/>
+          </a:prstGeom>
+          <a:noFill/>
+        </p:spPr>
+        <p:txBody>
+          <a:bodyPr wrap="square" lIns="0" rIns="0" tIns="0" bIns="0" anchor="t">
+            <a:spAutoFit/>
+          </a:bodyPr>
+          <a:lstStyle/>
+          <a:p>
+            <a:pPr algn="r" rtl="1">
+              <a:lnSpc>
+                <a:spcPct val="135000"/>
+              </a:lnSpc>
+            </a:pPr>
+            <a:r>
+              <a:rPr sz="3150" b="1">
+                <a:solidFill>
+                  <a:srgbClr val="F7F3EC"/>
+                </a:solidFill>
+                <a:latin typeface="IBM Plex Sans Arabic"/>
+                <a:ea typeface="IBM Plex Sans Arabic"/>
+                <a:cs typeface="IBM Plex Sans Arabic"/>
+              </a:rPr>
+              <a:t>١,١٤٦</a:t>
+            </a:r>
+          </a:p>
+        </p:txBody>
+      </p:sp>
+      <p:sp>
+        <p:nvSpPr>
+          <p:cNvPr id="21" name="TextBox 20"/>
+          <p:cNvSpPr txBox="1"/>
+          <p:nvPr/>
+        </p:nvSpPr>
+        <p:spPr>
+          <a:xfrm>
+            <a:off x="7962900" y="5715000"/>
+            <a:ext cx="4286250" cy="571500"/>
+          </a:xfrm>
+          <a:prstGeom prst="rect">
+            <a:avLst/>
+          </a:prstGeom>
+          <a:noFill/>
+        </p:spPr>
+        <p:txBody>
+          <a:bodyPr wrap="square" lIns="0" rIns="0" tIns="0" bIns="0" anchor="t">
+            <a:spAutoFit/>
+          </a:bodyPr>
+          <a:lstStyle/>
+          <a:p>
+            <a:pPr algn="l" rtl="1">
+              <a:lnSpc>
+                <a:spcPct val="150000"/>
+              </a:lnSpc>
+            </a:pPr>
+            <a:r>
+              <a:rPr sz="1575" b="0">
+                <a:solidFill>
+                  <a:srgbClr val="7C766D"/>
+                </a:solidFill>
+                <a:latin typeface="IBM Plex Sans Arabic"/>
+                <a:ea typeface="IBM Plex Sans Arabic"/>
+                <a:cs typeface="IBM Plex Sans Arabic"/>
+              </a:rPr>
+              <a:t>تشغيلة وكيل.</a:t>
+            </a:r>
+          </a:p>
+        </p:txBody>
+      </p:sp>
+      <p:sp>
+        <p:nvSpPr>
+          <p:cNvPr id="22" name="TextBox 21"/>
+          <p:cNvSpPr txBox="1"/>
+          <p:nvPr/>
+        </p:nvSpPr>
+        <p:spPr>
+          <a:xfrm>
+            <a:off x="3771900" y="3028950"/>
+            <a:ext cx="3429000" cy="323850"/>
+          </a:xfrm>
+          <a:prstGeom prst="rect">
+            <a:avLst/>
+          </a:prstGeom>
+          <a:noFill/>
+        </p:spPr>
+        <p:txBody>
+          <a:bodyPr wrap="square" lIns="0" rIns="0" tIns="0" bIns="0" anchor="t">
+            <a:spAutoFit/>
+          </a:bodyPr>
+          <a:lstStyle/>
+          <a:p>
+            <a:pPr algn="l" rtl="1">
+              <a:lnSpc>
+                <a:spcPct val="135000"/>
+              </a:lnSpc>
+            </a:pPr>
+            <a:r>
+              <a:rPr sz="1275" b="0">
+                <a:solidFill>
+                  <a:srgbClr val="FF5C1A"/>
+                </a:solidFill>
+                <a:latin typeface="IBM Plex Sans Arabic"/>
+                <a:ea typeface="IBM Plex Sans Arabic"/>
+                <a:cs typeface="IBM Plex Sans Arabic"/>
+              </a:rPr>
+              <a:t>وش كلّف</a:t>
+            </a:r>
+          </a:p>
+        </p:txBody>
+      </p:sp>
+      <p:sp>
+        <p:nvSpPr>
+          <p:cNvPr id="23" name="Rectangle 22"/>
+          <p:cNvSpPr/>
+          <p:nvPr/>
+        </p:nvSpPr>
+        <p:spPr>
+          <a:xfrm>
+            <a:off x="990600" y="3352800"/>
+            <a:ext cx="6286500" cy="9525"/>
+          </a:xfrm>
+          <a:prstGeom prst="rect">
+            <a:avLst/>
+          </a:prstGeom>
+          <a:solidFill>
+            <a:srgbClr val="241F1B"/>
+          </a:solidFill>
+          <a:ln>
+            <a:noFill/>
+          </a:ln>
+          <a:effectLst/>
+        </p:spPr>
+        <p:style>
+          <a:lnRef idx="1">
+            <a:schemeClr val="accent1"/>
+          </a:lnRef>
+          <a:fillRef idx="3">
+            <a:schemeClr val="accent1"/>
+          </a:fillRef>
+          <a:effectRef idx="2">
+            <a:schemeClr val="accent1"/>
+          </a:effectRef>
+          <a:fontRef idx="minor">
+            <a:schemeClr val="lt1"/>
+          </a:fontRef>
+        </p:style>
+        <p:txBody>
+          <a:bodyPr rtlCol="0" anchor="ctr"/>
+          <a:lstStyle/>
+          <a:p/>
+        </p:txBody>
+      </p:sp>
+      <p:sp>
+        <p:nvSpPr>
+          <p:cNvPr id="24" name="TextBox 23"/>
+          <p:cNvSpPr txBox="1"/>
+          <p:nvPr/>
+        </p:nvSpPr>
+        <p:spPr>
+          <a:xfrm>
+            <a:off x="4267200" y="3486150"/>
+            <a:ext cx="3009900" cy="685800"/>
+          </a:xfrm>
+          <a:prstGeom prst="rect">
+            <a:avLst/>
+          </a:prstGeom>
+          <a:noFill/>
+        </p:spPr>
+        <p:txBody>
+          <a:bodyPr wrap="square" lIns="0" rIns="0" tIns="0" bIns="0" anchor="t">
+            <a:spAutoFit/>
+          </a:bodyPr>
+          <a:lstStyle/>
+          <a:p>
+            <a:pPr algn="r" rtl="1">
+              <a:lnSpc>
+                <a:spcPct val="135000"/>
+              </a:lnSpc>
+            </a:pPr>
+            <a:r>
+              <a:rPr sz="3900" b="1">
+                <a:solidFill>
+                  <a:srgbClr val="FF5C1A"/>
+                </a:solidFill>
+                <a:latin typeface="IBM Plex Sans Arabic"/>
+                <a:ea typeface="IBM Plex Sans Arabic"/>
+                <a:cs typeface="IBM Plex Sans Arabic"/>
+              </a:rPr>
+              <a:t>صفر ريال</a:t>
+            </a:r>
+          </a:p>
+        </p:txBody>
+      </p:sp>
+      <p:sp>
+        <p:nvSpPr>
+          <p:cNvPr id="25" name="TextBox 24"/>
+          <p:cNvSpPr txBox="1"/>
+          <p:nvPr/>
+        </p:nvSpPr>
+        <p:spPr>
+          <a:xfrm>
+            <a:off x="990600" y="3695700"/>
+            <a:ext cx="3143250" cy="400050"/>
+          </a:xfrm>
+          <a:prstGeom prst="rect">
+            <a:avLst/>
+          </a:prstGeom>
+          <a:noFill/>
+        </p:spPr>
+        <p:txBody>
+          <a:bodyPr wrap="square" lIns="0" rIns="0" tIns="0" bIns="0" anchor="t">
+            <a:spAutoFit/>
+          </a:bodyPr>
+          <a:lstStyle/>
+          <a:p>
+            <a:pPr algn="l" rtl="1">
+              <a:lnSpc>
+                <a:spcPct val="135000"/>
+              </a:lnSpc>
+            </a:pPr>
+            <a:r>
+              <a:rPr sz="1575" b="0">
+                <a:solidFill>
+                  <a:srgbClr val="7C766D"/>
+                </a:solidFill>
+                <a:latin typeface="IBM Plex Sans Arabic"/>
+                <a:ea typeface="IBM Plex Sans Arabic"/>
+                <a:cs typeface="IBM Plex Sans Arabic"/>
+              </a:rPr>
+              <a:t>على ٢.٩٣ مليون توكن دخل</a:t>
+            </a:r>
+          </a:p>
+        </p:txBody>
+      </p:sp>
+      <p:sp>
+        <p:nvSpPr>
+          <p:cNvPr id="26" name="TextBox 25"/>
+          <p:cNvSpPr txBox="1"/>
+          <p:nvPr/>
+        </p:nvSpPr>
+        <p:spPr>
+          <a:xfrm>
+            <a:off x="990600" y="4171950"/>
+            <a:ext cx="6286500" cy="571500"/>
+          </a:xfrm>
+          <a:prstGeom prst="rect">
+            <a:avLst/>
+          </a:prstGeom>
+          <a:noFill/>
+        </p:spPr>
+        <p:txBody>
+          <a:bodyPr wrap="square" lIns="0" rIns="0" tIns="0" bIns="0" anchor="t">
+            <a:spAutoFit/>
+          </a:bodyPr>
+          <a:lstStyle/>
+          <a:p>
+            <a:pPr algn="r" rtl="1">
+              <a:lnSpc>
+                <a:spcPct val="170000"/>
+              </a:lnSpc>
+            </a:pPr>
+            <a:r>
+              <a:rPr sz="1425" b="0">
+                <a:solidFill>
+                  <a:srgbClr val="7C766D"/>
+                </a:solidFill>
+                <a:latin typeface="IBM Plex Sans Arabic"/>
+                <a:ea typeface="IBM Plex Sans Arabic"/>
+                <a:cs typeface="IBM Plex Sans Arabic"/>
+              </a:rPr>
+              <a:t>qwen3.5:9b محلي على Ollama، وTavily على باقته المجانية. وما اتصلنا بأحد بعد.</a:t>
+            </a:r>
+          </a:p>
+        </p:txBody>
+      </p:sp>
+      <p:sp>
+        <p:nvSpPr>
+          <p:cNvPr id="27" name="TextBox 26"/>
+          <p:cNvSpPr txBox="1"/>
+          <p:nvPr/>
+        </p:nvSpPr>
+        <p:spPr>
+          <a:xfrm>
+            <a:off x="990600" y="4743450"/>
+            <a:ext cx="6286500" cy="304800"/>
+          </a:xfrm>
+          <a:prstGeom prst="rect">
+            <a:avLst/>
+          </a:prstGeom>
+          <a:noFill/>
+        </p:spPr>
+        <p:txBody>
+          <a:bodyPr wrap="square" lIns="0" rIns="0" tIns="0" bIns="0" anchor="t">
+            <a:spAutoFit/>
+          </a:bodyPr>
+          <a:lstStyle/>
+          <a:p>
+            <a:pPr algn="r" rtl="1">
+              <a:lnSpc>
+                <a:spcPct val="135000"/>
+              </a:lnSpc>
+            </a:pPr>
+            <a:r>
+              <a:rPr sz="1200" b="0">
+                <a:solidFill>
+                  <a:srgbClr val="FF5C1A"/>
+                </a:solidFill>
+                <a:latin typeface="IBM Plex Sans Arabic"/>
+                <a:ea typeface="IBM Plex Sans Arabic"/>
+                <a:cs typeface="IBM Plex Sans Arabic"/>
+              </a:rPr>
+              <a:t>النموذج · نفس ٢.٩٣ مليون توكن دخل</a:t>
+            </a:r>
+          </a:p>
+        </p:txBody>
+      </p:sp>
+      <p:sp>
+        <p:nvSpPr>
+          <p:cNvPr id="28" name="Rectangle 27"/>
+          <p:cNvSpPr/>
+          <p:nvPr/>
+        </p:nvSpPr>
+        <p:spPr>
+          <a:xfrm>
+            <a:off x="990600" y="4991100"/>
+            <a:ext cx="6286500" cy="9525"/>
+          </a:xfrm>
+          <a:prstGeom prst="rect">
+            <a:avLst/>
+          </a:prstGeom>
+          <a:solidFill>
+            <a:srgbClr val="241F1B"/>
+          </a:solidFill>
+          <a:ln>
+            <a:noFill/>
+          </a:ln>
+          <a:effectLst/>
+        </p:spPr>
+        <p:style>
+          <a:lnRef idx="1">
+            <a:schemeClr val="accent1"/>
+          </a:lnRef>
+          <a:fillRef idx="3">
+            <a:schemeClr val="accent1"/>
+          </a:fillRef>
+          <a:effectRef idx="2">
+            <a:schemeClr val="accent1"/>
+          </a:effectRef>
+          <a:fontRef idx="minor">
+            <a:schemeClr val="lt1"/>
+          </a:fontRef>
+        </p:style>
+        <p:txBody>
+          <a:bodyPr rtlCol="0" anchor="ctr"/>
+          <a:lstStyle/>
+          <a:p/>
+        </p:txBody>
+      </p:sp>
+      <p:sp>
+        <p:nvSpPr>
+          <p:cNvPr id="29" name="TextBox 28"/>
+          <p:cNvSpPr txBox="1"/>
+          <p:nvPr/>
+        </p:nvSpPr>
+        <p:spPr>
+          <a:xfrm>
+            <a:off x="3848100" y="5086350"/>
+            <a:ext cx="3429000" cy="323850"/>
+          </a:xfrm>
+          <a:prstGeom prst="rect">
+            <a:avLst/>
+          </a:prstGeom>
+          <a:noFill/>
+        </p:spPr>
+        <p:txBody>
+          <a:bodyPr wrap="square" lIns="0" rIns="0" tIns="0" bIns="0" anchor="t">
+            <a:spAutoFit/>
+          </a:bodyPr>
+          <a:lstStyle/>
+          <a:p>
+            <a:pPr algn="r">
+              <a:lnSpc>
+                <a:spcPct val="135000"/>
+              </a:lnSpc>
+            </a:pPr>
+            <a:r>
+              <a:rPr sz="1275" b="0">
+                <a:solidFill>
+                  <a:srgbClr val="F7F3EC"/>
+                </a:solidFill>
+                <a:latin typeface="IBM Plex Mono"/>
+                <a:ea typeface="IBM Plex Mono"/>
+                <a:cs typeface="IBM Plex Mono"/>
+              </a:rPr>
+              <a:t>Ollama · qwen3.5:9b</a:t>
+            </a:r>
+          </a:p>
+        </p:txBody>
+      </p:sp>
+      <p:sp>
+        <p:nvSpPr>
+          <p:cNvPr id="30" name="TextBox 29"/>
+          <p:cNvSpPr txBox="1"/>
+          <p:nvPr/>
+        </p:nvSpPr>
+        <p:spPr>
+          <a:xfrm>
+            <a:off x="990600" y="5076825"/>
+            <a:ext cx="1905000" cy="342900"/>
+          </a:xfrm>
+          <a:prstGeom prst="rect">
+            <a:avLst/>
+          </a:prstGeom>
+          <a:noFill/>
+        </p:spPr>
+        <p:txBody>
+          <a:bodyPr wrap="square" lIns="0" rIns="0" tIns="0" bIns="0" anchor="t">
+            <a:spAutoFit/>
+          </a:bodyPr>
+          <a:lstStyle/>
+          <a:p>
+            <a:pPr algn="l">
+              <a:lnSpc>
+                <a:spcPct val="135000"/>
+              </a:lnSpc>
+            </a:pPr>
+            <a:r>
+              <a:rPr sz="1350" b="1">
+                <a:solidFill>
+                  <a:srgbClr val="FF5C1A"/>
+                </a:solidFill>
+                <a:latin typeface="IBM Plex Mono"/>
+                <a:ea typeface="IBM Plex Mono"/>
+                <a:cs typeface="IBM Plex Mono"/>
+              </a:rPr>
+              <a:t>$0</a:t>
+            </a:r>
+          </a:p>
+        </p:txBody>
+      </p:sp>
+      <p:sp>
+        <p:nvSpPr>
+          <p:cNvPr id="31" name="Rectangle 30"/>
+          <p:cNvSpPr/>
+          <p:nvPr/>
+        </p:nvSpPr>
+        <p:spPr>
+          <a:xfrm>
+            <a:off x="990600" y="5372100"/>
+            <a:ext cx="6286500" cy="9525"/>
+          </a:xfrm>
+          <a:prstGeom prst="rect">
+            <a:avLst/>
+          </a:prstGeom>
+          <a:solidFill>
+            <a:srgbClr val="241F1B"/>
+          </a:solidFill>
+          <a:ln>
+            <a:noFill/>
+          </a:ln>
+          <a:effectLst/>
+        </p:spPr>
+        <p:style>
+          <a:lnRef idx="1">
+            <a:schemeClr val="accent1"/>
+          </a:lnRef>
+          <a:fillRef idx="3">
+            <a:schemeClr val="accent1"/>
+          </a:fillRef>
+          <a:effectRef idx="2">
+            <a:schemeClr val="accent1"/>
+          </a:effectRef>
+          <a:fontRef idx="minor">
+            <a:schemeClr val="lt1"/>
+          </a:fontRef>
+        </p:style>
+        <p:txBody>
+          <a:bodyPr rtlCol="0" anchor="ctr"/>
+          <a:lstStyle/>
+          <a:p/>
+        </p:txBody>
+      </p:sp>
+      <p:sp>
+        <p:nvSpPr>
+          <p:cNvPr id="32" name="TextBox 31"/>
+          <p:cNvSpPr txBox="1"/>
+          <p:nvPr/>
+        </p:nvSpPr>
+        <p:spPr>
+          <a:xfrm>
+            <a:off x="3848100" y="5467350"/>
+            <a:ext cx="3429000" cy="323850"/>
+          </a:xfrm>
+          <a:prstGeom prst="rect">
+            <a:avLst/>
+          </a:prstGeom>
+          <a:noFill/>
+        </p:spPr>
+        <p:txBody>
+          <a:bodyPr wrap="square" lIns="0" rIns="0" tIns="0" bIns="0" anchor="t">
+            <a:spAutoFit/>
+          </a:bodyPr>
+          <a:lstStyle/>
+          <a:p>
+            <a:pPr algn="r">
+              <a:lnSpc>
+                <a:spcPct val="135000"/>
+              </a:lnSpc>
+            </a:pPr>
+            <a:r>
+              <a:rPr sz="1275" b="0">
+                <a:solidFill>
+                  <a:srgbClr val="7C766D"/>
+                </a:solidFill>
+                <a:latin typeface="IBM Plex Mono"/>
+                <a:ea typeface="IBM Plex Mono"/>
+                <a:cs typeface="IBM Plex Mono"/>
+              </a:rPr>
+              <a:t>Gemini Flash</a:t>
+            </a:r>
+          </a:p>
+        </p:txBody>
+      </p:sp>
+      <p:sp>
+        <p:nvSpPr>
+          <p:cNvPr id="33" name="TextBox 32"/>
+          <p:cNvSpPr txBox="1"/>
+          <p:nvPr/>
+        </p:nvSpPr>
+        <p:spPr>
+          <a:xfrm>
+            <a:off x="990600" y="5457825"/>
+            <a:ext cx="1905000" cy="342900"/>
+          </a:xfrm>
+          <a:prstGeom prst="rect">
+            <a:avLst/>
+          </a:prstGeom>
+          <a:noFill/>
+        </p:spPr>
+        <p:txBody>
+          <a:bodyPr wrap="square" lIns="0" rIns="0" tIns="0" bIns="0" anchor="t">
+            <a:spAutoFit/>
+          </a:bodyPr>
+          <a:lstStyle/>
+          <a:p>
+            <a:pPr algn="l">
+              <a:lnSpc>
+                <a:spcPct val="135000"/>
+              </a:lnSpc>
+            </a:pPr>
+            <a:r>
+              <a:rPr sz="1350" b="1">
+                <a:solidFill>
+                  <a:srgbClr val="F7F3EC"/>
+                </a:solidFill>
+                <a:latin typeface="IBM Plex Mono"/>
+                <a:ea typeface="IBM Plex Mono"/>
+                <a:cs typeface="IBM Plex Mono"/>
+              </a:rPr>
+              <a:t>$2</a:t>
+            </a:r>
+          </a:p>
+        </p:txBody>
+      </p:sp>
+      <p:sp>
+        <p:nvSpPr>
+          <p:cNvPr id="34" name="Rectangle 33"/>
+          <p:cNvSpPr/>
+          <p:nvPr/>
+        </p:nvSpPr>
+        <p:spPr>
+          <a:xfrm>
+            <a:off x="990600" y="5753100"/>
+            <a:ext cx="6286500" cy="9525"/>
+          </a:xfrm>
+          <a:prstGeom prst="rect">
+            <a:avLst/>
+          </a:prstGeom>
+          <a:solidFill>
+            <a:srgbClr val="241F1B"/>
+          </a:solidFill>
+          <a:ln>
+            <a:noFill/>
+          </a:ln>
+          <a:effectLst/>
+        </p:spPr>
+        <p:style>
+          <a:lnRef idx="1">
+            <a:schemeClr val="accent1"/>
+          </a:lnRef>
+          <a:fillRef idx="3">
+            <a:schemeClr val="accent1"/>
+          </a:fillRef>
+          <a:effectRef idx="2">
+            <a:schemeClr val="accent1"/>
+          </a:effectRef>
+          <a:fontRef idx="minor">
+            <a:schemeClr val="lt1"/>
+          </a:fontRef>
+        </p:style>
+        <p:txBody>
+          <a:bodyPr rtlCol="0" anchor="ctr"/>
+          <a:lstStyle/>
+          <a:p/>
+        </p:txBody>
+      </p:sp>
+      <p:sp>
+        <p:nvSpPr>
+          <p:cNvPr id="35" name="TextBox 34"/>
+          <p:cNvSpPr txBox="1"/>
+          <p:nvPr/>
+        </p:nvSpPr>
+        <p:spPr>
+          <a:xfrm>
+            <a:off x="3848100" y="5848350"/>
+            <a:ext cx="3429000" cy="323850"/>
+          </a:xfrm>
+          <a:prstGeom prst="rect">
+            <a:avLst/>
+          </a:prstGeom>
+          <a:noFill/>
+        </p:spPr>
+        <p:txBody>
+          <a:bodyPr wrap="square" lIns="0" rIns="0" tIns="0" bIns="0" anchor="t">
+            <a:spAutoFit/>
+          </a:bodyPr>
+          <a:lstStyle/>
+          <a:p>
+            <a:pPr algn="r">
+              <a:lnSpc>
+                <a:spcPct val="135000"/>
+              </a:lnSpc>
+            </a:pPr>
+            <a:r>
+              <a:rPr sz="1275" b="0">
+                <a:solidFill>
+                  <a:srgbClr val="7C766D"/>
+                </a:solidFill>
+                <a:latin typeface="IBM Plex Mono"/>
+                <a:ea typeface="IBM Plex Mono"/>
+                <a:cs typeface="IBM Plex Mono"/>
+              </a:rPr>
+              <a:t>GPT-4o</a:t>
+            </a:r>
+          </a:p>
+        </p:txBody>
+      </p:sp>
+      <p:sp>
+        <p:nvSpPr>
+          <p:cNvPr id="36" name="TextBox 35"/>
+          <p:cNvSpPr txBox="1"/>
+          <p:nvPr/>
+        </p:nvSpPr>
+        <p:spPr>
+          <a:xfrm>
+            <a:off x="990600" y="5838825"/>
+            <a:ext cx="1905000" cy="342900"/>
+          </a:xfrm>
+          <a:prstGeom prst="rect">
+            <a:avLst/>
+          </a:prstGeom>
+          <a:noFill/>
+        </p:spPr>
+        <p:txBody>
+          <a:bodyPr wrap="square" lIns="0" rIns="0" tIns="0" bIns="0" anchor="t">
+            <a:spAutoFit/>
+          </a:bodyPr>
+          <a:lstStyle/>
+          <a:p>
+            <a:pPr algn="l">
+              <a:lnSpc>
+                <a:spcPct val="135000"/>
+              </a:lnSpc>
+            </a:pPr>
+            <a:r>
+              <a:rPr sz="1350" b="1">
+                <a:solidFill>
+                  <a:srgbClr val="F7F3EC"/>
+                </a:solidFill>
+                <a:latin typeface="IBM Plex Mono"/>
+                <a:ea typeface="IBM Plex Mono"/>
+                <a:cs typeface="IBM Plex Mono"/>
+              </a:rPr>
+              <a:t>$12</a:t>
+            </a:r>
+          </a:p>
+        </p:txBody>
+      </p:sp>
+      <p:sp>
+        <p:nvSpPr>
+          <p:cNvPr id="37" name="Rectangle 36"/>
+          <p:cNvSpPr/>
+          <p:nvPr/>
+        </p:nvSpPr>
+        <p:spPr>
+          <a:xfrm>
+            <a:off x="990600" y="6134100"/>
+            <a:ext cx="6286500" cy="9525"/>
+          </a:xfrm>
+          <a:prstGeom prst="rect">
+            <a:avLst/>
+          </a:prstGeom>
+          <a:solidFill>
+            <a:srgbClr val="241F1B"/>
+          </a:solidFill>
+          <a:ln>
+            <a:noFill/>
+          </a:ln>
+          <a:effectLst/>
+        </p:spPr>
+        <p:style>
+          <a:lnRef idx="1">
+            <a:schemeClr val="accent1"/>
+          </a:lnRef>
+          <a:fillRef idx="3">
+            <a:schemeClr val="accent1"/>
+          </a:fillRef>
+          <a:effectRef idx="2">
+            <a:schemeClr val="accent1"/>
+          </a:effectRef>
+          <a:fontRef idx="minor">
+            <a:schemeClr val="lt1"/>
+          </a:fontRef>
+        </p:style>
+        <p:txBody>
+          <a:bodyPr rtlCol="0" anchor="ctr"/>
+          <a:lstStyle/>
+          <a:p/>
+        </p:txBody>
+      </p:sp>
+      <p:sp>
+        <p:nvSpPr>
+          <p:cNvPr id="38" name="TextBox 37"/>
+          <p:cNvSpPr txBox="1"/>
+          <p:nvPr/>
+        </p:nvSpPr>
+        <p:spPr>
+          <a:xfrm>
+            <a:off x="3848100" y="6229350"/>
+            <a:ext cx="3429000" cy="323850"/>
+          </a:xfrm>
+          <a:prstGeom prst="rect">
+            <a:avLst/>
+          </a:prstGeom>
+          <a:noFill/>
+        </p:spPr>
+        <p:txBody>
+          <a:bodyPr wrap="square" lIns="0" rIns="0" tIns="0" bIns="0" anchor="t">
+            <a:spAutoFit/>
+          </a:bodyPr>
+          <a:lstStyle/>
+          <a:p>
+            <a:pPr algn="r">
+              <a:lnSpc>
+                <a:spcPct val="135000"/>
+              </a:lnSpc>
+            </a:pPr>
+            <a:r>
+              <a:rPr sz="1275" b="0">
+                <a:solidFill>
+                  <a:srgbClr val="7C766D"/>
+                </a:solidFill>
+                <a:latin typeface="IBM Plex Mono"/>
+                <a:ea typeface="IBM Plex Mono"/>
+                <a:cs typeface="IBM Plex Mono"/>
+              </a:rPr>
+              <a:t>Claude Opus</a:t>
+            </a:r>
+          </a:p>
+        </p:txBody>
+      </p:sp>
+      <p:sp>
+        <p:nvSpPr>
+          <p:cNvPr id="39" name="TextBox 38"/>
+          <p:cNvSpPr txBox="1"/>
+          <p:nvPr/>
+        </p:nvSpPr>
+        <p:spPr>
+          <a:xfrm>
+            <a:off x="990600" y="6219825"/>
+            <a:ext cx="1905000" cy="342900"/>
+          </a:xfrm>
+          <a:prstGeom prst="rect">
+            <a:avLst/>
+          </a:prstGeom>
+          <a:noFill/>
+        </p:spPr>
+        <p:txBody>
+          <a:bodyPr wrap="square" lIns="0" rIns="0" tIns="0" bIns="0" anchor="t">
+            <a:spAutoFit/>
+          </a:bodyPr>
+          <a:lstStyle/>
+          <a:p>
+            <a:pPr algn="l">
+              <a:lnSpc>
+                <a:spcPct val="135000"/>
+              </a:lnSpc>
+            </a:pPr>
+            <a:r>
+              <a:rPr sz="1350" b="1">
+                <a:solidFill>
+                  <a:srgbClr val="F7F3EC"/>
+                </a:solidFill>
+                <a:latin typeface="IBM Plex Mono"/>
+                <a:ea typeface="IBM Plex Mono"/>
+                <a:cs typeface="IBM Plex Mono"/>
+              </a:rPr>
+              <a:t>$81</a:t>
+            </a:r>
+          </a:p>
+        </p:txBody>
+      </p:sp>
+      <p:sp>
+        <p:nvSpPr>
+          <p:cNvPr id="40" name="TextBox 39"/>
+          <p:cNvSpPr txBox="1"/>
+          <p:nvPr/>
+        </p:nvSpPr>
+        <p:spPr>
+          <a:xfrm>
+            <a:off x="990600" y="6648450"/>
+            <a:ext cx="6286500" cy="304800"/>
+          </a:xfrm>
+          <a:prstGeom prst="rect">
+            <a:avLst/>
+          </a:prstGeom>
+          <a:noFill/>
+        </p:spPr>
+        <p:txBody>
+          <a:bodyPr wrap="square" lIns="0" rIns="0" tIns="0" bIns="0" anchor="t">
+            <a:spAutoFit/>
+          </a:bodyPr>
+          <a:lstStyle/>
+          <a:p>
+            <a:pPr algn="r" rtl="1">
+              <a:lnSpc>
+                <a:spcPct val="135000"/>
+              </a:lnSpc>
+            </a:pPr>
+            <a:r>
+              <a:rPr sz="1200" b="0">
+                <a:solidFill>
+                  <a:srgbClr val="FF5C1A"/>
+                </a:solidFill>
+                <a:latin typeface="IBM Plex Sans Arabic"/>
+                <a:ea typeface="IBM Plex Sans Arabic"/>
+                <a:cs typeface="IBM Plex Sans Arabic"/>
+              </a:rPr>
+              <a:t>البحث والمكالمات</a:t>
+            </a:r>
+          </a:p>
+        </p:txBody>
+      </p:sp>
+      <p:sp>
+        <p:nvSpPr>
+          <p:cNvPr id="41" name="Rectangle 40"/>
+          <p:cNvSpPr/>
+          <p:nvPr/>
+        </p:nvSpPr>
+        <p:spPr>
+          <a:xfrm>
+            <a:off x="990600" y="6896100"/>
+            <a:ext cx="6286500" cy="9525"/>
+          </a:xfrm>
+          <a:prstGeom prst="rect">
+            <a:avLst/>
+          </a:prstGeom>
+          <a:solidFill>
+            <a:srgbClr val="241F1B"/>
+          </a:solidFill>
+          <a:ln>
+            <a:noFill/>
+          </a:ln>
+          <a:effectLst/>
+        </p:spPr>
+        <p:style>
+          <a:lnRef idx="1">
+            <a:schemeClr val="accent1"/>
+          </a:lnRef>
+          <a:fillRef idx="3">
+            <a:schemeClr val="accent1"/>
+          </a:fillRef>
+          <a:effectRef idx="2">
+            <a:schemeClr val="accent1"/>
+          </a:effectRef>
+          <a:fontRef idx="minor">
+            <a:schemeClr val="lt1"/>
+          </a:fontRef>
+        </p:style>
+        <p:txBody>
+          <a:bodyPr rtlCol="0" anchor="ctr"/>
+          <a:lstStyle/>
+          <a:p/>
+        </p:txBody>
+      </p:sp>
+      <p:sp>
+        <p:nvSpPr>
+          <p:cNvPr id="42" name="TextBox 41"/>
+          <p:cNvSpPr txBox="1"/>
+          <p:nvPr/>
+        </p:nvSpPr>
+        <p:spPr>
+          <a:xfrm>
+            <a:off x="3848100" y="6991350"/>
+            <a:ext cx="3429000" cy="323850"/>
+          </a:xfrm>
+          <a:prstGeom prst="rect">
+            <a:avLst/>
+          </a:prstGeom>
+          <a:noFill/>
+        </p:spPr>
+        <p:txBody>
+          <a:bodyPr wrap="square" lIns="0" rIns="0" tIns="0" bIns="0" anchor="t">
+            <a:spAutoFit/>
+          </a:bodyPr>
+          <a:lstStyle/>
+          <a:p>
+            <a:pPr algn="r">
+              <a:lnSpc>
+                <a:spcPct val="135000"/>
+              </a:lnSpc>
+            </a:pPr>
+            <a:r>
+              <a:rPr sz="1275" b="0">
+                <a:solidFill>
+                  <a:srgbClr val="7C766D"/>
+                </a:solidFill>
+                <a:latin typeface="IBM Plex Mono"/>
+                <a:ea typeface="IBM Plex Mono"/>
+                <a:cs typeface="IBM Plex Mono"/>
+              </a:rPr>
+              <a:t>Tavily · 507 searches</a:t>
+            </a:r>
+          </a:p>
+        </p:txBody>
+      </p:sp>
+      <p:sp>
+        <p:nvSpPr>
+          <p:cNvPr id="43" name="TextBox 42"/>
+          <p:cNvSpPr txBox="1"/>
+          <p:nvPr/>
+        </p:nvSpPr>
+        <p:spPr>
+          <a:xfrm>
+            <a:off x="990600" y="6981825"/>
+            <a:ext cx="1905000" cy="342900"/>
+          </a:xfrm>
+          <a:prstGeom prst="rect">
+            <a:avLst/>
+          </a:prstGeom>
+          <a:noFill/>
+        </p:spPr>
+        <p:txBody>
+          <a:bodyPr wrap="square" lIns="0" rIns="0" tIns="0" bIns="0" anchor="t">
+            <a:spAutoFit/>
+          </a:bodyPr>
+          <a:lstStyle/>
+          <a:p>
+            <a:pPr algn="l">
+              <a:lnSpc>
+                <a:spcPct val="135000"/>
+              </a:lnSpc>
+            </a:pPr>
+            <a:r>
+              <a:rPr sz="1350" b="1">
+                <a:solidFill>
+                  <a:srgbClr val="F7F3EC"/>
+                </a:solidFill>
+                <a:latin typeface="IBM Plex Mono"/>
+                <a:ea typeface="IBM Plex Mono"/>
+                <a:cs typeface="IBM Plex Mono"/>
+              </a:rPr>
+              <a:t>$4</a:t>
+            </a:r>
+          </a:p>
+        </p:txBody>
+      </p:sp>
+      <p:sp>
+        <p:nvSpPr>
+          <p:cNvPr id="44" name="Rectangle 43"/>
+          <p:cNvSpPr/>
+          <p:nvPr/>
+        </p:nvSpPr>
+        <p:spPr>
+          <a:xfrm>
+            <a:off x="990600" y="7277100"/>
+            <a:ext cx="6286500" cy="9525"/>
+          </a:xfrm>
+          <a:prstGeom prst="rect">
+            <a:avLst/>
+          </a:prstGeom>
+          <a:solidFill>
+            <a:srgbClr val="241F1B"/>
+          </a:solidFill>
+          <a:ln>
+            <a:noFill/>
+          </a:ln>
+          <a:effectLst/>
+        </p:spPr>
+        <p:style>
+          <a:lnRef idx="1">
+            <a:schemeClr val="accent1"/>
+          </a:lnRef>
+          <a:fillRef idx="3">
+            <a:schemeClr val="accent1"/>
+          </a:fillRef>
+          <a:effectRef idx="2">
+            <a:schemeClr val="accent1"/>
+          </a:effectRef>
+          <a:fontRef idx="minor">
+            <a:schemeClr val="lt1"/>
+          </a:fontRef>
+        </p:style>
+        <p:txBody>
+          <a:bodyPr rtlCol="0" anchor="ctr"/>
+          <a:lstStyle/>
+          <a:p/>
+        </p:txBody>
+      </p:sp>
+      <p:sp>
+        <p:nvSpPr>
+          <p:cNvPr id="45" name="TextBox 44"/>
+          <p:cNvSpPr txBox="1"/>
+          <p:nvPr/>
+        </p:nvSpPr>
+        <p:spPr>
+          <a:xfrm>
+            <a:off x="3848100" y="7372350"/>
+            <a:ext cx="3429000" cy="323850"/>
+          </a:xfrm>
+          <a:prstGeom prst="rect">
+            <a:avLst/>
+          </a:prstGeom>
+          <a:noFill/>
+        </p:spPr>
+        <p:txBody>
+          <a:bodyPr wrap="square" lIns="0" rIns="0" tIns="0" bIns="0" anchor="t">
+            <a:spAutoFit/>
+          </a:bodyPr>
+          <a:lstStyle/>
+          <a:p>
+            <a:pPr algn="r">
+              <a:lnSpc>
+                <a:spcPct val="135000"/>
+              </a:lnSpc>
+            </a:pPr>
+            <a:r>
+              <a:rPr sz="1275" b="0">
+                <a:solidFill>
+                  <a:srgbClr val="7C766D"/>
+                </a:solidFill>
+                <a:latin typeface="IBM Plex Mono"/>
+                <a:ea typeface="IBM Plex Mono"/>
+                <a:cs typeface="IBM Plex Mono"/>
+              </a:rPr>
+              <a:t>Voice call · per call</a:t>
+            </a:r>
+          </a:p>
+        </p:txBody>
+      </p:sp>
+      <p:sp>
+        <p:nvSpPr>
+          <p:cNvPr id="46" name="TextBox 45"/>
+          <p:cNvSpPr txBox="1"/>
+          <p:nvPr/>
+        </p:nvSpPr>
+        <p:spPr>
+          <a:xfrm>
+            <a:off x="990600" y="7362825"/>
+            <a:ext cx="1905000" cy="342900"/>
+          </a:xfrm>
+          <a:prstGeom prst="rect">
+            <a:avLst/>
+          </a:prstGeom>
+          <a:noFill/>
+        </p:spPr>
+        <p:txBody>
+          <a:bodyPr wrap="square" lIns="0" rIns="0" tIns="0" bIns="0" anchor="t">
+            <a:spAutoFit/>
+          </a:bodyPr>
+          <a:lstStyle/>
+          <a:p>
+            <a:pPr algn="l">
+              <a:lnSpc>
+                <a:spcPct val="135000"/>
+              </a:lnSpc>
+            </a:pPr>
+            <a:r>
+              <a:rPr sz="1350" b="1">
+                <a:solidFill>
+                  <a:srgbClr val="F7F3EC"/>
+                </a:solidFill>
+                <a:latin typeface="IBM Plex Mono"/>
+                <a:ea typeface="IBM Plex Mono"/>
+                <a:cs typeface="IBM Plex Mono"/>
+              </a:rPr>
+              <a:t>$0.90</a:t>
+            </a:r>
+          </a:p>
+        </p:txBody>
+      </p:sp>
+      <p:sp>
+        <p:nvSpPr>
+          <p:cNvPr id="47" name="TextBox 46"/>
+          <p:cNvSpPr txBox="1"/>
+          <p:nvPr/>
+        </p:nvSpPr>
+        <p:spPr>
+          <a:xfrm>
+            <a:off x="990600" y="7734300"/>
+            <a:ext cx="6286500" cy="285750"/>
+          </a:xfrm>
+          <a:prstGeom prst="rect">
+            <a:avLst/>
+          </a:prstGeom>
+          <a:noFill/>
+        </p:spPr>
+        <p:txBody>
+          <a:bodyPr wrap="square" lIns="0" rIns="0" tIns="0" bIns="0" anchor="t">
+            <a:spAutoFit/>
+          </a:bodyPr>
+          <a:lstStyle/>
+          <a:p>
+            <a:pPr algn="l" rtl="1">
+              <a:lnSpc>
+                <a:spcPct val="135000"/>
+              </a:lnSpc>
+            </a:pPr>
+            <a:r>
+              <a:rPr sz="1125" b="0">
+                <a:solidFill>
+                  <a:srgbClr val="4C463F"/>
+                </a:solidFill>
+                <a:latin typeface="IBM Plex Sans Arabic"/>
+                <a:ea typeface="IBM Plex Sans Arabic"/>
+                <a:cs typeface="IBM Plex Sans Arabic"/>
+              </a:rPr>
+              <a:t>أسعار قوائم تقريبية. والمكالمة تقدير لثلاث دقايق.</a:t>
+            </a:r>
+          </a:p>
+        </p:txBody>
+      </p:sp>
     </p:spTree>
   </p:cSld>
   <p:clrMapOvr>
@@ -7820,102 +9870,20 @@
       </p:sp>
       <p:sp>
         <p:nvSpPr>
-          <p:cNvPr id="3" name="TextBox 2"/>
-          <p:cNvSpPr txBox="1"/>
-          <p:nvPr/>
-        </p:nvSpPr>
-        <p:spPr>
-          <a:xfrm>
-            <a:off x="990600" y="800100"/>
-            <a:ext cx="3810000" cy="285750"/>
-          </a:xfrm>
-          <a:prstGeom prst="rect">
-            <a:avLst/>
-          </a:prstGeom>
-          <a:noFill/>
-        </p:spPr>
-        <p:txBody>
-          <a:bodyPr wrap="square" lIns="0" rIns="0" tIns="0" bIns="0" anchor="t">
-            <a:spAutoFit/>
-          </a:bodyPr>
-          <a:lstStyle/>
-          <a:p>
-            <a:pPr algn="r" rtl="1">
-              <a:lnSpc>
-                <a:spcPct val="135000"/>
-              </a:lnSpc>
-            </a:pPr>
-            <a:r>
-              <a:rPr sz="1125" b="0">
-                <a:solidFill>
-                  <a:srgbClr val="7C766D"/>
-                </a:solidFill>
-                <a:latin typeface="IBM Plex Mono"/>
-                <a:ea typeface="IBM Plex Mono"/>
-                <a:cs typeface="IBM Plex Mono"/>
-              </a:rPr>
-              <a:t>15</a:t>
-            </a:r>
-          </a:p>
-        </p:txBody>
-      </p:sp>
-      <p:sp>
-        <p:nvSpPr>
-          <p:cNvPr id="4" name="TextBox 3"/>
-          <p:cNvSpPr txBox="1"/>
-          <p:nvPr/>
-        </p:nvSpPr>
-        <p:spPr>
-          <a:xfrm>
-            <a:off x="10439400" y="800100"/>
-            <a:ext cx="3810000" cy="342900"/>
-          </a:xfrm>
-          <a:prstGeom prst="rect">
-            <a:avLst/>
-          </a:prstGeom>
-          <a:noFill/>
-        </p:spPr>
-        <p:txBody>
-          <a:bodyPr wrap="square" lIns="0" rIns="0" tIns="0" bIns="0" anchor="t">
-            <a:spAutoFit/>
-          </a:bodyPr>
-          <a:lstStyle/>
-          <a:p>
-            <a:pPr algn="l" rtl="1">
-              <a:lnSpc>
-                <a:spcPct val="135000"/>
-              </a:lnSpc>
-            </a:pPr>
-            <a:r>
-              <a:rPr sz="1350" b="0">
-                <a:solidFill>
-                  <a:srgbClr val="7C766D"/>
-                </a:solidFill>
-                <a:latin typeface="IBM Plex Sans Arabic"/>
-                <a:ea typeface="IBM Plex Sans Arabic"/>
-                <a:cs typeface="IBM Plex Sans Arabic"/>
-              </a:rPr>
-              <a:t>الحساب</a:t>
-            </a:r>
-          </a:p>
-        </p:txBody>
-      </p:sp>
-      <p:sp>
-        <p:nvSpPr>
-          <p:cNvPr id="5" name="Rectangle 4"/>
+          <p:cNvPr id="3" name="Rectangle 2"/>
           <p:cNvSpPr/>
           <p:nvPr/>
         </p:nvSpPr>
         <p:spPr>
           <a:xfrm>
-            <a:off x="990600" y="7620000"/>
-            <a:ext cx="13258800" cy="9525"/>
+            <a:off x="11010900" y="2247900"/>
+            <a:ext cx="3238500" cy="114300"/>
           </a:xfrm>
           <a:prstGeom prst="rect">
             <a:avLst/>
           </a:prstGeom>
           <a:solidFill>
-            <a:srgbClr val="241F1B"/>
+            <a:srgbClr val="FF5C1A"/>
           </a:solidFill>
           <a:ln>
             <a:noFill/>
@@ -7944,14 +9912,96 @@
       </p:sp>
       <p:sp>
         <p:nvSpPr>
+          <p:cNvPr id="4" name="TextBox 3"/>
+          <p:cNvSpPr txBox="1"/>
+          <p:nvPr/>
+        </p:nvSpPr>
+        <p:spPr>
+          <a:xfrm>
+            <a:off x="990600" y="2781300"/>
+            <a:ext cx="13258800" cy="1143000"/>
+          </a:xfrm>
+          <a:prstGeom prst="rect">
+            <a:avLst/>
+          </a:prstGeom>
+          <a:noFill/>
+        </p:spPr>
+        <p:txBody>
+          <a:bodyPr wrap="square" lIns="0" rIns="0" tIns="0" bIns="0" anchor="t">
+            <a:spAutoFit/>
+          </a:bodyPr>
+          <a:lstStyle/>
+          <a:p>
+            <a:pPr algn="r" rtl="1">
+              <a:lnSpc>
+                <a:spcPct val="130000"/>
+              </a:lnSpc>
+            </a:pPr>
+            <a:r>
+              <a:rPr sz="6450" b="1">
+                <a:solidFill>
+                  <a:srgbClr val="7C766D"/>
+                </a:solidFill>
+                <a:latin typeface="IBM Plex Sans Arabic"/>
+                <a:ea typeface="IBM Plex Sans Arabic"/>
+                <a:cs typeface="IBM Plex Sans Arabic"/>
+              </a:rPr>
+              <a:t>مساهمة تعرف مين سجّل.</a:t>
+            </a:r>
+          </a:p>
+        </p:txBody>
+      </p:sp>
+      <p:sp>
+        <p:nvSpPr>
+          <p:cNvPr id="5" name="TextBox 4"/>
+          <p:cNvSpPr txBox="1"/>
+          <p:nvPr/>
+        </p:nvSpPr>
+        <p:spPr>
+          <a:xfrm>
+            <a:off x="990600" y="3848100"/>
+            <a:ext cx="13258800" cy="1143000"/>
+          </a:xfrm>
+          <a:prstGeom prst="rect">
+            <a:avLst/>
+          </a:prstGeom>
+          <a:noFill/>
+        </p:spPr>
+        <p:txBody>
+          <a:bodyPr wrap="square" lIns="0" rIns="0" tIns="0" bIns="0" anchor="t">
+            <a:spAutoFit/>
+          </a:bodyPr>
+          <a:lstStyle/>
+          <a:p>
+            <a:pPr algn="r" rtl="1">
+              <a:lnSpc>
+                <a:spcPct val="130000"/>
+              </a:lnSpc>
+            </a:pPr>
+            <a:r>
+              <a:rPr sz="6450" b="1">
+                <a:solidFill>
+                  <a:srgbClr val="F7F3EC"/>
+                </a:solidFill>
+                <a:latin typeface="IBM Plex Sans Arabic"/>
+                <a:ea typeface="IBM Plex Sans Arabic"/>
+                <a:cs typeface="IBM Plex Sans Arabic"/>
+              </a:rPr>
+              <a:t>كامن يعرف اللي ما رفع يده.</a:t>
+            </a:r>
+          </a:p>
+        </p:txBody>
+      </p:sp>
+      <p:sp>
+        <p:nvSpPr>
           <p:cNvPr id="6" name="TextBox 5"/>
           <p:cNvSpPr txBox="1"/>
           <p:nvPr/>
         </p:nvSpPr>
         <p:spPr>
           <a:xfrm>
-            <a:off x="990600" y="7734300"/>
-            <a:ext cx="3810000" cy="266700"/>
+            <a:off x="990600" y="5295900"/>
+            <a:ext cx="13258800" cy="571500"/>
           </a:xfrm>
           <a:prstGeom prst="rect">
             <a:avLst/>
@@ -7970,48 +10020,7 @@
               </a:lnSpc>
             </a:pPr>
             <a:r>
-              <a:rPr sz="1050" b="0">
-                <a:solidFill>
-                  <a:srgbClr val="241F1B"/>
-                </a:solidFill>
-                <a:latin typeface="IBM Plex Mono"/>
-                <a:ea typeface="IBM Plex Mono"/>
-                <a:cs typeface="IBM Plex Mono"/>
-              </a:rPr>
-              <a:t>15 / 18</a:t>
-            </a:r>
-          </a:p>
-        </p:txBody>
-      </p:sp>
-      <p:sp>
-        <p:nvSpPr>
-          <p:cNvPr id="7" name="TextBox 6"/>
-          <p:cNvSpPr txBox="1"/>
-          <p:nvPr/>
-        </p:nvSpPr>
-        <p:spPr>
-          <a:xfrm>
-            <a:off x="10439400" y="7715250"/>
-            <a:ext cx="3810000" cy="304800"/>
-          </a:xfrm>
-          <a:prstGeom prst="rect">
-            <a:avLst/>
-          </a:prstGeom>
-          <a:noFill/>
-        </p:spPr>
-        <p:txBody>
-          <a:bodyPr wrap="square" lIns="0" rIns="0" tIns="0" bIns="0" anchor="t">
-            <a:spAutoFit/>
-          </a:bodyPr>
-          <a:lstStyle/>
-          <a:p>
-            <a:pPr algn="l" rtl="1">
-              <a:lnSpc>
-                <a:spcPct val="135000"/>
-              </a:lnSpc>
-            </a:pPr>
-            <a:r>
-              <a:rPr sz="1200" b="1">
+              <a:rPr sz="2250" b="0">
                 <a:solidFill>
                   <a:srgbClr val="7C766D"/>
                 </a:solidFill>
@@ -8019,625 +10028,7 @@
                 <a:ea typeface="IBM Plex Sans Arabic"/>
                 <a:cs typeface="IBM Plex Sans Arabic"/>
               </a:rPr>
-              <a:t>كامن</a:t>
-            </a:r>
-          </a:p>
-        </p:txBody>
-      </p:sp>
-      <p:sp>
-        <p:nvSpPr>
-          <p:cNvPr id="8" name="TextBox 7"/>
-          <p:cNvSpPr txBox="1"/>
-          <p:nvPr/>
-        </p:nvSpPr>
-        <p:spPr>
-          <a:xfrm>
-            <a:off x="10439400" y="2324100"/>
-            <a:ext cx="3810000" cy="323850"/>
-          </a:xfrm>
-          <a:prstGeom prst="rect">
-            <a:avLst/>
-          </a:prstGeom>
-          <a:noFill/>
-        </p:spPr>
-        <p:txBody>
-          <a:bodyPr wrap="square" lIns="0" rIns="0" tIns="0" bIns="0" anchor="t">
-            <a:spAutoFit/>
-          </a:bodyPr>
-          <a:lstStyle/>
-          <a:p>
-            <a:pPr algn="l" rtl="1">
-              <a:lnSpc>
-                <a:spcPct val="135000"/>
-              </a:lnSpc>
-            </a:pPr>
-            <a:r>
-              <a:rPr sz="1275" b="0">
-                <a:solidFill>
-                  <a:srgbClr val="7C766D"/>
-                </a:solidFill>
-                <a:latin typeface="IBM Plex Sans Arabic"/>
-                <a:ea typeface="IBM Plex Sans Arabic"/>
-                <a:cs typeface="IBM Plex Sans Arabic"/>
-              </a:rPr>
-              <a:t>الطريقة القديمة</a:t>
-            </a:r>
-          </a:p>
-        </p:txBody>
-      </p:sp>
-      <p:sp>
-        <p:nvSpPr>
-          <p:cNvPr id="9" name="TextBox 8"/>
-          <p:cNvSpPr txBox="1"/>
-          <p:nvPr/>
-        </p:nvSpPr>
-        <p:spPr>
-          <a:xfrm>
-            <a:off x="5676900" y="2324100"/>
-            <a:ext cx="3810000" cy="323850"/>
-          </a:xfrm>
-          <a:prstGeom prst="rect">
-            <a:avLst/>
-          </a:prstGeom>
-          <a:noFill/>
-        </p:spPr>
-        <p:txBody>
-          <a:bodyPr wrap="square" lIns="0" rIns="0" tIns="0" bIns="0" anchor="t">
-            <a:spAutoFit/>
-          </a:bodyPr>
-          <a:lstStyle/>
-          <a:p>
-            <a:pPr algn="l" rtl="1">
-              <a:lnSpc>
-                <a:spcPct val="135000"/>
-              </a:lnSpc>
-            </a:pPr>
-            <a:r>
-              <a:rPr sz="1275" b="0">
-                <a:solidFill>
-                  <a:srgbClr val="FF5C1A"/>
-                </a:solidFill>
-                <a:latin typeface="IBM Plex Sans Arabic"/>
-                <a:ea typeface="IBM Plex Sans Arabic"/>
-                <a:cs typeface="IBM Plex Sans Arabic"/>
-              </a:rPr>
-              <a:t>كامن</a:t>
-            </a:r>
-          </a:p>
-        </p:txBody>
-      </p:sp>
-      <p:sp>
-        <p:nvSpPr>
-          <p:cNvPr id="10" name="Rectangle 9"/>
-          <p:cNvSpPr/>
-          <p:nvPr/>
-        </p:nvSpPr>
-        <p:spPr>
-          <a:xfrm>
-            <a:off x="990600" y="2724150"/>
-            <a:ext cx="13258800" cy="9525"/>
-          </a:xfrm>
-          <a:prstGeom prst="rect">
-            <a:avLst/>
-          </a:prstGeom>
-          <a:solidFill>
-            <a:srgbClr val="241F1B"/>
-          </a:solidFill>
-          <a:ln>
-            <a:noFill/>
-          </a:ln>
-          <a:effectLst/>
-        </p:spPr>
-        <p:style>
-          <a:lnRef idx="1">
-            <a:schemeClr val="accent1"/>
-          </a:lnRef>
-          <a:fillRef idx="3">
-            <a:schemeClr val="accent1"/>
-          </a:fillRef>
-          <a:effectRef idx="2">
-            <a:schemeClr val="accent1"/>
-          </a:effectRef>
-          <a:fontRef idx="minor">
-            <a:schemeClr val="lt1"/>
-          </a:fontRef>
-        </p:style>
-        <p:txBody>
-          <a:bodyPr rtlCol="0" anchor="ctr"/>
-          <a:lstStyle/>
-          <a:p/>
-        </p:txBody>
-      </p:sp>
-      <p:sp>
-        <p:nvSpPr>
-          <p:cNvPr id="11" name="TextBox 10"/>
-          <p:cNvSpPr txBox="1"/>
-          <p:nvPr/>
-        </p:nvSpPr>
-        <p:spPr>
-          <a:xfrm>
-            <a:off x="12344400" y="2971800"/>
-            <a:ext cx="1905000" cy="552450"/>
-          </a:xfrm>
-          <a:prstGeom prst="rect">
-            <a:avLst/>
-          </a:prstGeom>
-          <a:noFill/>
-        </p:spPr>
-        <p:txBody>
-          <a:bodyPr wrap="square" lIns="0" rIns="0" tIns="0" bIns="0" anchor="t">
-            <a:spAutoFit/>
-          </a:bodyPr>
-          <a:lstStyle/>
-          <a:p>
-            <a:pPr algn="r" rtl="1">
-              <a:lnSpc>
-                <a:spcPct val="135000"/>
-              </a:lnSpc>
-            </a:pPr>
-            <a:r>
-              <a:rPr sz="2175" b="1">
-                <a:solidFill>
-                  <a:srgbClr val="7C766D"/>
-                </a:solidFill>
-                <a:latin typeface="IBM Plex Sans Arabic"/>
-                <a:ea typeface="IBM Plex Sans Arabic"/>
-                <a:cs typeface="IBM Plex Sans Arabic"/>
-              </a:rPr>
-              <a:t>الوقت</a:t>
-            </a:r>
-          </a:p>
-        </p:txBody>
-      </p:sp>
-      <p:sp>
-        <p:nvSpPr>
-          <p:cNvPr id="12" name="TextBox 11"/>
-          <p:cNvSpPr txBox="1"/>
-          <p:nvPr/>
-        </p:nvSpPr>
-        <p:spPr>
-          <a:xfrm>
-            <a:off x="8534400" y="2990850"/>
-            <a:ext cx="3619500" cy="514350"/>
-          </a:xfrm>
-          <a:prstGeom prst="rect">
-            <a:avLst/>
-          </a:prstGeom>
-          <a:noFill/>
-        </p:spPr>
-        <p:txBody>
-          <a:bodyPr wrap="square" lIns="0" rIns="0" tIns="0" bIns="0" anchor="t">
-            <a:spAutoFit/>
-          </a:bodyPr>
-          <a:lstStyle/>
-          <a:p>
-            <a:pPr algn="l" rtl="1">
-              <a:lnSpc>
-                <a:spcPct val="135000"/>
-              </a:lnSpc>
-            </a:pPr>
-            <a:r>
-              <a:rPr sz="2025" b="0">
-                <a:solidFill>
-                  <a:srgbClr val="7C766D"/>
-                </a:solidFill>
-                <a:latin typeface="IBM Plex Sans Arabic"/>
-                <a:ea typeface="IBM Plex Sans Arabic"/>
-                <a:cs typeface="IBM Plex Sans Arabic"/>
-              </a:rPr>
-              <a:t>٣٥ سنة</a:t>
-            </a:r>
-          </a:p>
-        </p:txBody>
-      </p:sp>
-      <p:sp>
-        <p:nvSpPr>
-          <p:cNvPr id="13" name="TextBox 12"/>
-          <p:cNvSpPr txBox="1"/>
-          <p:nvPr/>
-        </p:nvSpPr>
-        <p:spPr>
-          <a:xfrm>
-            <a:off x="4724400" y="2990850"/>
-            <a:ext cx="3619500" cy="514350"/>
-          </a:xfrm>
-          <a:prstGeom prst="rect">
-            <a:avLst/>
-          </a:prstGeom>
-          <a:noFill/>
-        </p:spPr>
-        <p:txBody>
-          <a:bodyPr wrap="square" lIns="0" rIns="0" tIns="0" bIns="0" anchor="t">
-            <a:spAutoFit/>
-          </a:bodyPr>
-          <a:lstStyle/>
-          <a:p>
-            <a:pPr algn="l" rtl="1">
-              <a:lnSpc>
-                <a:spcPct val="135000"/>
-              </a:lnSpc>
-            </a:pPr>
-            <a:r>
-              <a:rPr sz="2025" b="1">
-                <a:solidFill>
-                  <a:srgbClr val="F7F3EC"/>
-                </a:solidFill>
-                <a:latin typeface="IBM Plex Sans Arabic"/>
-                <a:ea typeface="IBM Plex Sans Arabic"/>
-                <a:cs typeface="IBM Plex Sans Arabic"/>
-              </a:rPr>
-              <a:t>أقل من ١٠ ساعات</a:t>
-            </a:r>
-          </a:p>
-        </p:txBody>
-      </p:sp>
-      <p:sp>
-        <p:nvSpPr>
-          <p:cNvPr id="14" name="Rectangle 13"/>
-          <p:cNvSpPr/>
-          <p:nvPr/>
-        </p:nvSpPr>
-        <p:spPr>
-          <a:xfrm>
-            <a:off x="990600" y="3581400"/>
-            <a:ext cx="13258800" cy="9525"/>
-          </a:xfrm>
-          <a:prstGeom prst="rect">
-            <a:avLst/>
-          </a:prstGeom>
-          <a:solidFill>
-            <a:srgbClr val="241F1B"/>
-          </a:solidFill>
-          <a:ln>
-            <a:noFill/>
-          </a:ln>
-          <a:effectLst/>
-        </p:spPr>
-        <p:style>
-          <a:lnRef idx="1">
-            <a:schemeClr val="accent1"/>
-          </a:lnRef>
-          <a:fillRef idx="3">
-            <a:schemeClr val="accent1"/>
-          </a:fillRef>
-          <a:effectRef idx="2">
-            <a:schemeClr val="accent1"/>
-          </a:effectRef>
-          <a:fontRef idx="minor">
-            <a:schemeClr val="lt1"/>
-          </a:fontRef>
-        </p:style>
-        <p:txBody>
-          <a:bodyPr rtlCol="0" anchor="ctr"/>
-          <a:lstStyle/>
-          <a:p/>
-        </p:txBody>
-      </p:sp>
-      <p:sp>
-        <p:nvSpPr>
-          <p:cNvPr id="15" name="TextBox 14"/>
-          <p:cNvSpPr txBox="1"/>
-          <p:nvPr/>
-        </p:nvSpPr>
-        <p:spPr>
-          <a:xfrm>
-            <a:off x="12344400" y="3829050"/>
-            <a:ext cx="1905000" cy="552450"/>
-          </a:xfrm>
-          <a:prstGeom prst="rect">
-            <a:avLst/>
-          </a:prstGeom>
-          <a:noFill/>
-        </p:spPr>
-        <p:txBody>
-          <a:bodyPr wrap="square" lIns="0" rIns="0" tIns="0" bIns="0" anchor="t">
-            <a:spAutoFit/>
-          </a:bodyPr>
-          <a:lstStyle/>
-          <a:p>
-            <a:pPr algn="r" rtl="1">
-              <a:lnSpc>
-                <a:spcPct val="135000"/>
-              </a:lnSpc>
-            </a:pPr>
-            <a:r>
-              <a:rPr sz="2175" b="1">
-                <a:solidFill>
-                  <a:srgbClr val="7C766D"/>
-                </a:solidFill>
-                <a:latin typeface="IBM Plex Sans Arabic"/>
-                <a:ea typeface="IBM Plex Sans Arabic"/>
-                <a:cs typeface="IBM Plex Sans Arabic"/>
-              </a:rPr>
-              <a:t>التكلفة</a:t>
-            </a:r>
-          </a:p>
-        </p:txBody>
-      </p:sp>
-      <p:sp>
-        <p:nvSpPr>
-          <p:cNvPr id="16" name="TextBox 15"/>
-          <p:cNvSpPr txBox="1"/>
-          <p:nvPr/>
-        </p:nvSpPr>
-        <p:spPr>
-          <a:xfrm>
-            <a:off x="8534400" y="3848100"/>
-            <a:ext cx="3619500" cy="514350"/>
-          </a:xfrm>
-          <a:prstGeom prst="rect">
-            <a:avLst/>
-          </a:prstGeom>
-          <a:noFill/>
-        </p:spPr>
-        <p:txBody>
-          <a:bodyPr wrap="square" lIns="0" rIns="0" tIns="0" bIns="0" anchor="t">
-            <a:spAutoFit/>
-          </a:bodyPr>
-          <a:lstStyle/>
-          <a:p>
-            <a:pPr algn="l" rtl="1">
-              <a:lnSpc>
-                <a:spcPct val="135000"/>
-              </a:lnSpc>
-            </a:pPr>
-            <a:r>
-              <a:rPr sz="2025" b="0">
-                <a:solidFill>
-                  <a:srgbClr val="7C766D"/>
-                </a:solidFill>
-                <a:latin typeface="IBM Plex Sans Arabic"/>
-                <a:ea typeface="IBM Plex Sans Arabic"/>
-                <a:cs typeface="IBM Plex Sans Arabic"/>
-              </a:rPr>
-              <a:t>ملايين الريالات</a:t>
-            </a:r>
-          </a:p>
-        </p:txBody>
-      </p:sp>
-      <p:sp>
-        <p:nvSpPr>
-          <p:cNvPr id="17" name="TextBox 16"/>
-          <p:cNvSpPr txBox="1"/>
-          <p:nvPr/>
-        </p:nvSpPr>
-        <p:spPr>
-          <a:xfrm>
-            <a:off x="4724400" y="3848100"/>
-            <a:ext cx="3619500" cy="514350"/>
-          </a:xfrm>
-          <a:prstGeom prst="rect">
-            <a:avLst/>
-          </a:prstGeom>
-          <a:noFill/>
-        </p:spPr>
-        <p:txBody>
-          <a:bodyPr wrap="square" lIns="0" rIns="0" tIns="0" bIns="0" anchor="t">
-            <a:spAutoFit/>
-          </a:bodyPr>
-          <a:lstStyle/>
-          <a:p>
-            <a:pPr algn="l" rtl="1">
-              <a:lnSpc>
-                <a:spcPct val="135000"/>
-              </a:lnSpc>
-            </a:pPr>
-            <a:r>
-              <a:rPr sz="2025" b="1">
-                <a:solidFill>
-                  <a:srgbClr val="F7F3EC"/>
-                </a:solidFill>
-                <a:latin typeface="IBM Plex Sans Arabic"/>
-                <a:ea typeface="IBM Plex Sans Arabic"/>
-                <a:cs typeface="IBM Plex Sans Arabic"/>
-              </a:rPr>
-              <a:t>أقل من ٤ آلاف دولار</a:t>
-            </a:r>
-          </a:p>
-        </p:txBody>
-      </p:sp>
-      <p:sp>
-        <p:nvSpPr>
-          <p:cNvPr id="18" name="Rectangle 17"/>
-          <p:cNvSpPr/>
-          <p:nvPr/>
-        </p:nvSpPr>
-        <p:spPr>
-          <a:xfrm>
-            <a:off x="990600" y="4438650"/>
-            <a:ext cx="13258800" cy="9525"/>
-          </a:xfrm>
-          <a:prstGeom prst="rect">
-            <a:avLst/>
-          </a:prstGeom>
-          <a:solidFill>
-            <a:srgbClr val="241F1B"/>
-          </a:solidFill>
-          <a:ln>
-            <a:noFill/>
-          </a:ln>
-          <a:effectLst/>
-        </p:spPr>
-        <p:style>
-          <a:lnRef idx="1">
-            <a:schemeClr val="accent1"/>
-          </a:lnRef>
-          <a:fillRef idx="3">
-            <a:schemeClr val="accent1"/>
-          </a:fillRef>
-          <a:effectRef idx="2">
-            <a:schemeClr val="accent1"/>
-          </a:effectRef>
-          <a:fontRef idx="minor">
-            <a:schemeClr val="lt1"/>
-          </a:fontRef>
-        </p:style>
-        <p:txBody>
-          <a:bodyPr rtlCol="0" anchor="ctr"/>
-          <a:lstStyle/>
-          <a:p/>
-        </p:txBody>
-      </p:sp>
-      <p:sp>
-        <p:nvSpPr>
-          <p:cNvPr id="19" name="TextBox 18"/>
-          <p:cNvSpPr txBox="1"/>
-          <p:nvPr/>
-        </p:nvSpPr>
-        <p:spPr>
-          <a:xfrm>
-            <a:off x="12344400" y="4686300"/>
-            <a:ext cx="1905000" cy="552450"/>
-          </a:xfrm>
-          <a:prstGeom prst="rect">
-            <a:avLst/>
-          </a:prstGeom>
-          <a:noFill/>
-        </p:spPr>
-        <p:txBody>
-          <a:bodyPr wrap="square" lIns="0" rIns="0" tIns="0" bIns="0" anchor="t">
-            <a:spAutoFit/>
-          </a:bodyPr>
-          <a:lstStyle/>
-          <a:p>
-            <a:pPr algn="r" rtl="1">
-              <a:lnSpc>
-                <a:spcPct val="135000"/>
-              </a:lnSpc>
-            </a:pPr>
-            <a:r>
-              <a:rPr sz="2175" b="1">
-                <a:solidFill>
-                  <a:srgbClr val="7C766D"/>
-                </a:solidFill>
-                <a:latin typeface="IBM Plex Sans Arabic"/>
-                <a:ea typeface="IBM Plex Sans Arabic"/>
-                <a:cs typeface="IBM Plex Sans Arabic"/>
-              </a:rPr>
-              <a:t>الحداثة</a:t>
-            </a:r>
-          </a:p>
-        </p:txBody>
-      </p:sp>
-      <p:sp>
-        <p:nvSpPr>
-          <p:cNvPr id="20" name="TextBox 19"/>
-          <p:cNvSpPr txBox="1"/>
-          <p:nvPr/>
-        </p:nvSpPr>
-        <p:spPr>
-          <a:xfrm>
-            <a:off x="8534400" y="4705350"/>
-            <a:ext cx="3619500" cy="514350"/>
-          </a:xfrm>
-          <a:prstGeom prst="rect">
-            <a:avLst/>
-          </a:prstGeom>
-          <a:noFill/>
-        </p:spPr>
-        <p:txBody>
-          <a:bodyPr wrap="square" lIns="0" rIns="0" tIns="0" bIns="0" anchor="t">
-            <a:spAutoFit/>
-          </a:bodyPr>
-          <a:lstStyle/>
-          <a:p>
-            <a:pPr algn="l" rtl="1">
-              <a:lnSpc>
-                <a:spcPct val="135000"/>
-              </a:lnSpc>
-            </a:pPr>
-            <a:r>
-              <a:rPr sz="2025" b="0">
-                <a:solidFill>
-                  <a:srgbClr val="7C766D"/>
-                </a:solidFill>
-                <a:latin typeface="IBM Plex Sans Arabic"/>
-                <a:ea typeface="IBM Plex Sans Arabic"/>
-                <a:cs typeface="IBM Plex Sans Arabic"/>
-              </a:rPr>
-              <a:t>تقرير يطلع قديم</a:t>
-            </a:r>
-          </a:p>
-        </p:txBody>
-      </p:sp>
-      <p:sp>
-        <p:nvSpPr>
-          <p:cNvPr id="21" name="TextBox 20"/>
-          <p:cNvSpPr txBox="1"/>
-          <p:nvPr/>
-        </p:nvSpPr>
-        <p:spPr>
-          <a:xfrm>
-            <a:off x="4724400" y="4705350"/>
-            <a:ext cx="3619500" cy="514350"/>
-          </a:xfrm>
-          <a:prstGeom prst="rect">
-            <a:avLst/>
-          </a:prstGeom>
-          <a:noFill/>
-        </p:spPr>
-        <p:txBody>
-          <a:bodyPr wrap="square" lIns="0" rIns="0" tIns="0" bIns="0" anchor="t">
-            <a:spAutoFit/>
-          </a:bodyPr>
-          <a:lstStyle/>
-          <a:p>
-            <a:pPr algn="l" rtl="1">
-              <a:lnSpc>
-                <a:spcPct val="135000"/>
-              </a:lnSpc>
-            </a:pPr>
-            <a:r>
-              <a:rPr sz="2025" b="1">
-                <a:solidFill>
-                  <a:srgbClr val="F7F3EC"/>
-                </a:solidFill>
-                <a:latin typeface="IBM Plex Sans Arabic"/>
-                <a:ea typeface="IBM Plex Sans Arabic"/>
-                <a:cs typeface="IBM Plex Sans Arabic"/>
-              </a:rPr>
-              <a:t>يحدّث نفسه</a:t>
-            </a:r>
-          </a:p>
-        </p:txBody>
-      </p:sp>
-      <p:sp>
-        <p:nvSpPr>
-          <p:cNvPr id="22" name="TextBox 21"/>
-          <p:cNvSpPr txBox="1"/>
-          <p:nvPr/>
-        </p:nvSpPr>
-        <p:spPr>
-          <a:xfrm>
-            <a:off x="990600" y="5676900"/>
-            <a:ext cx="13258800" cy="800100"/>
-          </a:xfrm>
-          <a:prstGeom prst="rect">
-            <a:avLst/>
-          </a:prstGeom>
-          <a:noFill/>
-        </p:spPr>
-        <p:txBody>
-          <a:bodyPr wrap="square" lIns="0" rIns="0" tIns="0" bIns="0" anchor="t">
-            <a:spAutoFit/>
-          </a:bodyPr>
-          <a:lstStyle/>
-          <a:p>
-            <a:pPr algn="r" rtl="1">
-              <a:lnSpc>
-                <a:spcPct val="135000"/>
-              </a:lnSpc>
-            </a:pPr>
-            <a:r>
-              <a:rPr sz="4200" b="1">
-                <a:solidFill>
-                  <a:srgbClr val="F7F3EC"/>
-                </a:solidFill>
-                <a:latin typeface="IBM Plex Sans Arabic"/>
-                <a:ea typeface="IBM Plex Sans Arabic"/>
-                <a:cs typeface="IBM Plex Sans Arabic"/>
-              </a:rPr>
-              <a:t>نفس الشغل. بس بساعات، مو بسنوات.</a:t>
+              <a:t>احنا مو بديل للمنصة. احنا الطبقة اللي تحتها.</a:t>
             </a:r>
           </a:p>
         </p:txBody>
@@ -8779,7 +10170,7 @@
                 <a:ea typeface="IBM Plex Sans Arabic"/>
                 <a:cs typeface="IBM Plex Sans Arabic"/>
               </a:rPr>
-              <a:t>كامن اليوم</a:t>
+              <a:t>من نحن</a:t>
             </a:r>
           </a:p>
         </p:txBody>
@@ -8862,1902 +10253,7 @@
                 <a:ea typeface="IBM Plex Mono"/>
                 <a:cs typeface="IBM Plex Mono"/>
               </a:rPr>
-              <a:t>16 / 18</a:t>
-            </a:r>
-          </a:p>
-        </p:txBody>
-      </p:sp>
-      <p:sp>
-        <p:nvSpPr>
-          <p:cNvPr id="7" name="TextBox 6"/>
-          <p:cNvSpPr txBox="1"/>
-          <p:nvPr/>
-        </p:nvSpPr>
-        <p:spPr>
-          <a:xfrm>
-            <a:off x="10439400" y="7715250"/>
-            <a:ext cx="3810000" cy="304800"/>
-          </a:xfrm>
-          <a:prstGeom prst="rect">
-            <a:avLst/>
-          </a:prstGeom>
-          <a:noFill/>
-        </p:spPr>
-        <p:txBody>
-          <a:bodyPr wrap="square" lIns="0" rIns="0" tIns="0" bIns="0" anchor="t">
-            <a:spAutoFit/>
-          </a:bodyPr>
-          <a:lstStyle/>
-          <a:p>
-            <a:pPr algn="l" rtl="1">
-              <a:lnSpc>
-                <a:spcPct val="135000"/>
-              </a:lnSpc>
-            </a:pPr>
-            <a:r>
-              <a:rPr sz="1200" b="1">
-                <a:solidFill>
-                  <a:srgbClr val="7C766D"/>
-                </a:solidFill>
-                <a:latin typeface="IBM Plex Sans Arabic"/>
-                <a:ea typeface="IBM Plex Sans Arabic"/>
-                <a:cs typeface="IBM Plex Sans Arabic"/>
-              </a:rPr>
-              <a:t>كامن</a:t>
-            </a:r>
-          </a:p>
-        </p:txBody>
-      </p:sp>
-      <p:sp>
-        <p:nvSpPr>
-          <p:cNvPr id="8" name="TextBox 7"/>
-          <p:cNvSpPr txBox="1"/>
-          <p:nvPr/>
-        </p:nvSpPr>
-        <p:spPr>
-          <a:xfrm>
-            <a:off x="990600" y="1524000"/>
-            <a:ext cx="13258800" cy="838200"/>
-          </a:xfrm>
-          <a:prstGeom prst="rect">
-            <a:avLst/>
-          </a:prstGeom>
-          <a:noFill/>
-        </p:spPr>
-        <p:txBody>
-          <a:bodyPr wrap="square" lIns="0" rIns="0" tIns="0" bIns="0" anchor="t">
-            <a:spAutoFit/>
-          </a:bodyPr>
-          <a:lstStyle/>
-          <a:p>
-            <a:pPr algn="r" rtl="1">
-              <a:lnSpc>
-                <a:spcPct val="135000"/>
-              </a:lnSpc>
-            </a:pPr>
-            <a:r>
-              <a:rPr sz="4650" b="1">
-                <a:solidFill>
-                  <a:srgbClr val="F7F3EC"/>
-                </a:solidFill>
-                <a:latin typeface="IBM Plex Sans Arabic"/>
-                <a:ea typeface="IBM Plex Sans Arabic"/>
-                <a:cs typeface="IBM Plex Sans Arabic"/>
-              </a:rPr>
-              <a:t>كامن اليوم.</a:t>
-            </a:r>
-          </a:p>
-        </p:txBody>
-      </p:sp>
-      <p:sp>
-        <p:nvSpPr>
-          <p:cNvPr id="9" name="TextBox 8"/>
-          <p:cNvSpPr txBox="1"/>
-          <p:nvPr/>
-        </p:nvSpPr>
-        <p:spPr>
-          <a:xfrm>
-            <a:off x="990600" y="2400300"/>
-            <a:ext cx="13258800" cy="457200"/>
-          </a:xfrm>
-          <a:prstGeom prst="rect">
-            <a:avLst/>
-          </a:prstGeom>
-          <a:noFill/>
-        </p:spPr>
-        <p:txBody>
-          <a:bodyPr wrap="square" lIns="0" rIns="0" tIns="0" bIns="0" anchor="t">
-            <a:spAutoFit/>
-          </a:bodyPr>
-          <a:lstStyle/>
-          <a:p>
-            <a:pPr algn="r" rtl="1">
-              <a:lnSpc>
-                <a:spcPct val="135000"/>
-              </a:lnSpc>
-            </a:pPr>
-            <a:r>
-              <a:rPr sz="1800" b="0">
-                <a:solidFill>
-                  <a:srgbClr val="7C766D"/>
-                </a:solidFill>
-                <a:latin typeface="IBM Plex Sans Arabic"/>
-                <a:ea typeface="IBM Plex Sans Arabic"/>
-                <a:cs typeface="IBM Plex Sans Arabic"/>
-              </a:rPr>
-              <a:t>الأرقام من قاعدة البيانات، والتكلفة من الفواتير.</a:t>
-            </a:r>
-          </a:p>
-        </p:txBody>
-      </p:sp>
-      <p:sp>
-        <p:nvSpPr>
-          <p:cNvPr id="10" name="Rectangle 9"/>
-          <p:cNvSpPr/>
-          <p:nvPr/>
-        </p:nvSpPr>
-        <p:spPr>
-          <a:xfrm>
-            <a:off x="7581900" y="3009900"/>
-            <a:ext cx="9525" cy="4305300"/>
-          </a:xfrm>
-          <a:prstGeom prst="rect">
-            <a:avLst/>
-          </a:prstGeom>
-          <a:solidFill>
-            <a:srgbClr val="241F1B"/>
-          </a:solidFill>
-          <a:ln>
-            <a:noFill/>
-          </a:ln>
-          <a:effectLst/>
-        </p:spPr>
-        <p:style>
-          <a:lnRef idx="1">
-            <a:schemeClr val="accent1"/>
-          </a:lnRef>
-          <a:fillRef idx="3">
-            <a:schemeClr val="accent1"/>
-          </a:fillRef>
-          <a:effectRef idx="2">
-            <a:schemeClr val="accent1"/>
-          </a:effectRef>
-          <a:fontRef idx="minor">
-            <a:schemeClr val="lt1"/>
-          </a:fontRef>
-        </p:style>
-        <p:txBody>
-          <a:bodyPr rtlCol="0" anchor="ctr"/>
-          <a:lstStyle/>
-          <a:p/>
-        </p:txBody>
-      </p:sp>
-      <p:sp>
-        <p:nvSpPr>
-          <p:cNvPr id="11" name="TextBox 10"/>
-          <p:cNvSpPr txBox="1"/>
-          <p:nvPr/>
-        </p:nvSpPr>
-        <p:spPr>
-          <a:xfrm>
-            <a:off x="10439400" y="3028950"/>
-            <a:ext cx="3810000" cy="323850"/>
-          </a:xfrm>
-          <a:prstGeom prst="rect">
-            <a:avLst/>
-          </a:prstGeom>
-          <a:noFill/>
-        </p:spPr>
-        <p:txBody>
-          <a:bodyPr wrap="square" lIns="0" rIns="0" tIns="0" bIns="0" anchor="t">
-            <a:spAutoFit/>
-          </a:bodyPr>
-          <a:lstStyle/>
-          <a:p>
-            <a:pPr algn="l" rtl="1">
-              <a:lnSpc>
-                <a:spcPct val="135000"/>
-              </a:lnSpc>
-            </a:pPr>
-            <a:r>
-              <a:rPr sz="1275" b="0">
-                <a:solidFill>
-                  <a:srgbClr val="FF5C1A"/>
-                </a:solidFill>
-                <a:latin typeface="IBM Plex Sans Arabic"/>
-                <a:ea typeface="IBM Plex Sans Arabic"/>
-                <a:cs typeface="IBM Plex Sans Arabic"/>
-              </a:rPr>
-              <a:t>وش بناه</a:t>
-            </a:r>
-          </a:p>
-        </p:txBody>
-      </p:sp>
-      <p:sp>
-        <p:nvSpPr>
-          <p:cNvPr id="12" name="Rectangle 11"/>
-          <p:cNvSpPr/>
-          <p:nvPr/>
-        </p:nvSpPr>
-        <p:spPr>
-          <a:xfrm>
-            <a:off x="7962900" y="3352800"/>
-            <a:ext cx="6286500" cy="9525"/>
-          </a:xfrm>
-          <a:prstGeom prst="rect">
-            <a:avLst/>
-          </a:prstGeom>
-          <a:solidFill>
-            <a:srgbClr val="241F1B"/>
-          </a:solidFill>
-          <a:ln>
-            <a:noFill/>
-          </a:ln>
-          <a:effectLst/>
-        </p:spPr>
-        <p:style>
-          <a:lnRef idx="1">
-            <a:schemeClr val="accent1"/>
-          </a:lnRef>
-          <a:fillRef idx="3">
-            <a:schemeClr val="accent1"/>
-          </a:fillRef>
-          <a:effectRef idx="2">
-            <a:schemeClr val="accent1"/>
-          </a:effectRef>
-          <a:fontRef idx="minor">
-            <a:schemeClr val="lt1"/>
-          </a:fontRef>
-        </p:style>
-        <p:txBody>
-          <a:bodyPr rtlCol="0" anchor="ctr"/>
-          <a:lstStyle/>
-          <a:p/>
-        </p:txBody>
-      </p:sp>
-      <p:sp>
-        <p:nvSpPr>
-          <p:cNvPr id="13" name="TextBox 12"/>
-          <p:cNvSpPr txBox="1"/>
-          <p:nvPr/>
-        </p:nvSpPr>
-        <p:spPr>
-          <a:xfrm>
-            <a:off x="12439650" y="3543300"/>
-            <a:ext cx="1809750" cy="800100"/>
-          </a:xfrm>
-          <a:prstGeom prst="rect">
-            <a:avLst/>
-          </a:prstGeom>
-          <a:noFill/>
-        </p:spPr>
-        <p:txBody>
-          <a:bodyPr wrap="square" lIns="0" rIns="0" tIns="0" bIns="0" anchor="t">
-            <a:spAutoFit/>
-          </a:bodyPr>
-          <a:lstStyle/>
-          <a:p>
-            <a:pPr algn="r" rtl="1">
-              <a:lnSpc>
-                <a:spcPct val="135000"/>
-              </a:lnSpc>
-            </a:pPr>
-            <a:r>
-              <a:rPr sz="3150" b="1">
-                <a:solidFill>
-                  <a:srgbClr val="FF5C1A"/>
-                </a:solidFill>
-                <a:latin typeface="IBM Plex Sans Arabic"/>
-                <a:ea typeface="IBM Plex Sans Arabic"/>
-                <a:cs typeface="IBM Plex Sans Arabic"/>
-              </a:rPr>
-              <a:t>١٥,٠٢٥</a:t>
-            </a:r>
-          </a:p>
-        </p:txBody>
-      </p:sp>
-      <p:sp>
-        <p:nvSpPr>
-          <p:cNvPr id="14" name="TextBox 13"/>
-          <p:cNvSpPr txBox="1"/>
-          <p:nvPr/>
-        </p:nvSpPr>
-        <p:spPr>
-          <a:xfrm>
-            <a:off x="7962900" y="3657600"/>
-            <a:ext cx="4286250" cy="571500"/>
-          </a:xfrm>
-          <a:prstGeom prst="rect">
-            <a:avLst/>
-          </a:prstGeom>
-          <a:noFill/>
-        </p:spPr>
-        <p:txBody>
-          <a:bodyPr wrap="square" lIns="0" rIns="0" tIns="0" bIns="0" anchor="t">
-            <a:spAutoFit/>
-          </a:bodyPr>
-          <a:lstStyle/>
-          <a:p>
-            <a:pPr algn="l" rtl="1">
-              <a:lnSpc>
-                <a:spcPct val="150000"/>
-              </a:lnSpc>
-            </a:pPr>
-            <a:r>
-              <a:rPr sz="1575" b="0">
-                <a:solidFill>
-                  <a:srgbClr val="7C766D"/>
-                </a:solidFill>
-                <a:latin typeface="IBM Plex Sans Arabic"/>
-                <a:ea typeface="IBM Plex Sans Arabic"/>
-                <a:cs typeface="IBM Plex Sans Arabic"/>
-              </a:rPr>
-              <a:t>مورّد على الخريطة، منهم ١٥٢ ما هم في ترميز</a:t>
-            </a:r>
-          </a:p>
-        </p:txBody>
-      </p:sp>
-      <p:sp>
-        <p:nvSpPr>
-          <p:cNvPr id="15" name="Rectangle 14"/>
-          <p:cNvSpPr/>
-          <p:nvPr/>
-        </p:nvSpPr>
-        <p:spPr>
-          <a:xfrm>
-            <a:off x="7962900" y="4267200"/>
-            <a:ext cx="6286500" cy="9525"/>
-          </a:xfrm>
-          <a:prstGeom prst="rect">
-            <a:avLst/>
-          </a:prstGeom>
-          <a:solidFill>
-            <a:srgbClr val="241F1B"/>
-          </a:solidFill>
-          <a:ln>
-            <a:noFill/>
-          </a:ln>
-          <a:effectLst/>
-        </p:spPr>
-        <p:style>
-          <a:lnRef idx="1">
-            <a:schemeClr val="accent1"/>
-          </a:lnRef>
-          <a:fillRef idx="3">
-            <a:schemeClr val="accent1"/>
-          </a:fillRef>
-          <a:effectRef idx="2">
-            <a:schemeClr val="accent1"/>
-          </a:effectRef>
-          <a:fontRef idx="minor">
-            <a:schemeClr val="lt1"/>
-          </a:fontRef>
-        </p:style>
-        <p:txBody>
-          <a:bodyPr rtlCol="0" anchor="ctr"/>
-          <a:lstStyle/>
-          <a:p/>
-        </p:txBody>
-      </p:sp>
-      <p:sp>
-        <p:nvSpPr>
-          <p:cNvPr id="16" name="TextBox 15"/>
-          <p:cNvSpPr txBox="1"/>
-          <p:nvPr/>
-        </p:nvSpPr>
-        <p:spPr>
-          <a:xfrm>
-            <a:off x="12439650" y="4457700"/>
-            <a:ext cx="1809750" cy="800100"/>
-          </a:xfrm>
-          <a:prstGeom prst="rect">
-            <a:avLst/>
-          </a:prstGeom>
-          <a:noFill/>
-        </p:spPr>
-        <p:txBody>
-          <a:bodyPr wrap="square" lIns="0" rIns="0" tIns="0" bIns="0" anchor="t">
-            <a:spAutoFit/>
-          </a:bodyPr>
-          <a:lstStyle/>
-          <a:p>
-            <a:pPr algn="r" rtl="1">
-              <a:lnSpc>
-                <a:spcPct val="135000"/>
-              </a:lnSpc>
-            </a:pPr>
-            <a:r>
-              <a:rPr sz="3150" b="1">
-                <a:solidFill>
-                  <a:srgbClr val="F7F3EC"/>
-                </a:solidFill>
-                <a:latin typeface="IBM Plex Sans Arabic"/>
-                <a:ea typeface="IBM Plex Sans Arabic"/>
-                <a:cs typeface="IBM Plex Sans Arabic"/>
-              </a:rPr>
-              <a:t>٥١,٩٩٢</a:t>
-            </a:r>
-          </a:p>
-        </p:txBody>
-      </p:sp>
-      <p:sp>
-        <p:nvSpPr>
-          <p:cNvPr id="17" name="TextBox 16"/>
-          <p:cNvSpPr txBox="1"/>
-          <p:nvPr/>
-        </p:nvSpPr>
-        <p:spPr>
-          <a:xfrm>
-            <a:off x="7962900" y="4572000"/>
-            <a:ext cx="4286250" cy="571500"/>
-          </a:xfrm>
-          <a:prstGeom prst="rect">
-            <a:avLst/>
-          </a:prstGeom>
-          <a:noFill/>
-        </p:spPr>
-        <p:txBody>
-          <a:bodyPr wrap="square" lIns="0" rIns="0" tIns="0" bIns="0" anchor="t">
-            <a:spAutoFit/>
-          </a:bodyPr>
-          <a:lstStyle/>
-          <a:p>
-            <a:pPr algn="l" rtl="1">
-              <a:lnSpc>
-                <a:spcPct val="150000"/>
-              </a:lnSpc>
-            </a:pPr>
-            <a:r>
-              <a:rPr sz="1575" b="0">
-                <a:solidFill>
-                  <a:srgbClr val="7C766D"/>
-                </a:solidFill>
-                <a:latin typeface="IBM Plex Sans Arabic"/>
-                <a:ea typeface="IBM Plex Sans Arabic"/>
-                <a:cs typeface="IBM Plex Sans Arabic"/>
-              </a:rPr>
-              <a:t>قدرة موثّقة: مورّد واحد، منتج واحد، بمواصفة</a:t>
-            </a:r>
-          </a:p>
-        </p:txBody>
-      </p:sp>
-      <p:sp>
-        <p:nvSpPr>
-          <p:cNvPr id="18" name="Rectangle 17"/>
-          <p:cNvSpPr/>
-          <p:nvPr/>
-        </p:nvSpPr>
-        <p:spPr>
-          <a:xfrm>
-            <a:off x="7962900" y="5181600"/>
-            <a:ext cx="6286500" cy="9525"/>
-          </a:xfrm>
-          <a:prstGeom prst="rect">
-            <a:avLst/>
-          </a:prstGeom>
-          <a:solidFill>
-            <a:srgbClr val="241F1B"/>
-          </a:solidFill>
-          <a:ln>
-            <a:noFill/>
-          </a:ln>
-          <a:effectLst/>
-        </p:spPr>
-        <p:style>
-          <a:lnRef idx="1">
-            <a:schemeClr val="accent1"/>
-          </a:lnRef>
-          <a:fillRef idx="3">
-            <a:schemeClr val="accent1"/>
-          </a:fillRef>
-          <a:effectRef idx="2">
-            <a:schemeClr val="accent1"/>
-          </a:effectRef>
-          <a:fontRef idx="minor">
-            <a:schemeClr val="lt1"/>
-          </a:fontRef>
-        </p:style>
-        <p:txBody>
-          <a:bodyPr rtlCol="0" anchor="ctr"/>
-          <a:lstStyle/>
-          <a:p/>
-        </p:txBody>
-      </p:sp>
-      <p:sp>
-        <p:nvSpPr>
-          <p:cNvPr id="19" name="TextBox 18"/>
-          <p:cNvSpPr txBox="1"/>
-          <p:nvPr/>
-        </p:nvSpPr>
-        <p:spPr>
-          <a:xfrm>
-            <a:off x="12439650" y="5372100"/>
-            <a:ext cx="1809750" cy="800100"/>
-          </a:xfrm>
-          <a:prstGeom prst="rect">
-            <a:avLst/>
-          </a:prstGeom>
-          <a:noFill/>
-        </p:spPr>
-        <p:txBody>
-          <a:bodyPr wrap="square" lIns="0" rIns="0" tIns="0" bIns="0" anchor="t">
-            <a:spAutoFit/>
-          </a:bodyPr>
-          <a:lstStyle/>
-          <a:p>
-            <a:pPr algn="r" rtl="1">
-              <a:lnSpc>
-                <a:spcPct val="135000"/>
-              </a:lnSpc>
-            </a:pPr>
-            <a:r>
-              <a:rPr sz="3150" b="1">
-                <a:solidFill>
-                  <a:srgbClr val="F7F3EC"/>
-                </a:solidFill>
-                <a:latin typeface="IBM Plex Sans Arabic"/>
-                <a:ea typeface="IBM Plex Sans Arabic"/>
-                <a:cs typeface="IBM Plex Sans Arabic"/>
-              </a:rPr>
-              <a:t>٤,٨٣٦</a:t>
-            </a:r>
-          </a:p>
-        </p:txBody>
-      </p:sp>
-      <p:sp>
-        <p:nvSpPr>
-          <p:cNvPr id="20" name="TextBox 19"/>
-          <p:cNvSpPr txBox="1"/>
-          <p:nvPr/>
-        </p:nvSpPr>
-        <p:spPr>
-          <a:xfrm>
-            <a:off x="7962900" y="5486400"/>
-            <a:ext cx="4286250" cy="571500"/>
-          </a:xfrm>
-          <a:prstGeom prst="rect">
-            <a:avLst/>
-          </a:prstGeom>
-          <a:noFill/>
-        </p:spPr>
-        <p:txBody>
-          <a:bodyPr wrap="square" lIns="0" rIns="0" tIns="0" bIns="0" anchor="t">
-            <a:spAutoFit/>
-          </a:bodyPr>
-          <a:lstStyle/>
-          <a:p>
-            <a:pPr algn="l" rtl="1">
-              <a:lnSpc>
-                <a:spcPct val="150000"/>
-              </a:lnSpc>
-            </a:pPr>
-            <a:r>
-              <a:rPr sz="1575" b="0">
-                <a:solidFill>
-                  <a:srgbClr val="7C766D"/>
-                </a:solidFill>
-                <a:latin typeface="IBM Plex Sans Arabic"/>
-                <a:ea typeface="IBM Plex Sans Arabic"/>
-                <a:cs typeface="IBM Plex Sans Arabic"/>
-              </a:rPr>
-              <a:t>رمز تعريفة مسجّل، من ١٠,٧٩٤ في التصنيف</a:t>
-            </a:r>
-          </a:p>
-        </p:txBody>
-      </p:sp>
-      <p:sp>
-        <p:nvSpPr>
-          <p:cNvPr id="21" name="Rectangle 20"/>
-          <p:cNvSpPr/>
-          <p:nvPr/>
-        </p:nvSpPr>
-        <p:spPr>
-          <a:xfrm>
-            <a:off x="7962900" y="6096000"/>
-            <a:ext cx="6286500" cy="9525"/>
-          </a:xfrm>
-          <a:prstGeom prst="rect">
-            <a:avLst/>
-          </a:prstGeom>
-          <a:solidFill>
-            <a:srgbClr val="241F1B"/>
-          </a:solidFill>
-          <a:ln>
-            <a:noFill/>
-          </a:ln>
-          <a:effectLst/>
-        </p:spPr>
-        <p:style>
-          <a:lnRef idx="1">
-            <a:schemeClr val="accent1"/>
-          </a:lnRef>
-          <a:fillRef idx="3">
-            <a:schemeClr val="accent1"/>
-          </a:fillRef>
-          <a:effectRef idx="2">
-            <a:schemeClr val="accent1"/>
-          </a:effectRef>
-          <a:fontRef idx="minor">
-            <a:schemeClr val="lt1"/>
-          </a:fontRef>
-        </p:style>
-        <p:txBody>
-          <a:bodyPr rtlCol="0" anchor="ctr"/>
-          <a:lstStyle/>
-          <a:p/>
-        </p:txBody>
-      </p:sp>
-      <p:sp>
-        <p:nvSpPr>
-          <p:cNvPr id="22" name="TextBox 21"/>
-          <p:cNvSpPr txBox="1"/>
-          <p:nvPr/>
-        </p:nvSpPr>
-        <p:spPr>
-          <a:xfrm>
-            <a:off x="12439650" y="6286500"/>
-            <a:ext cx="1809750" cy="800100"/>
-          </a:xfrm>
-          <a:prstGeom prst="rect">
-            <a:avLst/>
-          </a:prstGeom>
-          <a:noFill/>
-        </p:spPr>
-        <p:txBody>
-          <a:bodyPr wrap="square" lIns="0" rIns="0" tIns="0" bIns="0" anchor="t">
-            <a:spAutoFit/>
-          </a:bodyPr>
-          <a:lstStyle/>
-          <a:p>
-            <a:pPr algn="r" rtl="1">
-              <a:lnSpc>
-                <a:spcPct val="135000"/>
-              </a:lnSpc>
-            </a:pPr>
-            <a:r>
-              <a:rPr sz="3150" b="1">
-                <a:solidFill>
-                  <a:srgbClr val="F7F3EC"/>
-                </a:solidFill>
-                <a:latin typeface="IBM Plex Sans Arabic"/>
-                <a:ea typeface="IBM Plex Sans Arabic"/>
-                <a:cs typeface="IBM Plex Sans Arabic"/>
-              </a:rPr>
-              <a:t>١,١٤٦</a:t>
-            </a:r>
-          </a:p>
-        </p:txBody>
-      </p:sp>
-      <p:sp>
-        <p:nvSpPr>
-          <p:cNvPr id="23" name="TextBox 22"/>
-          <p:cNvSpPr txBox="1"/>
-          <p:nvPr/>
-        </p:nvSpPr>
-        <p:spPr>
-          <a:xfrm>
-            <a:off x="7962900" y="6400800"/>
-            <a:ext cx="4286250" cy="571500"/>
-          </a:xfrm>
-          <a:prstGeom prst="rect">
-            <a:avLst/>
-          </a:prstGeom>
-          <a:noFill/>
-        </p:spPr>
-        <p:txBody>
-          <a:bodyPr wrap="square" lIns="0" rIns="0" tIns="0" bIns="0" anchor="t">
-            <a:spAutoFit/>
-          </a:bodyPr>
-          <a:lstStyle/>
-          <a:p>
-            <a:pPr algn="l" rtl="1">
-              <a:lnSpc>
-                <a:spcPct val="150000"/>
-              </a:lnSpc>
-            </a:pPr>
-            <a:r>
-              <a:rPr sz="1575" b="0">
-                <a:solidFill>
-                  <a:srgbClr val="7C766D"/>
-                </a:solidFill>
-                <a:latin typeface="IBM Plex Sans Arabic"/>
-                <a:ea typeface="IBM Plex Sans Arabic"/>
-                <a:cs typeface="IBM Plex Sans Arabic"/>
-              </a:rPr>
-              <a:t>تشغيلة وكيل، في ٧٣ ساعة تشغيل</a:t>
-            </a:r>
-          </a:p>
-        </p:txBody>
-      </p:sp>
-      <p:sp>
-        <p:nvSpPr>
-          <p:cNvPr id="24" name="TextBox 23"/>
-          <p:cNvSpPr txBox="1"/>
-          <p:nvPr/>
-        </p:nvSpPr>
-        <p:spPr>
-          <a:xfrm>
-            <a:off x="3771900" y="3028950"/>
-            <a:ext cx="3429000" cy="323850"/>
-          </a:xfrm>
-          <a:prstGeom prst="rect">
-            <a:avLst/>
-          </a:prstGeom>
-          <a:noFill/>
-        </p:spPr>
-        <p:txBody>
-          <a:bodyPr wrap="square" lIns="0" rIns="0" tIns="0" bIns="0" anchor="t">
-            <a:spAutoFit/>
-          </a:bodyPr>
-          <a:lstStyle/>
-          <a:p>
-            <a:pPr algn="l" rtl="1">
-              <a:lnSpc>
-                <a:spcPct val="135000"/>
-              </a:lnSpc>
-            </a:pPr>
-            <a:r>
-              <a:rPr sz="1275" b="0">
-                <a:solidFill>
-                  <a:srgbClr val="FF5C1A"/>
-                </a:solidFill>
-                <a:latin typeface="IBM Plex Sans Arabic"/>
-                <a:ea typeface="IBM Plex Sans Arabic"/>
-                <a:cs typeface="IBM Plex Sans Arabic"/>
-              </a:rPr>
-              <a:t>وش كلّف</a:t>
-            </a:r>
-          </a:p>
-        </p:txBody>
-      </p:sp>
-      <p:sp>
-        <p:nvSpPr>
-          <p:cNvPr id="25" name="Rectangle 24"/>
-          <p:cNvSpPr/>
-          <p:nvPr/>
-        </p:nvSpPr>
-        <p:spPr>
-          <a:xfrm>
-            <a:off x="990600" y="3352800"/>
-            <a:ext cx="6286500" cy="9525"/>
-          </a:xfrm>
-          <a:prstGeom prst="rect">
-            <a:avLst/>
-          </a:prstGeom>
-          <a:solidFill>
-            <a:srgbClr val="241F1B"/>
-          </a:solidFill>
-          <a:ln>
-            <a:noFill/>
-          </a:ln>
-          <a:effectLst/>
-        </p:spPr>
-        <p:style>
-          <a:lnRef idx="1">
-            <a:schemeClr val="accent1"/>
-          </a:lnRef>
-          <a:fillRef idx="3">
-            <a:schemeClr val="accent1"/>
-          </a:fillRef>
-          <a:effectRef idx="2">
-            <a:schemeClr val="accent1"/>
-          </a:effectRef>
-          <a:fontRef idx="minor">
-            <a:schemeClr val="lt1"/>
-          </a:fontRef>
-        </p:style>
-        <p:txBody>
-          <a:bodyPr rtlCol="0" anchor="ctr"/>
-          <a:lstStyle/>
-          <a:p/>
-        </p:txBody>
-      </p:sp>
-      <p:sp>
-        <p:nvSpPr>
-          <p:cNvPr id="26" name="TextBox 25"/>
-          <p:cNvSpPr txBox="1"/>
-          <p:nvPr/>
-        </p:nvSpPr>
-        <p:spPr>
-          <a:xfrm>
-            <a:off x="4038600" y="3486150"/>
-            <a:ext cx="3238500" cy="838200"/>
-          </a:xfrm>
-          <a:prstGeom prst="rect">
-            <a:avLst/>
-          </a:prstGeom>
-          <a:noFill/>
-        </p:spPr>
-        <p:txBody>
-          <a:bodyPr wrap="square" lIns="0" rIns="0" tIns="0" bIns="0" anchor="t">
-            <a:spAutoFit/>
-          </a:bodyPr>
-          <a:lstStyle/>
-          <a:p>
-            <a:pPr algn="r" rtl="1">
-              <a:lnSpc>
-                <a:spcPct val="135000"/>
-              </a:lnSpc>
-            </a:pPr>
-            <a:r>
-              <a:rPr sz="4800" b="1">
-                <a:solidFill>
-                  <a:srgbClr val="FF5C1A"/>
-                </a:solidFill>
-                <a:latin typeface="IBM Plex Sans Arabic"/>
-                <a:ea typeface="IBM Plex Sans Arabic"/>
-                <a:cs typeface="IBM Plex Sans Arabic"/>
-              </a:rPr>
-              <a:t>صفر ريال</a:t>
-            </a:r>
-          </a:p>
-        </p:txBody>
-      </p:sp>
-      <p:sp>
-        <p:nvSpPr>
-          <p:cNvPr id="27" name="TextBox 26"/>
-          <p:cNvSpPr txBox="1"/>
-          <p:nvPr/>
-        </p:nvSpPr>
-        <p:spPr>
-          <a:xfrm>
-            <a:off x="990600" y="3771900"/>
-            <a:ext cx="2952750" cy="400050"/>
-          </a:xfrm>
-          <a:prstGeom prst="rect">
-            <a:avLst/>
-          </a:prstGeom>
-          <a:noFill/>
-        </p:spPr>
-        <p:txBody>
-          <a:bodyPr wrap="square" lIns="0" rIns="0" tIns="0" bIns="0" anchor="t">
-            <a:spAutoFit/>
-          </a:bodyPr>
-          <a:lstStyle/>
-          <a:p>
-            <a:pPr algn="l" rtl="1">
-              <a:lnSpc>
-                <a:spcPct val="135000"/>
-              </a:lnSpc>
-            </a:pPr>
-            <a:r>
-              <a:rPr sz="1575" b="0">
-                <a:solidFill>
-                  <a:srgbClr val="7C766D"/>
-                </a:solidFill>
-                <a:latin typeface="IBM Plex Sans Arabic"/>
-                <a:ea typeface="IBM Plex Sans Arabic"/>
-                <a:cs typeface="IBM Plex Sans Arabic"/>
-              </a:rPr>
-              <a:t>على ٢.٩٣ مليون توكن دخل</a:t>
-            </a:r>
-          </a:p>
-        </p:txBody>
-      </p:sp>
-      <p:sp>
-        <p:nvSpPr>
-          <p:cNvPr id="28" name="TextBox 27"/>
-          <p:cNvSpPr txBox="1"/>
-          <p:nvPr/>
-        </p:nvSpPr>
-        <p:spPr>
-          <a:xfrm>
-            <a:off x="990600" y="4381500"/>
-            <a:ext cx="6286500" cy="723900"/>
-          </a:xfrm>
-          <a:prstGeom prst="rect">
-            <a:avLst/>
-          </a:prstGeom>
-          <a:noFill/>
-        </p:spPr>
-        <p:txBody>
-          <a:bodyPr wrap="square" lIns="0" rIns="0" tIns="0" bIns="0" anchor="t">
-            <a:spAutoFit/>
-          </a:bodyPr>
-          <a:lstStyle/>
-          <a:p>
-            <a:pPr algn="r" rtl="1">
-              <a:lnSpc>
-                <a:spcPct val="170000"/>
-              </a:lnSpc>
-            </a:pPr>
-            <a:r>
-              <a:rPr sz="1575" b="0">
-                <a:solidFill>
-                  <a:srgbClr val="7C766D"/>
-                </a:solidFill>
-                <a:latin typeface="IBM Plex Sans Arabic"/>
-                <a:ea typeface="IBM Plex Sans Arabic"/>
-                <a:cs typeface="IBM Plex Sans Arabic"/>
-              </a:rPr>
-              <a:t>qwen3.5:9b يشتغل محلياً على Ollama، وTavily على باقته المجانية ونتائجه مخزّنة، فإعادة التشغيل ما تكلف شي.</a:t>
-            </a:r>
-          </a:p>
-        </p:txBody>
-      </p:sp>
-      <p:sp>
-        <p:nvSpPr>
-          <p:cNvPr id="29" name="TextBox 28"/>
-          <p:cNvSpPr txBox="1"/>
-          <p:nvPr/>
-        </p:nvSpPr>
-        <p:spPr>
-          <a:xfrm>
-            <a:off x="990600" y="5295900"/>
-            <a:ext cx="6286500" cy="323850"/>
-          </a:xfrm>
-          <a:prstGeom prst="rect">
-            <a:avLst/>
-          </a:prstGeom>
-          <a:noFill/>
-        </p:spPr>
-        <p:txBody>
-          <a:bodyPr wrap="square" lIns="0" rIns="0" tIns="0" bIns="0" anchor="t">
-            <a:spAutoFit/>
-          </a:bodyPr>
-          <a:lstStyle/>
-          <a:p>
-            <a:pPr algn="r" rtl="1">
-              <a:lnSpc>
-                <a:spcPct val="135000"/>
-              </a:lnSpc>
-            </a:pPr>
-            <a:r>
-              <a:rPr sz="1275" b="0">
-                <a:solidFill>
-                  <a:srgbClr val="7C766D"/>
-                </a:solidFill>
-                <a:latin typeface="IBM Plex Sans Arabic"/>
-                <a:ea typeface="IBM Plex Sans Arabic"/>
-                <a:cs typeface="IBM Plex Sans Arabic"/>
-              </a:rPr>
-              <a:t>ولو شغّلناها عند مزوّد ثاني، نفس التوكنات:</a:t>
-            </a:r>
-          </a:p>
-        </p:txBody>
-      </p:sp>
-      <p:sp>
-        <p:nvSpPr>
-          <p:cNvPr id="30" name="Rectangle 29"/>
-          <p:cNvSpPr/>
-          <p:nvPr/>
-        </p:nvSpPr>
-        <p:spPr>
-          <a:xfrm>
-            <a:off x="990600" y="5638800"/>
-            <a:ext cx="6286500" cy="9525"/>
-          </a:xfrm>
-          <a:prstGeom prst="rect">
-            <a:avLst/>
-          </a:prstGeom>
-          <a:solidFill>
-            <a:srgbClr val="241F1B"/>
-          </a:solidFill>
-          <a:ln>
-            <a:noFill/>
-          </a:ln>
-          <a:effectLst/>
-        </p:spPr>
-        <p:style>
-          <a:lnRef idx="1">
-            <a:schemeClr val="accent1"/>
-          </a:lnRef>
-          <a:fillRef idx="3">
-            <a:schemeClr val="accent1"/>
-          </a:fillRef>
-          <a:effectRef idx="2">
-            <a:schemeClr val="accent1"/>
-          </a:effectRef>
-          <a:fontRef idx="minor">
-            <a:schemeClr val="lt1"/>
-          </a:fontRef>
-        </p:style>
-        <p:txBody>
-          <a:bodyPr rtlCol="0" anchor="ctr"/>
-          <a:lstStyle/>
-          <a:p/>
-        </p:txBody>
-      </p:sp>
-      <p:sp>
-        <p:nvSpPr>
-          <p:cNvPr id="31" name="TextBox 30"/>
-          <p:cNvSpPr txBox="1"/>
-          <p:nvPr/>
-        </p:nvSpPr>
-        <p:spPr>
-          <a:xfrm>
-            <a:off x="3848100" y="5753100"/>
-            <a:ext cx="3429000" cy="323850"/>
-          </a:xfrm>
-          <a:prstGeom prst="rect">
-            <a:avLst/>
-          </a:prstGeom>
-          <a:noFill/>
-        </p:spPr>
-        <p:txBody>
-          <a:bodyPr wrap="square" lIns="0" rIns="0" tIns="0" bIns="0" anchor="t">
-            <a:spAutoFit/>
-          </a:bodyPr>
-          <a:lstStyle/>
-          <a:p>
-            <a:pPr algn="r">
-              <a:lnSpc>
-                <a:spcPct val="135000"/>
-              </a:lnSpc>
-            </a:pPr>
-            <a:r>
-              <a:rPr sz="1275" b="0">
-                <a:solidFill>
-                  <a:srgbClr val="F7F3EC"/>
-                </a:solidFill>
-                <a:latin typeface="IBM Plex Mono"/>
-                <a:ea typeface="IBM Plex Mono"/>
-                <a:cs typeface="IBM Plex Mono"/>
-              </a:rPr>
-              <a:t>Ollama · qwen3.5:9b</a:t>
-            </a:r>
-          </a:p>
-        </p:txBody>
-      </p:sp>
-      <p:sp>
-        <p:nvSpPr>
-          <p:cNvPr id="32" name="TextBox 31"/>
-          <p:cNvSpPr txBox="1"/>
-          <p:nvPr/>
-        </p:nvSpPr>
-        <p:spPr>
-          <a:xfrm>
-            <a:off x="990600" y="5743575"/>
-            <a:ext cx="1905000" cy="342900"/>
-          </a:xfrm>
-          <a:prstGeom prst="rect">
-            <a:avLst/>
-          </a:prstGeom>
-          <a:noFill/>
-        </p:spPr>
-        <p:txBody>
-          <a:bodyPr wrap="square" lIns="0" rIns="0" tIns="0" bIns="0" anchor="t">
-            <a:spAutoFit/>
-          </a:bodyPr>
-          <a:lstStyle/>
-          <a:p>
-            <a:pPr algn="l">
-              <a:lnSpc>
-                <a:spcPct val="135000"/>
-              </a:lnSpc>
-            </a:pPr>
-            <a:r>
-              <a:rPr sz="1350" b="1">
-                <a:solidFill>
-                  <a:srgbClr val="FF5C1A"/>
-                </a:solidFill>
-                <a:latin typeface="IBM Plex Mono"/>
-                <a:ea typeface="IBM Plex Mono"/>
-                <a:cs typeface="IBM Plex Mono"/>
-              </a:rPr>
-              <a:t>$0</a:t>
-            </a:r>
-          </a:p>
-        </p:txBody>
-      </p:sp>
-      <p:sp>
-        <p:nvSpPr>
-          <p:cNvPr id="33" name="Rectangle 32"/>
-          <p:cNvSpPr/>
-          <p:nvPr/>
-        </p:nvSpPr>
-        <p:spPr>
-          <a:xfrm>
-            <a:off x="990600" y="6076950"/>
-            <a:ext cx="6286500" cy="9525"/>
-          </a:xfrm>
-          <a:prstGeom prst="rect">
-            <a:avLst/>
-          </a:prstGeom>
-          <a:solidFill>
-            <a:srgbClr val="241F1B"/>
-          </a:solidFill>
-          <a:ln>
-            <a:noFill/>
-          </a:ln>
-          <a:effectLst/>
-        </p:spPr>
-        <p:style>
-          <a:lnRef idx="1">
-            <a:schemeClr val="accent1"/>
-          </a:lnRef>
-          <a:fillRef idx="3">
-            <a:schemeClr val="accent1"/>
-          </a:fillRef>
-          <a:effectRef idx="2">
-            <a:schemeClr val="accent1"/>
-          </a:effectRef>
-          <a:fontRef idx="minor">
-            <a:schemeClr val="lt1"/>
-          </a:fontRef>
-        </p:style>
-        <p:txBody>
-          <a:bodyPr rtlCol="0" anchor="ctr"/>
-          <a:lstStyle/>
-          <a:p/>
-        </p:txBody>
-      </p:sp>
-      <p:sp>
-        <p:nvSpPr>
-          <p:cNvPr id="34" name="TextBox 33"/>
-          <p:cNvSpPr txBox="1"/>
-          <p:nvPr/>
-        </p:nvSpPr>
-        <p:spPr>
-          <a:xfrm>
-            <a:off x="3848100" y="6191250"/>
-            <a:ext cx="3429000" cy="323850"/>
-          </a:xfrm>
-          <a:prstGeom prst="rect">
-            <a:avLst/>
-          </a:prstGeom>
-          <a:noFill/>
-        </p:spPr>
-        <p:txBody>
-          <a:bodyPr wrap="square" lIns="0" rIns="0" tIns="0" bIns="0" anchor="t">
-            <a:spAutoFit/>
-          </a:bodyPr>
-          <a:lstStyle/>
-          <a:p>
-            <a:pPr algn="r">
-              <a:lnSpc>
-                <a:spcPct val="135000"/>
-              </a:lnSpc>
-            </a:pPr>
-            <a:r>
-              <a:rPr sz="1275" b="0">
-                <a:solidFill>
-                  <a:srgbClr val="7C766D"/>
-                </a:solidFill>
-                <a:latin typeface="IBM Plex Mono"/>
-                <a:ea typeface="IBM Plex Mono"/>
-                <a:cs typeface="IBM Plex Mono"/>
-              </a:rPr>
-              <a:t>Gemini Flash</a:t>
-            </a:r>
-          </a:p>
-        </p:txBody>
-      </p:sp>
-      <p:sp>
-        <p:nvSpPr>
-          <p:cNvPr id="35" name="TextBox 34"/>
-          <p:cNvSpPr txBox="1"/>
-          <p:nvPr/>
-        </p:nvSpPr>
-        <p:spPr>
-          <a:xfrm>
-            <a:off x="990600" y="6181725"/>
-            <a:ext cx="1905000" cy="342900"/>
-          </a:xfrm>
-          <a:prstGeom prst="rect">
-            <a:avLst/>
-          </a:prstGeom>
-          <a:noFill/>
-        </p:spPr>
-        <p:txBody>
-          <a:bodyPr wrap="square" lIns="0" rIns="0" tIns="0" bIns="0" anchor="t">
-            <a:spAutoFit/>
-          </a:bodyPr>
-          <a:lstStyle/>
-          <a:p>
-            <a:pPr algn="l">
-              <a:lnSpc>
-                <a:spcPct val="135000"/>
-              </a:lnSpc>
-            </a:pPr>
-            <a:r>
-              <a:rPr sz="1350" b="1">
-                <a:solidFill>
-                  <a:srgbClr val="F7F3EC"/>
-                </a:solidFill>
-                <a:latin typeface="IBM Plex Mono"/>
-                <a:ea typeface="IBM Plex Mono"/>
-                <a:cs typeface="IBM Plex Mono"/>
-              </a:rPr>
-              <a:t>$2</a:t>
-            </a:r>
-          </a:p>
-        </p:txBody>
-      </p:sp>
-      <p:sp>
-        <p:nvSpPr>
-          <p:cNvPr id="36" name="Rectangle 35"/>
-          <p:cNvSpPr/>
-          <p:nvPr/>
-        </p:nvSpPr>
-        <p:spPr>
-          <a:xfrm>
-            <a:off x="990600" y="6515100"/>
-            <a:ext cx="6286500" cy="9525"/>
-          </a:xfrm>
-          <a:prstGeom prst="rect">
-            <a:avLst/>
-          </a:prstGeom>
-          <a:solidFill>
-            <a:srgbClr val="241F1B"/>
-          </a:solidFill>
-          <a:ln>
-            <a:noFill/>
-          </a:ln>
-          <a:effectLst/>
-        </p:spPr>
-        <p:style>
-          <a:lnRef idx="1">
-            <a:schemeClr val="accent1"/>
-          </a:lnRef>
-          <a:fillRef idx="3">
-            <a:schemeClr val="accent1"/>
-          </a:fillRef>
-          <a:effectRef idx="2">
-            <a:schemeClr val="accent1"/>
-          </a:effectRef>
-          <a:fontRef idx="minor">
-            <a:schemeClr val="lt1"/>
-          </a:fontRef>
-        </p:style>
-        <p:txBody>
-          <a:bodyPr rtlCol="0" anchor="ctr"/>
-          <a:lstStyle/>
-          <a:p/>
-        </p:txBody>
-      </p:sp>
-      <p:sp>
-        <p:nvSpPr>
-          <p:cNvPr id="37" name="TextBox 36"/>
-          <p:cNvSpPr txBox="1"/>
-          <p:nvPr/>
-        </p:nvSpPr>
-        <p:spPr>
-          <a:xfrm>
-            <a:off x="3848100" y="6629400"/>
-            <a:ext cx="3429000" cy="323850"/>
-          </a:xfrm>
-          <a:prstGeom prst="rect">
-            <a:avLst/>
-          </a:prstGeom>
-          <a:noFill/>
-        </p:spPr>
-        <p:txBody>
-          <a:bodyPr wrap="square" lIns="0" rIns="0" tIns="0" bIns="0" anchor="t">
-            <a:spAutoFit/>
-          </a:bodyPr>
-          <a:lstStyle/>
-          <a:p>
-            <a:pPr algn="r">
-              <a:lnSpc>
-                <a:spcPct val="135000"/>
-              </a:lnSpc>
-            </a:pPr>
-            <a:r>
-              <a:rPr sz="1275" b="0">
-                <a:solidFill>
-                  <a:srgbClr val="7C766D"/>
-                </a:solidFill>
-                <a:latin typeface="IBM Plex Mono"/>
-                <a:ea typeface="IBM Plex Mono"/>
-                <a:cs typeface="IBM Plex Mono"/>
-              </a:rPr>
-              <a:t>GPT-4o</a:t>
-            </a:r>
-          </a:p>
-        </p:txBody>
-      </p:sp>
-      <p:sp>
-        <p:nvSpPr>
-          <p:cNvPr id="38" name="TextBox 37"/>
-          <p:cNvSpPr txBox="1"/>
-          <p:nvPr/>
-        </p:nvSpPr>
-        <p:spPr>
-          <a:xfrm>
-            <a:off x="990600" y="6619875"/>
-            <a:ext cx="1905000" cy="342900"/>
-          </a:xfrm>
-          <a:prstGeom prst="rect">
-            <a:avLst/>
-          </a:prstGeom>
-          <a:noFill/>
-        </p:spPr>
-        <p:txBody>
-          <a:bodyPr wrap="square" lIns="0" rIns="0" tIns="0" bIns="0" anchor="t">
-            <a:spAutoFit/>
-          </a:bodyPr>
-          <a:lstStyle/>
-          <a:p>
-            <a:pPr algn="l">
-              <a:lnSpc>
-                <a:spcPct val="135000"/>
-              </a:lnSpc>
-            </a:pPr>
-            <a:r>
-              <a:rPr sz="1350" b="1">
-                <a:solidFill>
-                  <a:srgbClr val="F7F3EC"/>
-                </a:solidFill>
-                <a:latin typeface="IBM Plex Mono"/>
-                <a:ea typeface="IBM Plex Mono"/>
-                <a:cs typeface="IBM Plex Mono"/>
-              </a:rPr>
-              <a:t>$12</a:t>
-            </a:r>
-          </a:p>
-        </p:txBody>
-      </p:sp>
-      <p:sp>
-        <p:nvSpPr>
-          <p:cNvPr id="39" name="Rectangle 38"/>
-          <p:cNvSpPr/>
-          <p:nvPr/>
-        </p:nvSpPr>
-        <p:spPr>
-          <a:xfrm>
-            <a:off x="990600" y="6953250"/>
-            <a:ext cx="6286500" cy="9525"/>
-          </a:xfrm>
-          <a:prstGeom prst="rect">
-            <a:avLst/>
-          </a:prstGeom>
-          <a:solidFill>
-            <a:srgbClr val="241F1B"/>
-          </a:solidFill>
-          <a:ln>
-            <a:noFill/>
-          </a:ln>
-          <a:effectLst/>
-        </p:spPr>
-        <p:style>
-          <a:lnRef idx="1">
-            <a:schemeClr val="accent1"/>
-          </a:lnRef>
-          <a:fillRef idx="3">
-            <a:schemeClr val="accent1"/>
-          </a:fillRef>
-          <a:effectRef idx="2">
-            <a:schemeClr val="accent1"/>
-          </a:effectRef>
-          <a:fontRef idx="minor">
-            <a:schemeClr val="lt1"/>
-          </a:fontRef>
-        </p:style>
-        <p:txBody>
-          <a:bodyPr rtlCol="0" anchor="ctr"/>
-          <a:lstStyle/>
-          <a:p/>
-        </p:txBody>
-      </p:sp>
-      <p:sp>
-        <p:nvSpPr>
-          <p:cNvPr id="40" name="TextBox 39"/>
-          <p:cNvSpPr txBox="1"/>
-          <p:nvPr/>
-        </p:nvSpPr>
-        <p:spPr>
-          <a:xfrm>
-            <a:off x="3848100" y="7067550"/>
-            <a:ext cx="3429000" cy="323850"/>
-          </a:xfrm>
-          <a:prstGeom prst="rect">
-            <a:avLst/>
-          </a:prstGeom>
-          <a:noFill/>
-        </p:spPr>
-        <p:txBody>
-          <a:bodyPr wrap="square" lIns="0" rIns="0" tIns="0" bIns="0" anchor="t">
-            <a:spAutoFit/>
-          </a:bodyPr>
-          <a:lstStyle/>
-          <a:p>
-            <a:pPr algn="r">
-              <a:lnSpc>
-                <a:spcPct val="135000"/>
-              </a:lnSpc>
-            </a:pPr>
-            <a:r>
-              <a:rPr sz="1275" b="0">
-                <a:solidFill>
-                  <a:srgbClr val="7C766D"/>
-                </a:solidFill>
-                <a:latin typeface="IBM Plex Mono"/>
-                <a:ea typeface="IBM Plex Mono"/>
-                <a:cs typeface="IBM Plex Mono"/>
-              </a:rPr>
-              <a:t>Claude Opus</a:t>
-            </a:r>
-          </a:p>
-        </p:txBody>
-      </p:sp>
-      <p:sp>
-        <p:nvSpPr>
-          <p:cNvPr id="41" name="TextBox 40"/>
-          <p:cNvSpPr txBox="1"/>
-          <p:nvPr/>
-        </p:nvSpPr>
-        <p:spPr>
-          <a:xfrm>
-            <a:off x="990600" y="7058025"/>
-            <a:ext cx="1905000" cy="342900"/>
-          </a:xfrm>
-          <a:prstGeom prst="rect">
-            <a:avLst/>
-          </a:prstGeom>
-          <a:noFill/>
-        </p:spPr>
-        <p:txBody>
-          <a:bodyPr wrap="square" lIns="0" rIns="0" tIns="0" bIns="0" anchor="t">
-            <a:spAutoFit/>
-          </a:bodyPr>
-          <a:lstStyle/>
-          <a:p>
-            <a:pPr algn="l">
-              <a:lnSpc>
-                <a:spcPct val="135000"/>
-              </a:lnSpc>
-            </a:pPr>
-            <a:r>
-              <a:rPr sz="1350" b="1">
-                <a:solidFill>
-                  <a:srgbClr val="F7F3EC"/>
-                </a:solidFill>
-                <a:latin typeface="IBM Plex Mono"/>
-                <a:ea typeface="IBM Plex Mono"/>
-                <a:cs typeface="IBM Plex Mono"/>
-              </a:rPr>
-              <a:t>$81</a:t>
-            </a:r>
-          </a:p>
-        </p:txBody>
-      </p:sp>
-    </p:spTree>
-  </p:cSld>
-  <p:clrMapOvr>
-    <a:masterClrMapping/>
-  </p:clrMapOvr>
-</p:sld>
-</file>
-
-<file path=ppt/slides/slide17.xml><?xml version="1.0" encoding="utf-8"?>
-<p:sld xmlns:a="http://schemas.openxmlformats.org/drawingml/2006/main" xmlns:p="http://schemas.openxmlformats.org/presentationml/2006/main" xmlns:r="http://schemas.openxmlformats.org/officeDocument/2006/relationships">
-  <p:cSld>
-    <p:spTree>
-      <p:nvGrpSpPr>
-        <p:cNvPr id="1" name=""/>
-        <p:cNvGrpSpPr/>
-        <p:nvPr/>
-      </p:nvGrpSpPr>
-      <p:grpSpPr/>
-      <p:sp>
-        <p:nvSpPr>
-          <p:cNvPr id="2" name="Rectangle 1"/>
-          <p:cNvSpPr/>
-          <p:nvPr/>
-        </p:nvSpPr>
-        <p:spPr>
-          <a:xfrm>
-            <a:off x="0" y="0"/>
-            <a:ext cx="15240000" cy="8572500"/>
-          </a:xfrm>
-          <a:prstGeom prst="rect">
-            <a:avLst/>
-          </a:prstGeom>
-          <a:solidFill>
-            <a:srgbClr val="0B0A09"/>
-          </a:solidFill>
-          <a:ln>
-            <a:noFill/>
-          </a:ln>
-          <a:effectLst/>
-        </p:spPr>
-        <p:style>
-          <a:lnRef idx="1">
-            <a:schemeClr val="accent1"/>
-          </a:lnRef>
-          <a:fillRef idx="3">
-            <a:schemeClr val="accent1"/>
-          </a:fillRef>
-          <a:effectRef idx="2">
-            <a:schemeClr val="accent1"/>
-          </a:effectRef>
-          <a:fontRef idx="minor">
-            <a:schemeClr val="lt1"/>
-          </a:fontRef>
-        </p:style>
-        <p:txBody>
-          <a:bodyPr rtlCol="0" anchor="ctr"/>
-          <a:lstStyle/>
-          <a:p/>
-        </p:txBody>
-      </p:sp>
-      <p:sp>
-        <p:nvSpPr>
-          <p:cNvPr id="3" name="Rectangle 2"/>
-          <p:cNvSpPr/>
-          <p:nvPr/>
-        </p:nvSpPr>
-        <p:spPr>
-          <a:xfrm>
-            <a:off x="11010900" y="2247900"/>
-            <a:ext cx="3238500" cy="114300"/>
-          </a:xfrm>
-          <a:prstGeom prst="rect">
-            <a:avLst/>
-          </a:prstGeom>
-          <a:solidFill>
-            <a:srgbClr val="FF5C1A"/>
-          </a:solidFill>
-          <a:ln>
-            <a:noFill/>
-          </a:ln>
-          <a:effectLst/>
-        </p:spPr>
-        <p:style>
-          <a:lnRef idx="1">
-            <a:schemeClr val="accent1"/>
-          </a:lnRef>
-          <a:fillRef idx="3">
-            <a:schemeClr val="accent1"/>
-          </a:fillRef>
-          <a:effectRef idx="2">
-            <a:schemeClr val="accent1"/>
-          </a:effectRef>
-          <a:fontRef idx="minor">
-            <a:schemeClr val="lt1"/>
-          </a:fontRef>
-        </p:style>
-        <p:txBody>
-          <a:bodyPr rtlCol="0" anchor="ctr"/>
-          <a:lstStyle/>
-          <a:p/>
-        </p:txBody>
-      </p:sp>
-      <p:sp>
-        <p:nvSpPr>
-          <p:cNvPr id="4" name="TextBox 3"/>
-          <p:cNvSpPr txBox="1"/>
-          <p:nvPr/>
-        </p:nvSpPr>
-        <p:spPr>
-          <a:xfrm>
-            <a:off x="990600" y="2781300"/>
-            <a:ext cx="13258800" cy="1143000"/>
-          </a:xfrm>
-          <a:prstGeom prst="rect">
-            <a:avLst/>
-          </a:prstGeom>
-          <a:noFill/>
-        </p:spPr>
-        <p:txBody>
-          <a:bodyPr wrap="square" lIns="0" rIns="0" tIns="0" bIns="0" anchor="t">
-            <a:spAutoFit/>
-          </a:bodyPr>
-          <a:lstStyle/>
-          <a:p>
-            <a:pPr algn="r" rtl="1">
-              <a:lnSpc>
-                <a:spcPct val="130000"/>
-              </a:lnSpc>
-            </a:pPr>
-            <a:r>
-              <a:rPr sz="6450" b="1">
-                <a:solidFill>
-                  <a:srgbClr val="7C766D"/>
-                </a:solidFill>
-                <a:latin typeface="IBM Plex Sans Arabic"/>
-                <a:ea typeface="IBM Plex Sans Arabic"/>
-                <a:cs typeface="IBM Plex Sans Arabic"/>
-              </a:rPr>
-              <a:t>مساهمة تعرف مين سجّل.</a:t>
-            </a:r>
-          </a:p>
-        </p:txBody>
-      </p:sp>
-      <p:sp>
-        <p:nvSpPr>
-          <p:cNvPr id="5" name="TextBox 4"/>
-          <p:cNvSpPr txBox="1"/>
-          <p:nvPr/>
-        </p:nvSpPr>
-        <p:spPr>
-          <a:xfrm>
-            <a:off x="990600" y="3848100"/>
-            <a:ext cx="13258800" cy="1143000"/>
-          </a:xfrm>
-          <a:prstGeom prst="rect">
-            <a:avLst/>
-          </a:prstGeom>
-          <a:noFill/>
-        </p:spPr>
-        <p:txBody>
-          <a:bodyPr wrap="square" lIns="0" rIns="0" tIns="0" bIns="0" anchor="t">
-            <a:spAutoFit/>
-          </a:bodyPr>
-          <a:lstStyle/>
-          <a:p>
-            <a:pPr algn="r" rtl="1">
-              <a:lnSpc>
-                <a:spcPct val="130000"/>
-              </a:lnSpc>
-            </a:pPr>
-            <a:r>
-              <a:rPr sz="6450" b="1">
-                <a:solidFill>
-                  <a:srgbClr val="F7F3EC"/>
-                </a:solidFill>
-                <a:latin typeface="IBM Plex Sans Arabic"/>
-                <a:ea typeface="IBM Plex Sans Arabic"/>
-                <a:cs typeface="IBM Plex Sans Arabic"/>
-              </a:rPr>
-              <a:t>كامن يعرف اللي ما رفع يده.</a:t>
-            </a:r>
-          </a:p>
-        </p:txBody>
-      </p:sp>
-      <p:sp>
-        <p:nvSpPr>
-          <p:cNvPr id="6" name="TextBox 5"/>
-          <p:cNvSpPr txBox="1"/>
-          <p:nvPr/>
-        </p:nvSpPr>
-        <p:spPr>
-          <a:xfrm>
-            <a:off x="990600" y="5295900"/>
-            <a:ext cx="13258800" cy="571500"/>
-          </a:xfrm>
-          <a:prstGeom prst="rect">
-            <a:avLst/>
-          </a:prstGeom>
-          <a:noFill/>
-        </p:spPr>
-        <p:txBody>
-          <a:bodyPr wrap="square" lIns="0" rIns="0" tIns="0" bIns="0" anchor="t">
-            <a:spAutoFit/>
-          </a:bodyPr>
-          <a:lstStyle/>
-          <a:p>
-            <a:pPr algn="r" rtl="1">
-              <a:lnSpc>
-                <a:spcPct val="135000"/>
-              </a:lnSpc>
-            </a:pPr>
-            <a:r>
-              <a:rPr sz="2250" b="0">
-                <a:solidFill>
-                  <a:srgbClr val="7C766D"/>
-                </a:solidFill>
-                <a:latin typeface="IBM Plex Sans Arabic"/>
-                <a:ea typeface="IBM Plex Sans Arabic"/>
-                <a:cs typeface="IBM Plex Sans Arabic"/>
-              </a:rPr>
-              <a:t>احنا مو بديل للمنصة. احنا الطبقة اللي تحتها.</a:t>
-            </a:r>
-          </a:p>
-        </p:txBody>
-      </p:sp>
-    </p:spTree>
-  </p:cSld>
-  <p:clrMapOvr>
-    <a:masterClrMapping/>
-  </p:clrMapOvr>
-</p:sld>
-</file>
-
-<file path=ppt/slides/slide18.xml><?xml version="1.0" encoding="utf-8"?>
-<p:sld xmlns:a="http://schemas.openxmlformats.org/drawingml/2006/main" xmlns:p="http://schemas.openxmlformats.org/presentationml/2006/main" xmlns:r="http://schemas.openxmlformats.org/officeDocument/2006/relationships">
-  <p:cSld>
-    <p:spTree>
-      <p:nvGrpSpPr>
-        <p:cNvPr id="1" name=""/>
-        <p:cNvGrpSpPr/>
-        <p:nvPr/>
-      </p:nvGrpSpPr>
-      <p:grpSpPr/>
-      <p:sp>
-        <p:nvSpPr>
-          <p:cNvPr id="2" name="Rectangle 1"/>
-          <p:cNvSpPr/>
-          <p:nvPr/>
-        </p:nvSpPr>
-        <p:spPr>
-          <a:xfrm>
-            <a:off x="0" y="0"/>
-            <a:ext cx="15240000" cy="8572500"/>
-          </a:xfrm>
-          <a:prstGeom prst="rect">
-            <a:avLst/>
-          </a:prstGeom>
-          <a:solidFill>
-            <a:srgbClr val="0B0A09"/>
-          </a:solidFill>
-          <a:ln>
-            <a:noFill/>
-          </a:ln>
-          <a:effectLst/>
-        </p:spPr>
-        <p:style>
-          <a:lnRef idx="1">
-            <a:schemeClr val="accent1"/>
-          </a:lnRef>
-          <a:fillRef idx="3">
-            <a:schemeClr val="accent1"/>
-          </a:fillRef>
-          <a:effectRef idx="2">
-            <a:schemeClr val="accent1"/>
-          </a:effectRef>
-          <a:fontRef idx="minor">
-            <a:schemeClr val="lt1"/>
-          </a:fontRef>
-        </p:style>
-        <p:txBody>
-          <a:bodyPr rtlCol="0" anchor="ctr"/>
-          <a:lstStyle/>
-          <a:p/>
-        </p:txBody>
-      </p:sp>
-      <p:sp>
-        <p:nvSpPr>
-          <p:cNvPr id="3" name="TextBox 2"/>
-          <p:cNvSpPr txBox="1"/>
-          <p:nvPr/>
-        </p:nvSpPr>
-        <p:spPr>
-          <a:xfrm>
-            <a:off x="990600" y="800100"/>
-            <a:ext cx="3810000" cy="285750"/>
-          </a:xfrm>
-          <a:prstGeom prst="rect">
-            <a:avLst/>
-          </a:prstGeom>
-          <a:noFill/>
-        </p:spPr>
-        <p:txBody>
-          <a:bodyPr wrap="square" lIns="0" rIns="0" tIns="0" bIns="0" anchor="t">
-            <a:spAutoFit/>
-          </a:bodyPr>
-          <a:lstStyle/>
-          <a:p>
-            <a:pPr algn="r" rtl="1">
-              <a:lnSpc>
-                <a:spcPct val="135000"/>
-              </a:lnSpc>
-            </a:pPr>
-            <a:r>
-              <a:rPr sz="1125" b="0">
-                <a:solidFill>
-                  <a:srgbClr val="7C766D"/>
-                </a:solidFill>
-                <a:latin typeface="IBM Plex Mono"/>
-                <a:ea typeface="IBM Plex Mono"/>
-                <a:cs typeface="IBM Plex Mono"/>
-              </a:rPr>
-              <a:t>18</a:t>
-            </a:r>
-          </a:p>
-        </p:txBody>
-      </p:sp>
-      <p:sp>
-        <p:nvSpPr>
-          <p:cNvPr id="4" name="TextBox 3"/>
-          <p:cNvSpPr txBox="1"/>
-          <p:nvPr/>
-        </p:nvSpPr>
-        <p:spPr>
-          <a:xfrm>
-            <a:off x="10439400" y="800100"/>
-            <a:ext cx="3810000" cy="342900"/>
-          </a:xfrm>
-          <a:prstGeom prst="rect">
-            <a:avLst/>
-          </a:prstGeom>
-          <a:noFill/>
-        </p:spPr>
-        <p:txBody>
-          <a:bodyPr wrap="square" lIns="0" rIns="0" tIns="0" bIns="0" anchor="t">
-            <a:spAutoFit/>
-          </a:bodyPr>
-          <a:lstStyle/>
-          <a:p>
-            <a:pPr algn="l" rtl="1">
-              <a:lnSpc>
-                <a:spcPct val="135000"/>
-              </a:lnSpc>
-            </a:pPr>
-            <a:r>
-              <a:rPr sz="1350" b="0">
-                <a:solidFill>
-                  <a:srgbClr val="7C766D"/>
-                </a:solidFill>
-                <a:latin typeface="IBM Plex Sans Arabic"/>
-                <a:ea typeface="IBM Plex Sans Arabic"/>
-                <a:cs typeface="IBM Plex Sans Arabic"/>
-              </a:rPr>
-              <a:t>من نحن</a:t>
-            </a:r>
-          </a:p>
-        </p:txBody>
-      </p:sp>
-      <p:sp>
-        <p:nvSpPr>
-          <p:cNvPr id="5" name="Rectangle 4"/>
-          <p:cNvSpPr/>
-          <p:nvPr/>
-        </p:nvSpPr>
-        <p:spPr>
-          <a:xfrm>
-            <a:off x="990600" y="7620000"/>
-            <a:ext cx="13258800" cy="9525"/>
-          </a:xfrm>
-          <a:prstGeom prst="rect">
-            <a:avLst/>
-          </a:prstGeom>
-          <a:solidFill>
-            <a:srgbClr val="241F1B"/>
-          </a:solidFill>
-          <a:ln>
-            <a:noFill/>
-          </a:ln>
-          <a:effectLst/>
-        </p:spPr>
-        <p:style>
-          <a:lnRef idx="1">
-            <a:schemeClr val="accent1"/>
-          </a:lnRef>
-          <a:fillRef idx="3">
-            <a:schemeClr val="accent1"/>
-          </a:fillRef>
-          <a:effectRef idx="2">
-            <a:schemeClr val="accent1"/>
-          </a:effectRef>
-          <a:fontRef idx="minor">
-            <a:schemeClr val="lt1"/>
-          </a:fontRef>
-        </p:style>
-        <p:txBody>
-          <a:bodyPr rtlCol="0" anchor="ctr"/>
-          <a:lstStyle/>
-          <a:p/>
-        </p:txBody>
-      </p:sp>
-      <p:sp>
-        <p:nvSpPr>
-          <p:cNvPr id="6" name="TextBox 5"/>
-          <p:cNvSpPr txBox="1"/>
-          <p:nvPr/>
-        </p:nvSpPr>
-        <p:spPr>
-          <a:xfrm>
-            <a:off x="990600" y="7734300"/>
-            <a:ext cx="3810000" cy="266700"/>
-          </a:xfrm>
-          <a:prstGeom prst="rect">
-            <a:avLst/>
-          </a:prstGeom>
-          <a:noFill/>
-        </p:spPr>
-        <p:txBody>
-          <a:bodyPr wrap="square" lIns="0" rIns="0" tIns="0" bIns="0" anchor="t">
-            <a:spAutoFit/>
-          </a:bodyPr>
-          <a:lstStyle/>
-          <a:p>
-            <a:pPr algn="r" rtl="1">
-              <a:lnSpc>
-                <a:spcPct val="135000"/>
-              </a:lnSpc>
-            </a:pPr>
-            <a:r>
-              <a:rPr sz="1050" b="0">
-                <a:solidFill>
-                  <a:srgbClr val="241F1B"/>
-                </a:solidFill>
-                <a:latin typeface="IBM Plex Mono"/>
-                <a:ea typeface="IBM Plex Mono"/>
-                <a:cs typeface="IBM Plex Mono"/>
-              </a:rPr>
-              <a:t>18 / 18</a:t>
+              <a:t>16 / 16</a:t>
             </a:r>
           </a:p>
         </p:txBody>
@@ -11465,7 +10961,7 @@
                 <a:ea typeface="IBM Plex Mono"/>
                 <a:cs typeface="IBM Plex Mono"/>
               </a:rPr>
-              <a:t>02 / 18</a:t>
+              <a:t>02 / 16</a:t>
             </a:r>
           </a:p>
         </p:txBody>
@@ -11920,7 +11416,7 @@
                 <a:ea typeface="IBM Plex Mono"/>
                 <a:cs typeface="IBM Plex Mono"/>
               </a:rPr>
-              <a:t>03 / 18</a:t>
+              <a:t>03 / 16</a:t>
             </a:r>
           </a:p>
         </p:txBody>
@@ -12728,7 +12224,7 @@
                 <a:ea typeface="IBM Plex Mono"/>
                 <a:cs typeface="IBM Plex Mono"/>
               </a:rPr>
-              <a:t>04 / 18</a:t>
+              <a:t>04 / 16</a:t>
             </a:r>
           </a:p>
         </p:txBody>
@@ -13141,7 +12637,7 @@
                 <a:ea typeface="IBM Plex Mono"/>
                 <a:cs typeface="IBM Plex Mono"/>
               </a:rPr>
-              <a:t>05 / 18</a:t>
+              <a:t>05 / 16</a:t>
             </a:r>
           </a:p>
         </p:txBody>
@@ -13324,7 +12820,7 @@
                 <a:ea typeface="IBM Plex Sans Arabic"/>
                 <a:cs typeface="IBM Plex Sans Arabic"/>
               </a:rPr>
-              <a:t>وش هو كامن؟</a:t>
+              <a:t>طيب كيف نحلها؟</a:t>
             </a:r>
           </a:p>
         </p:txBody>
@@ -13407,7 +12903,7 @@
                 <a:ea typeface="IBM Plex Mono"/>
                 <a:cs typeface="IBM Plex Mono"/>
               </a:rPr>
-              <a:t>06 / 18</a:t>
+              <a:t>06 / 16</a:t>
             </a:r>
           </a:p>
         </p:txBody>
@@ -13453,9 +12949,92 @@
           </a:p>
         </p:txBody>
       </p:sp>
+      <p:sp>
+        <p:nvSpPr>
+          <p:cNvPr id="8" name="TextBox 7"/>
+          <p:cNvSpPr txBox="1"/>
+          <p:nvPr/>
+        </p:nvSpPr>
+        <p:spPr>
+          <a:xfrm>
+            <a:off x="990600" y="1600200"/>
+            <a:ext cx="13258800" cy="800100"/>
+          </a:xfrm>
+          <a:prstGeom prst="rect">
+            <a:avLst/>
+          </a:prstGeom>
+          <a:noFill/>
+        </p:spPr>
+        <p:txBody>
+          <a:bodyPr wrap="square" lIns="0" rIns="0" tIns="0" bIns="0" anchor="t">
+            <a:spAutoFit/>
+          </a:bodyPr>
+          <a:lstStyle/>
+          <a:p>
+            <a:pPr algn="r" rtl="1">
+              <a:lnSpc>
+                <a:spcPct val="135000"/>
+              </a:lnSpc>
+            </a:pPr>
+            <a:r>
+              <a:rPr sz="4350" b="1">
+                <a:solidFill>
+                  <a:srgbClr val="F7F3EC"/>
+                </a:solidFill>
+                <a:latin typeface="IBM Plex Sans Arabic"/>
+                <a:ea typeface="IBM Plex Sans Arabic"/>
+                <a:cs typeface="IBM Plex Sans Arabic"/>
+              </a:rPr>
+              <a:t>ببساطة. نوظّف فريق.</a:t>
+            </a:r>
+          </a:p>
+        </p:txBody>
+      </p:sp>
+      <p:sp>
+        <p:nvSpPr>
+          <p:cNvPr id="9" name="Rectangle 8"/>
+          <p:cNvSpPr/>
+          <p:nvPr/>
+        </p:nvSpPr>
+        <p:spPr>
+          <a:xfrm>
+            <a:off x="11077575" y="2552700"/>
+            <a:ext cx="3171825" cy="28575"/>
+          </a:xfrm>
+          <a:prstGeom prst="rect">
+            <a:avLst/>
+          </a:prstGeom>
+          <a:solidFill>
+            <a:srgbClr val="FF5C1A"/>
+          </a:solidFill>
+          <a:ln>
+            <a:noFill/>
+          </a:ln>
+          <a:effectLst/>
+        </p:spPr>
+        <p:style>
+          <a:lnRef idx="1">
+            <a:schemeClr val="accent1"/>
+          </a:lnRef>
+          <a:fillRef idx="3">
+            <a:schemeClr val="accent1"/>
+          </a:fillRef>
+          <a:effectRef idx="2">
+            <a:schemeClr val="accent1"/>
+          </a:effectRef>
+          <a:fontRef idx="minor">
+            <a:schemeClr val="lt1"/>
+          </a:fontRef>
+        </p:style>
+        <p:txBody>
+          <a:bodyPr rtlCol="0" anchor="ctr"/>
+          <a:lstStyle/>
+          <a:p/>
+        </p:txBody>
+      </p:sp>
       <p:pic>
         <p:nvPicPr>
-          <p:cNvPr id="8" name="Picture 7" descr="KAMIN.png"/>
+          <p:cNvPr id="10" name="Picture 9" descr="fig-coordinator.png"/>
           <p:cNvPicPr>
             <a:picLocks noChangeAspect="1"/>
           </p:cNvPicPr>
@@ -13469,8 +13048,8 @@
         </p:blipFill>
         <p:spPr>
           <a:xfrm>
-            <a:off x="12992100" y="2209800"/>
-            <a:ext cx="1257300" cy="1257300"/>
+            <a:off x="11991975" y="2724150"/>
+            <a:ext cx="1343025" cy="1492250"/>
           </a:xfrm>
           <a:prstGeom prst="rect">
             <a:avLst/>
@@ -13479,33 +13058,33 @@
       </p:pic>
       <p:sp>
         <p:nvSpPr>
-          <p:cNvPr id="9" name="TextBox 8"/>
-          <p:cNvSpPr txBox="1"/>
-          <p:nvPr/>
-        </p:nvSpPr>
-        <p:spPr>
-          <a:xfrm>
-            <a:off x="8991600" y="2286000"/>
-            <a:ext cx="3810000" cy="1047750"/>
-          </a:xfrm>
-          <a:prstGeom prst="rect">
-            <a:avLst/>
-          </a:prstGeom>
-          <a:noFill/>
-        </p:spPr>
-        <p:txBody>
-          <a:bodyPr wrap="square" lIns="0" rIns="0" tIns="0" bIns="0" anchor="t">
-            <a:spAutoFit/>
-          </a:bodyPr>
-          <a:lstStyle/>
-          <a:p>
-            <a:pPr algn="r" rtl="1">
-              <a:lnSpc>
-                <a:spcPct val="105000"/>
-              </a:lnSpc>
-            </a:pPr>
-            <a:r>
-              <a:rPr sz="6600" b="1">
+          <p:cNvPr id="11" name="TextBox 10"/>
+          <p:cNvSpPr txBox="1"/>
+          <p:nvPr/>
+        </p:nvSpPr>
+        <p:spPr>
+          <a:xfrm>
+            <a:off x="11077575" y="4610100"/>
+            <a:ext cx="3171825" cy="438150"/>
+          </a:xfrm>
+          <a:prstGeom prst="rect">
+            <a:avLst/>
+          </a:prstGeom>
+          <a:noFill/>
+        </p:spPr>
+        <p:txBody>
+          <a:bodyPr wrap="square" lIns="0" rIns="0" tIns="0" bIns="0" anchor="t">
+            <a:spAutoFit/>
+          </a:bodyPr>
+          <a:lstStyle/>
+          <a:p>
+            <a:pPr algn="ctr" rtl="1">
+              <a:lnSpc>
+                <a:spcPct val="135000"/>
+              </a:lnSpc>
+            </a:pPr>
+            <a:r>
+              <a:rPr sz="2400" b="1">
                 <a:solidFill>
                   <a:srgbClr val="F7F3EC"/>
                 </a:solidFill>
@@ -13513,89 +13092,7 @@
                 <a:ea typeface="IBM Plex Sans Arabic"/>
                 <a:cs typeface="IBM Plex Sans Arabic"/>
               </a:rPr>
-              <a:t>كامن</a:t>
-            </a:r>
-          </a:p>
-        </p:txBody>
-      </p:sp>
-      <p:sp>
-        <p:nvSpPr>
-          <p:cNvPr id="10" name="TextBox 9"/>
-          <p:cNvSpPr txBox="1"/>
-          <p:nvPr/>
-        </p:nvSpPr>
-        <p:spPr>
-          <a:xfrm>
-            <a:off x="8991600" y="3333750"/>
-            <a:ext cx="3810000" cy="419100"/>
-          </a:xfrm>
-          <a:prstGeom prst="rect">
-            <a:avLst/>
-          </a:prstGeom>
-          <a:noFill/>
-        </p:spPr>
-        <p:txBody>
-          <a:bodyPr wrap="square" lIns="0" rIns="0" tIns="0" bIns="0" anchor="t">
-            <a:spAutoFit/>
-          </a:bodyPr>
-          <a:lstStyle/>
-          <a:p>
-            <a:pPr algn="r" rtl="1">
-              <a:lnSpc>
-                <a:spcPct val="135000"/>
-              </a:lnSpc>
-            </a:pPr>
-            <a:r>
-              <a:rPr sz="1650" b="0">
-                <a:solidFill>
-                  <a:srgbClr val="7C766D"/>
-                </a:solidFill>
-                <a:latin typeface="IBM Plex Sans Arabic"/>
-                <a:ea typeface="IBM Plex Sans Arabic"/>
-                <a:cs typeface="IBM Plex Sans Arabic"/>
-              </a:rPr>
-              <a:t>الموجود الغير مكتشف</a:t>
-            </a:r>
-          </a:p>
-        </p:txBody>
-      </p:sp>
-      <p:sp>
-        <p:nvSpPr>
-          <p:cNvPr id="11" name="TextBox 10"/>
-          <p:cNvSpPr txBox="1"/>
-          <p:nvPr/>
-        </p:nvSpPr>
-        <p:spPr>
-          <a:xfrm>
-            <a:off x="8991600" y="3657600"/>
-            <a:ext cx="3810000" cy="323850"/>
-          </a:xfrm>
-          <a:prstGeom prst="rect">
-            <a:avLst/>
-          </a:prstGeom>
-          <a:noFill/>
-        </p:spPr>
-        <p:txBody>
-          <a:bodyPr wrap="square" lIns="0" rIns="0" tIns="0" bIns="0" anchor="t">
-            <a:spAutoFit/>
-          </a:bodyPr>
-          <a:lstStyle/>
-          <a:p>
-            <a:pPr algn="r">
-              <a:lnSpc>
-                <a:spcPct val="135000"/>
-              </a:lnSpc>
-            </a:pPr>
-            <a:r>
-              <a:rPr sz="1275" b="0">
-                <a:solidFill>
-                  <a:srgbClr val="FF5C1A"/>
-                </a:solidFill>
-                <a:latin typeface="IBM Plex Mono"/>
-                <a:ea typeface="IBM Plex Mono"/>
-                <a:cs typeface="IBM Plex Mono"/>
-              </a:rPr>
-              <a:t>K A M I N</a:t>
+              <a:t>المنسّق</a:t>
             </a:r>
           </a:p>
         </p:txBody>
@@ -13608,8 +13105,329 @@
         </p:nvSpPr>
         <p:spPr>
           <a:xfrm>
-            <a:off x="8724900" y="2209800"/>
-            <a:ext cx="9525" cy="1619250"/>
+            <a:off x="7715250" y="2552700"/>
+            <a:ext cx="3171825" cy="28575"/>
+          </a:xfrm>
+          <a:prstGeom prst="rect">
+            <a:avLst/>
+          </a:prstGeom>
+          <a:solidFill>
+            <a:srgbClr val="FF5C1A"/>
+          </a:solidFill>
+          <a:ln>
+            <a:noFill/>
+          </a:ln>
+          <a:effectLst/>
+        </p:spPr>
+        <p:style>
+          <a:lnRef idx="1">
+            <a:schemeClr val="accent1"/>
+          </a:lnRef>
+          <a:fillRef idx="3">
+            <a:schemeClr val="accent1"/>
+          </a:fillRef>
+          <a:effectRef idx="2">
+            <a:schemeClr val="accent1"/>
+          </a:effectRef>
+          <a:fontRef idx="minor">
+            <a:schemeClr val="lt1"/>
+          </a:fontRef>
+        </p:style>
+        <p:txBody>
+          <a:bodyPr rtlCol="0" anchor="ctr"/>
+          <a:lstStyle/>
+          <a:p/>
+        </p:txBody>
+      </p:sp>
+      <p:pic>
+        <p:nvPicPr>
+          <p:cNvPr id="13" name="Picture 12" descr="fig-detective.png"/>
+          <p:cNvPicPr>
+            <a:picLocks noChangeAspect="1"/>
+          </p:cNvPicPr>
+          <p:nvPr/>
+        </p:nvPicPr>
+        <p:blipFill>
+          <a:blip r:embed="rId3"/>
+          <a:stretch>
+            <a:fillRect/>
+          </a:stretch>
+        </p:blipFill>
+        <p:spPr>
+          <a:xfrm>
+            <a:off x="8629650" y="2724150"/>
+            <a:ext cx="1343025" cy="1413711"/>
+          </a:xfrm>
+          <a:prstGeom prst="rect">
+            <a:avLst/>
+          </a:prstGeom>
+        </p:spPr>
+      </p:pic>
+      <p:sp>
+        <p:nvSpPr>
+          <p:cNvPr id="14" name="TextBox 13"/>
+          <p:cNvSpPr txBox="1"/>
+          <p:nvPr/>
+        </p:nvSpPr>
+        <p:spPr>
+          <a:xfrm>
+            <a:off x="7715250" y="4610100"/>
+            <a:ext cx="3171825" cy="438150"/>
+          </a:xfrm>
+          <a:prstGeom prst="rect">
+            <a:avLst/>
+          </a:prstGeom>
+          <a:noFill/>
+        </p:spPr>
+        <p:txBody>
+          <a:bodyPr wrap="square" lIns="0" rIns="0" tIns="0" bIns="0" anchor="t">
+            <a:spAutoFit/>
+          </a:bodyPr>
+          <a:lstStyle/>
+          <a:p>
+            <a:pPr algn="ctr" rtl="1">
+              <a:lnSpc>
+                <a:spcPct val="135000"/>
+              </a:lnSpc>
+            </a:pPr>
+            <a:r>
+              <a:rPr sz="2400" b="1">
+                <a:solidFill>
+                  <a:srgbClr val="F7F3EC"/>
+                </a:solidFill>
+                <a:latin typeface="IBM Plex Sans Arabic"/>
+                <a:ea typeface="IBM Plex Sans Arabic"/>
+                <a:cs typeface="IBM Plex Sans Arabic"/>
+              </a:rPr>
+              <a:t>المحقّق</a:t>
+            </a:r>
+          </a:p>
+        </p:txBody>
+      </p:sp>
+      <p:sp>
+        <p:nvSpPr>
+          <p:cNvPr id="15" name="Rectangle 14"/>
+          <p:cNvSpPr/>
+          <p:nvPr/>
+        </p:nvSpPr>
+        <p:spPr>
+          <a:xfrm>
+            <a:off x="4352925" y="2552700"/>
+            <a:ext cx="3171825" cy="28575"/>
+          </a:xfrm>
+          <a:prstGeom prst="rect">
+            <a:avLst/>
+          </a:prstGeom>
+          <a:solidFill>
+            <a:srgbClr val="FF5C1A"/>
+          </a:solidFill>
+          <a:ln>
+            <a:noFill/>
+          </a:ln>
+          <a:effectLst/>
+        </p:spPr>
+        <p:style>
+          <a:lnRef idx="1">
+            <a:schemeClr val="accent1"/>
+          </a:lnRef>
+          <a:fillRef idx="3">
+            <a:schemeClr val="accent1"/>
+          </a:fillRef>
+          <a:effectRef idx="2">
+            <a:schemeClr val="accent1"/>
+          </a:effectRef>
+          <a:fontRef idx="minor">
+            <a:schemeClr val="lt1"/>
+          </a:fontRef>
+        </p:style>
+        <p:txBody>
+          <a:bodyPr rtlCol="0" anchor="ctr"/>
+          <a:lstStyle/>
+          <a:p/>
+        </p:txBody>
+      </p:sp>
+      <p:pic>
+        <p:nvPicPr>
+          <p:cNvPr id="16" name="Picture 15" descr="fig-auditor.png"/>
+          <p:cNvPicPr>
+            <a:picLocks noChangeAspect="1"/>
+          </p:cNvPicPr>
+          <p:nvPr/>
+        </p:nvPicPr>
+        <p:blipFill>
+          <a:blip r:embed="rId4"/>
+          <a:stretch>
+            <a:fillRect/>
+          </a:stretch>
+        </p:blipFill>
+        <p:spPr>
+          <a:xfrm>
+            <a:off x="5267325" y="2724150"/>
+            <a:ext cx="1343025" cy="1859573"/>
+          </a:xfrm>
+          <a:prstGeom prst="rect">
+            <a:avLst/>
+          </a:prstGeom>
+        </p:spPr>
+      </p:pic>
+      <p:sp>
+        <p:nvSpPr>
+          <p:cNvPr id="17" name="TextBox 16"/>
+          <p:cNvSpPr txBox="1"/>
+          <p:nvPr/>
+        </p:nvSpPr>
+        <p:spPr>
+          <a:xfrm>
+            <a:off x="4352925" y="4610100"/>
+            <a:ext cx="3171825" cy="438150"/>
+          </a:xfrm>
+          <a:prstGeom prst="rect">
+            <a:avLst/>
+          </a:prstGeom>
+          <a:noFill/>
+        </p:spPr>
+        <p:txBody>
+          <a:bodyPr wrap="square" lIns="0" rIns="0" tIns="0" bIns="0" anchor="t">
+            <a:spAutoFit/>
+          </a:bodyPr>
+          <a:lstStyle/>
+          <a:p>
+            <a:pPr algn="ctr" rtl="1">
+              <a:lnSpc>
+                <a:spcPct val="135000"/>
+              </a:lnSpc>
+            </a:pPr>
+            <a:r>
+              <a:rPr sz="2400" b="1">
+                <a:solidFill>
+                  <a:srgbClr val="F7F3EC"/>
+                </a:solidFill>
+                <a:latin typeface="IBM Plex Sans Arabic"/>
+                <a:ea typeface="IBM Plex Sans Arabic"/>
+                <a:cs typeface="IBM Plex Sans Arabic"/>
+              </a:rPr>
+              <a:t>المدقّق</a:t>
+            </a:r>
+          </a:p>
+        </p:txBody>
+      </p:sp>
+      <p:sp>
+        <p:nvSpPr>
+          <p:cNvPr id="18" name="Rectangle 17"/>
+          <p:cNvSpPr/>
+          <p:nvPr/>
+        </p:nvSpPr>
+        <p:spPr>
+          <a:xfrm>
+            <a:off x="990600" y="2552700"/>
+            <a:ext cx="3171825" cy="28575"/>
+          </a:xfrm>
+          <a:prstGeom prst="rect">
+            <a:avLst/>
+          </a:prstGeom>
+          <a:solidFill>
+            <a:srgbClr val="FF5C1A"/>
+          </a:solidFill>
+          <a:ln>
+            <a:noFill/>
+          </a:ln>
+          <a:effectLst/>
+        </p:spPr>
+        <p:style>
+          <a:lnRef idx="1">
+            <a:schemeClr val="accent1"/>
+          </a:lnRef>
+          <a:fillRef idx="3">
+            <a:schemeClr val="accent1"/>
+          </a:fillRef>
+          <a:effectRef idx="2">
+            <a:schemeClr val="accent1"/>
+          </a:effectRef>
+          <a:fontRef idx="minor">
+            <a:schemeClr val="lt1"/>
+          </a:fontRef>
+        </p:style>
+        <p:txBody>
+          <a:bodyPr rtlCol="0" anchor="ctr"/>
+          <a:lstStyle/>
+          <a:p/>
+        </p:txBody>
+      </p:sp>
+      <p:pic>
+        <p:nvPicPr>
+          <p:cNvPr id="19" name="Picture 18" descr="fig-advisor.png"/>
+          <p:cNvPicPr>
+            <a:picLocks noChangeAspect="1"/>
+          </p:cNvPicPr>
+          <p:nvPr/>
+        </p:nvPicPr>
+        <p:blipFill>
+          <a:blip r:embed="rId5"/>
+          <a:stretch>
+            <a:fillRect/>
+          </a:stretch>
+        </p:blipFill>
+        <p:spPr>
+          <a:xfrm>
+            <a:off x="1905000" y="2724150"/>
+            <a:ext cx="1343025" cy="1478560"/>
+          </a:xfrm>
+          <a:prstGeom prst="rect">
+            <a:avLst/>
+          </a:prstGeom>
+        </p:spPr>
+      </p:pic>
+      <p:sp>
+        <p:nvSpPr>
+          <p:cNvPr id="20" name="TextBox 19"/>
+          <p:cNvSpPr txBox="1"/>
+          <p:nvPr/>
+        </p:nvSpPr>
+        <p:spPr>
+          <a:xfrm>
+            <a:off x="990600" y="4610100"/>
+            <a:ext cx="3171825" cy="438150"/>
+          </a:xfrm>
+          <a:prstGeom prst="rect">
+            <a:avLst/>
+          </a:prstGeom>
+          <a:noFill/>
+        </p:spPr>
+        <p:txBody>
+          <a:bodyPr wrap="square" lIns="0" rIns="0" tIns="0" bIns="0" anchor="t">
+            <a:spAutoFit/>
+          </a:bodyPr>
+          <a:lstStyle/>
+          <a:p>
+            <a:pPr algn="ctr" rtl="1">
+              <a:lnSpc>
+                <a:spcPct val="135000"/>
+              </a:lnSpc>
+            </a:pPr>
+            <a:r>
+              <a:rPr sz="2400" b="1">
+                <a:solidFill>
+                  <a:srgbClr val="F7F3EC"/>
+                </a:solidFill>
+                <a:latin typeface="IBM Plex Sans Arabic"/>
+                <a:ea typeface="IBM Plex Sans Arabic"/>
+                <a:cs typeface="IBM Plex Sans Arabic"/>
+              </a:rPr>
+              <a:t>المستشار</a:t>
+            </a:r>
+          </a:p>
+        </p:txBody>
+      </p:sp>
+      <p:sp>
+        <p:nvSpPr>
+          <p:cNvPr id="21" name="Rectangle 20"/>
+          <p:cNvSpPr/>
+          <p:nvPr/>
+        </p:nvSpPr>
+        <p:spPr>
+          <a:xfrm>
+            <a:off x="990600" y="5391150"/>
+            <a:ext cx="13258800" cy="9525"/>
           </a:xfrm>
           <a:prstGeom prst="rect">
             <a:avLst/>
@@ -13644,14 +13462,14 @@
       </p:sp>
       <p:sp>
         <p:nvSpPr>
-          <p:cNvPr id="13" name="TextBox 12"/>
-          <p:cNvSpPr txBox="1"/>
-          <p:nvPr/>
-        </p:nvSpPr>
-        <p:spPr>
-          <a:xfrm>
-            <a:off x="990600" y="2247900"/>
-            <a:ext cx="7524750" cy="1143000"/>
+          <p:cNvPr id="22" name="TextBox 21"/>
+          <p:cNvSpPr txBox="1"/>
+          <p:nvPr/>
+        </p:nvSpPr>
+        <p:spPr>
+          <a:xfrm>
+            <a:off x="9525000" y="5638800"/>
+            <a:ext cx="4724400" cy="628650"/>
           </a:xfrm>
           <a:prstGeom prst="rect">
             <a:avLst/>
@@ -13670,29 +13488,29 @@
               </a:lnSpc>
             </a:pPr>
             <a:r>
-              <a:rPr sz="3000" b="1">
-                <a:solidFill>
-                  <a:srgbClr val="F7F3EC"/>
-                </a:solidFill>
-                <a:latin typeface="IBM Plex Sans Arabic"/>
-                <a:ea typeface="IBM Plex Sans Arabic"/>
-                <a:cs typeface="IBM Plex Sans Arabic"/>
-              </a:rPr>
-              <a:t>منصّة وكلاء ذكاء اصطناعي تشتغل لحالها، على مدار الساعة.</a:t>
-            </a:r>
-          </a:p>
-        </p:txBody>
-      </p:sp>
-      <p:sp>
-        <p:nvSpPr>
-          <p:cNvPr id="14" name="TextBox 13"/>
-          <p:cNvSpPr txBox="1"/>
-          <p:nvPr/>
-        </p:nvSpPr>
-        <p:spPr>
-          <a:xfrm>
-            <a:off x="990600" y="3429000"/>
-            <a:ext cx="7524750" cy="857250"/>
+              <a:rPr sz="3450" b="1">
+                <a:solidFill>
+                  <a:srgbClr val="7C766D"/>
+                </a:solidFill>
+                <a:latin typeface="IBM Plex Sans Arabic"/>
+                <a:ea typeface="IBM Plex Sans Arabic"/>
+                <a:cs typeface="IBM Plex Sans Arabic"/>
+              </a:rPr>
+              <a:t>احنا ما نوظّفهم.</a:t>
+            </a:r>
+          </a:p>
+        </p:txBody>
+      </p:sp>
+      <p:sp>
+        <p:nvSpPr>
+          <p:cNvPr id="23" name="TextBox 22"/>
+          <p:cNvSpPr txBox="1"/>
+          <p:nvPr/>
+        </p:nvSpPr>
+        <p:spPr>
+          <a:xfrm>
+            <a:off x="6096000" y="5505450"/>
+            <a:ext cx="3238500" cy="1066800"/>
           </a:xfrm>
           <a:prstGeom prst="rect">
             <a:avLst/>
@@ -13707,467 +13525,39 @@
           <a:p>
             <a:pPr algn="r" rtl="1">
               <a:lnSpc>
-                <a:spcPct val="165000"/>
-              </a:lnSpc>
-            </a:pPr>
-            <a:r>
-              <a:rPr sz="1650" b="0">
-                <a:solidFill>
-                  <a:srgbClr val="7C766D"/>
-                </a:solidFill>
-                <a:latin typeface="IBM Plex Sans Arabic"/>
-                <a:ea typeface="IBM Plex Sans Arabic"/>
-                <a:cs typeface="IBM Plex Sans Arabic"/>
-              </a:rPr>
-              <a:t>تبني للصندوق خريطة حيّة للقدرات المحلية، وتربطها بطلب شركات المحفظة مجمّعاً، وتكمل الطريق للمورّد نفسه.</a:t>
-            </a:r>
-          </a:p>
-        </p:txBody>
-      </p:sp>
-      <p:sp>
-        <p:nvSpPr>
-          <p:cNvPr id="15" name="Rectangle 14"/>
+                <a:spcPct val="110000"/>
+              </a:lnSpc>
+            </a:pPr>
+            <a:r>
+              <a:rPr sz="6300" b="1">
+                <a:solidFill>
+                  <a:srgbClr val="FF5C1A"/>
+                </a:solidFill>
+                <a:latin typeface="IBM Plex Sans Arabic"/>
+                <a:ea typeface="IBM Plex Sans Arabic"/>
+                <a:cs typeface="IBM Plex Sans Arabic"/>
+              </a:rPr>
+              <a:t>نشغّلهم.</a:t>
+            </a:r>
+          </a:p>
+        </p:txBody>
+      </p:sp>
+      <p:sp>
+        <p:nvSpPr>
+          <p:cNvPr id="24" name="Rectangle 23"/>
           <p:cNvSpPr/>
           <p:nvPr/>
         </p:nvSpPr>
         <p:spPr>
           <a:xfrm>
-            <a:off x="10039350" y="4838700"/>
-            <a:ext cx="4210050" cy="19050"/>
+            <a:off x="12192000" y="6724650"/>
+            <a:ext cx="2057400" cy="438150"/>
           </a:xfrm>
           <a:prstGeom prst="rect">
             <a:avLst/>
           </a:prstGeom>
           <a:solidFill>
-            <a:srgbClr val="FF5C1A"/>
-          </a:solidFill>
-          <a:ln>
-            <a:noFill/>
-          </a:ln>
-          <a:effectLst/>
-        </p:spPr>
-        <p:style>
-          <a:lnRef idx="1">
-            <a:schemeClr val="accent1"/>
-          </a:lnRef>
-          <a:fillRef idx="3">
-            <a:schemeClr val="accent1"/>
-          </a:fillRef>
-          <a:effectRef idx="2">
-            <a:schemeClr val="accent1"/>
-          </a:effectRef>
-          <a:fontRef idx="minor">
-            <a:schemeClr val="lt1"/>
-          </a:fontRef>
-        </p:style>
-        <p:txBody>
-          <a:bodyPr rtlCol="0" anchor="ctr"/>
-          <a:lstStyle/>
-          <a:p/>
-        </p:txBody>
-      </p:sp>
-      <p:sp>
-        <p:nvSpPr>
-          <p:cNvPr id="16" name="TextBox 15"/>
-          <p:cNvSpPr txBox="1"/>
-          <p:nvPr/>
-        </p:nvSpPr>
-        <p:spPr>
-          <a:xfrm>
-            <a:off x="10039350" y="5010150"/>
-            <a:ext cx="4210050" cy="419100"/>
-          </a:xfrm>
-          <a:prstGeom prst="rect">
-            <a:avLst/>
-          </a:prstGeom>
-          <a:noFill/>
-        </p:spPr>
-        <p:txBody>
-          <a:bodyPr wrap="square" lIns="0" rIns="0" tIns="0" bIns="0" anchor="t">
-            <a:spAutoFit/>
-          </a:bodyPr>
-          <a:lstStyle/>
-          <a:p>
-            <a:pPr algn="r" rtl="1">
-              <a:lnSpc>
-                <a:spcPct val="135000"/>
-              </a:lnSpc>
-            </a:pPr>
-            <a:r>
-              <a:rPr sz="2250" b="1">
-                <a:solidFill>
-                  <a:srgbClr val="F7F3EC"/>
-                </a:solidFill>
-                <a:latin typeface="IBM Plex Sans Arabic"/>
-                <a:ea typeface="IBM Plex Sans Arabic"/>
-                <a:cs typeface="IBM Plex Sans Arabic"/>
-              </a:rPr>
-              <a:t>مؤتمتة</a:t>
-            </a:r>
-          </a:p>
-        </p:txBody>
-      </p:sp>
-      <p:sp>
-        <p:nvSpPr>
-          <p:cNvPr id="17" name="Rectangle 16"/>
-          <p:cNvSpPr/>
-          <p:nvPr/>
-        </p:nvSpPr>
-        <p:spPr>
-          <a:xfrm>
-            <a:off x="5505450" y="4838700"/>
-            <a:ext cx="4210050" cy="19050"/>
-          </a:xfrm>
-          <a:prstGeom prst="rect">
-            <a:avLst/>
-          </a:prstGeom>
-          <a:solidFill>
-            <a:srgbClr val="FF5C1A"/>
-          </a:solidFill>
-          <a:ln>
-            <a:noFill/>
-          </a:ln>
-          <a:effectLst/>
-        </p:spPr>
-        <p:style>
-          <a:lnRef idx="1">
-            <a:schemeClr val="accent1"/>
-          </a:lnRef>
-          <a:fillRef idx="3">
-            <a:schemeClr val="accent1"/>
-          </a:fillRef>
-          <a:effectRef idx="2">
-            <a:schemeClr val="accent1"/>
-          </a:effectRef>
-          <a:fontRef idx="minor">
-            <a:schemeClr val="lt1"/>
-          </a:fontRef>
-        </p:style>
-        <p:txBody>
-          <a:bodyPr rtlCol="0" anchor="ctr"/>
-          <a:lstStyle/>
-          <a:p/>
-        </p:txBody>
-      </p:sp>
-      <p:sp>
-        <p:nvSpPr>
-          <p:cNvPr id="18" name="TextBox 17"/>
-          <p:cNvSpPr txBox="1"/>
-          <p:nvPr/>
-        </p:nvSpPr>
-        <p:spPr>
-          <a:xfrm>
-            <a:off x="5505450" y="5010150"/>
-            <a:ext cx="4210050" cy="419100"/>
-          </a:xfrm>
-          <a:prstGeom prst="rect">
-            <a:avLst/>
-          </a:prstGeom>
-          <a:noFill/>
-        </p:spPr>
-        <p:txBody>
-          <a:bodyPr wrap="square" lIns="0" rIns="0" tIns="0" bIns="0" anchor="t">
-            <a:spAutoFit/>
-          </a:bodyPr>
-          <a:lstStyle/>
-          <a:p>
-            <a:pPr algn="r" rtl="1">
-              <a:lnSpc>
-                <a:spcPct val="135000"/>
-              </a:lnSpc>
-            </a:pPr>
-            <a:r>
-              <a:rPr sz="2250" b="1">
-                <a:solidFill>
-                  <a:srgbClr val="F7F3EC"/>
-                </a:solidFill>
-                <a:latin typeface="IBM Plex Sans Arabic"/>
-                <a:ea typeface="IBM Plex Sans Arabic"/>
-                <a:cs typeface="IBM Plex Sans Arabic"/>
-              </a:rPr>
-              <a:t>متعددة الوكلاء</a:t>
-            </a:r>
-          </a:p>
-        </p:txBody>
-      </p:sp>
-      <p:pic>
-        <p:nvPicPr>
-          <p:cNvPr id="19" name="Picture 18" descr="fig-coordinator.png"/>
-          <p:cNvPicPr>
-            <a:picLocks noChangeAspect="1"/>
-          </p:cNvPicPr>
-          <p:nvPr/>
-        </p:nvPicPr>
-        <p:blipFill>
-          <a:blip r:embed="rId3"/>
-          <a:stretch>
-            <a:fillRect/>
-          </a:stretch>
-        </p:blipFill>
-        <p:spPr>
-          <a:xfrm>
-            <a:off x="8839200" y="5505450"/>
-            <a:ext cx="800100" cy="889000"/>
-          </a:xfrm>
-          <a:prstGeom prst="rect">
-            <a:avLst/>
-          </a:prstGeom>
-        </p:spPr>
-      </p:pic>
-      <p:pic>
-        <p:nvPicPr>
-          <p:cNvPr id="20" name="Picture 19" descr="fig-detective.png"/>
-          <p:cNvPicPr>
-            <a:picLocks noChangeAspect="1"/>
-          </p:cNvPicPr>
-          <p:nvPr/>
-        </p:nvPicPr>
-        <p:blipFill>
-          <a:blip r:embed="rId4"/>
-          <a:stretch>
-            <a:fillRect/>
-          </a:stretch>
-        </p:blipFill>
-        <p:spPr>
-          <a:xfrm>
-            <a:off x="7924800" y="5505450"/>
-            <a:ext cx="800100" cy="842211"/>
-          </a:xfrm>
-          <a:prstGeom prst="rect">
-            <a:avLst/>
-          </a:prstGeom>
-        </p:spPr>
-      </p:pic>
-      <p:pic>
-        <p:nvPicPr>
-          <p:cNvPr id="21" name="Picture 20" descr="fig-auditor.png"/>
-          <p:cNvPicPr>
-            <a:picLocks noChangeAspect="1"/>
-          </p:cNvPicPr>
-          <p:nvPr/>
-        </p:nvPicPr>
-        <p:blipFill>
-          <a:blip r:embed="rId5"/>
-          <a:stretch>
-            <a:fillRect/>
-          </a:stretch>
-        </p:blipFill>
-        <p:spPr>
-          <a:xfrm>
-            <a:off x="7010400" y="5505450"/>
-            <a:ext cx="800100" cy="1107831"/>
-          </a:xfrm>
-          <a:prstGeom prst="rect">
-            <a:avLst/>
-          </a:prstGeom>
-        </p:spPr>
-      </p:pic>
-      <p:pic>
-        <p:nvPicPr>
-          <p:cNvPr id="22" name="Picture 21" descr="fig-advisor.png"/>
-          <p:cNvPicPr>
-            <a:picLocks noChangeAspect="1"/>
-          </p:cNvPicPr>
-          <p:nvPr/>
-        </p:nvPicPr>
-        <p:blipFill>
-          <a:blip r:embed="rId6"/>
-          <a:stretch>
-            <a:fillRect/>
-          </a:stretch>
-        </p:blipFill>
-        <p:spPr>
-          <a:xfrm>
-            <a:off x="6096000" y="5505450"/>
-            <a:ext cx="800100" cy="880844"/>
-          </a:xfrm>
-          <a:prstGeom prst="rect">
-            <a:avLst/>
-          </a:prstGeom>
-        </p:spPr>
-      </p:pic>
-      <p:sp>
-        <p:nvSpPr>
-          <p:cNvPr id="23" name="Rectangle 22"/>
-          <p:cNvSpPr/>
-          <p:nvPr/>
-        </p:nvSpPr>
-        <p:spPr>
-          <a:xfrm>
-            <a:off x="971550" y="4838700"/>
-            <a:ext cx="4210050" cy="19050"/>
-          </a:xfrm>
-          <a:prstGeom prst="rect">
-            <a:avLst/>
-          </a:prstGeom>
-          <a:solidFill>
-            <a:srgbClr val="FF5C1A"/>
-          </a:solidFill>
-          <a:ln>
-            <a:noFill/>
-          </a:ln>
-          <a:effectLst/>
-        </p:spPr>
-        <p:style>
-          <a:lnRef idx="1">
-            <a:schemeClr val="accent1"/>
-          </a:lnRef>
-          <a:fillRef idx="3">
-            <a:schemeClr val="accent1"/>
-          </a:fillRef>
-          <a:effectRef idx="2">
-            <a:schemeClr val="accent1"/>
-          </a:effectRef>
-          <a:fontRef idx="minor">
-            <a:schemeClr val="lt1"/>
-          </a:fontRef>
-        </p:style>
-        <p:txBody>
-          <a:bodyPr rtlCol="0" anchor="ctr"/>
-          <a:lstStyle/>
-          <a:p/>
-        </p:txBody>
-      </p:sp>
-      <p:sp>
-        <p:nvSpPr>
-          <p:cNvPr id="24" name="TextBox 23"/>
-          <p:cNvSpPr txBox="1"/>
-          <p:nvPr/>
-        </p:nvSpPr>
-        <p:spPr>
-          <a:xfrm>
-            <a:off x="971550" y="5010150"/>
-            <a:ext cx="4210050" cy="419100"/>
-          </a:xfrm>
-          <a:prstGeom prst="rect">
-            <a:avLst/>
-          </a:prstGeom>
-          <a:noFill/>
-        </p:spPr>
-        <p:txBody>
-          <a:bodyPr wrap="square" lIns="0" rIns="0" tIns="0" bIns="0" anchor="t">
-            <a:spAutoFit/>
-          </a:bodyPr>
-          <a:lstStyle/>
-          <a:p>
-            <a:pPr algn="r" rtl="1">
-              <a:lnSpc>
-                <a:spcPct val="135000"/>
-              </a:lnSpc>
-            </a:pPr>
-            <a:r>
-              <a:rPr sz="2250" b="1">
-                <a:solidFill>
-                  <a:srgbClr val="F7F3EC"/>
-                </a:solidFill>
-                <a:latin typeface="IBM Plex Sans Arabic"/>
-                <a:ea typeface="IBM Plex Sans Arabic"/>
-                <a:cs typeface="IBM Plex Sans Arabic"/>
-              </a:rPr>
-              <a:t>ما توقف</a:t>
-            </a:r>
-          </a:p>
-        </p:txBody>
-      </p:sp>
-      <p:sp>
-        <p:nvSpPr>
-          <p:cNvPr id="25" name="Rectangle 24"/>
-          <p:cNvSpPr/>
-          <p:nvPr/>
-        </p:nvSpPr>
-        <p:spPr>
-          <a:xfrm>
-            <a:off x="990600" y="6667500"/>
-            <a:ext cx="13258800" cy="9525"/>
-          </a:xfrm>
-          <a:prstGeom prst="rect">
-            <a:avLst/>
-          </a:prstGeom>
-          <a:solidFill>
-            <a:srgbClr val="241F1B"/>
-          </a:solidFill>
-          <a:ln>
-            <a:noFill/>
-          </a:ln>
-          <a:effectLst/>
-        </p:spPr>
-        <p:style>
-          <a:lnRef idx="1">
-            <a:schemeClr val="accent1"/>
-          </a:lnRef>
-          <a:fillRef idx="3">
-            <a:schemeClr val="accent1"/>
-          </a:fillRef>
-          <a:effectRef idx="2">
-            <a:schemeClr val="accent1"/>
-          </a:effectRef>
-          <a:fontRef idx="minor">
-            <a:schemeClr val="lt1"/>
-          </a:fontRef>
-        </p:style>
-        <p:txBody>
-          <a:bodyPr rtlCol="0" anchor="ctr"/>
-          <a:lstStyle/>
-          <a:p/>
-        </p:txBody>
-      </p:sp>
-      <p:sp>
-        <p:nvSpPr>
-          <p:cNvPr id="26" name="TextBox 25"/>
-          <p:cNvSpPr txBox="1"/>
-          <p:nvPr/>
-        </p:nvSpPr>
-        <p:spPr>
-          <a:xfrm>
-            <a:off x="13296900" y="7010400"/>
-            <a:ext cx="952500" cy="400050"/>
-          </a:xfrm>
-          <a:prstGeom prst="rect">
-            <a:avLst/>
-          </a:prstGeom>
-          <a:noFill/>
-        </p:spPr>
-        <p:txBody>
-          <a:bodyPr wrap="square" lIns="0" rIns="0" tIns="0" bIns="0" anchor="t">
-            <a:spAutoFit/>
-          </a:bodyPr>
-          <a:lstStyle/>
-          <a:p>
-            <a:pPr algn="r" rtl="1">
-              <a:lnSpc>
-                <a:spcPct val="135000"/>
-              </a:lnSpc>
-            </a:pPr>
-            <a:r>
-              <a:rPr sz="1575" b="0">
-                <a:solidFill>
-                  <a:srgbClr val="7C766D"/>
-                </a:solidFill>
-                <a:latin typeface="IBM Plex Sans Arabic"/>
-                <a:ea typeface="IBM Plex Sans Arabic"/>
-                <a:cs typeface="IBM Plex Sans Arabic"/>
-              </a:rPr>
-              <a:t>والمُخرج</a:t>
-            </a:r>
-          </a:p>
-        </p:txBody>
-      </p:sp>
-      <p:sp>
-        <p:nvSpPr>
-          <p:cNvPr id="27" name="Rectangle 26"/>
-          <p:cNvSpPr/>
-          <p:nvPr/>
-        </p:nvSpPr>
-        <p:spPr>
-          <a:xfrm>
-            <a:off x="8972550" y="6858000"/>
-            <a:ext cx="3848100" cy="590550"/>
-          </a:xfrm>
-          <a:prstGeom prst="rect">
-            <a:avLst/>
-          </a:prstGeom>
-          <a:solidFill>
-            <a:srgbClr val="1E100A"/>
+            <a:srgbClr val="2A140B"/>
           </a:solidFill>
           <a:ln w="12700">
             <a:solidFill>
@@ -14198,14 +13588,14 @@
       </p:sp>
       <p:sp>
         <p:nvSpPr>
-          <p:cNvPr id="28" name="TextBox 27"/>
-          <p:cNvSpPr txBox="1"/>
-          <p:nvPr/>
-        </p:nvSpPr>
-        <p:spPr>
-          <a:xfrm>
-            <a:off x="8972550" y="7010400"/>
-            <a:ext cx="3848100" cy="495300"/>
+          <p:cNvPr id="25" name="TextBox 24"/>
+          <p:cNvSpPr txBox="1"/>
+          <p:nvPr/>
+        </p:nvSpPr>
+        <p:spPr>
+          <a:xfrm>
+            <a:off x="12192000" y="6848475"/>
+            <a:ext cx="2057400" cy="361950"/>
           </a:xfrm>
           <a:prstGeom prst="rect">
             <a:avLst/>
@@ -14224,7 +13614,7 @@
               </a:lnSpc>
             </a:pPr>
             <a:r>
-              <a:rPr sz="1950" b="1">
+              <a:rPr sz="1425" b="0">
                 <a:solidFill>
                   <a:srgbClr val="FF5C1A"/>
                 </a:solidFill>
@@ -14232,31 +13622,29 @@
                 <a:ea typeface="IBM Plex Sans Arabic"/>
                 <a:cs typeface="IBM Plex Sans Arabic"/>
               </a:rPr>
-              <a:t>موردون موثّقون</a:t>
-            </a:r>
-          </a:p>
-        </p:txBody>
-      </p:sp>
-      <p:sp>
-        <p:nvSpPr>
-          <p:cNvPr id="29" name="Rectangle 28"/>
+              <a:t>وكلاء ذكاء اصطناعي</a:t>
+            </a:r>
+          </a:p>
+        </p:txBody>
+      </p:sp>
+      <p:sp>
+        <p:nvSpPr>
+          <p:cNvPr id="26" name="Rectangle 25"/>
           <p:cNvSpPr/>
           <p:nvPr/>
         </p:nvSpPr>
         <p:spPr>
           <a:xfrm>
-            <a:off x="4933950" y="6858000"/>
-            <a:ext cx="3848100" cy="590550"/>
-          </a:xfrm>
-          <a:prstGeom prst="rect">
-            <a:avLst/>
-          </a:prstGeom>
-          <a:solidFill>
-            <a:srgbClr val="1E100A"/>
-          </a:solidFill>
+            <a:off x="9696450" y="6724650"/>
+            <a:ext cx="2381250" cy="438150"/>
+          </a:xfrm>
+          <a:prstGeom prst="rect">
+            <a:avLst/>
+          </a:prstGeom>
+          <a:noFill/>
           <a:ln w="12700">
             <a:solidFill>
-              <a:srgbClr val="FF5C1A"/>
+              <a:srgbClr val="241F1B"/>
             </a:solidFill>
           </a:ln>
           <a:effectLst/>
@@ -14283,14 +13671,14 @@
       </p:sp>
       <p:sp>
         <p:nvSpPr>
-          <p:cNvPr id="30" name="TextBox 29"/>
-          <p:cNvSpPr txBox="1"/>
-          <p:nvPr/>
-        </p:nvSpPr>
-        <p:spPr>
-          <a:xfrm>
-            <a:off x="4933950" y="7010400"/>
-            <a:ext cx="3848100" cy="495300"/>
+          <p:cNvPr id="27" name="TextBox 26"/>
+          <p:cNvSpPr txBox="1"/>
+          <p:nvPr/>
+        </p:nvSpPr>
+        <p:spPr>
+          <a:xfrm>
+            <a:off x="9696450" y="6848475"/>
+            <a:ext cx="2381250" cy="361950"/>
           </a:xfrm>
           <a:prstGeom prst="rect">
             <a:avLst/>
@@ -14309,39 +13697,37 @@
               </a:lnSpc>
             </a:pPr>
             <a:r>
-              <a:rPr sz="1950" b="1">
-                <a:solidFill>
-                  <a:srgbClr val="FF5C1A"/>
-                </a:solidFill>
-                <a:latin typeface="IBM Plex Sans Arabic"/>
-                <a:ea typeface="IBM Plex Sans Arabic"/>
-                <a:cs typeface="IBM Plex Sans Arabic"/>
-              </a:rPr>
-              <a:t>سجل الفجوات</a:t>
-            </a:r>
-          </a:p>
-        </p:txBody>
-      </p:sp>
-      <p:sp>
-        <p:nvSpPr>
-          <p:cNvPr id="31" name="Rectangle 30"/>
+              <a:rPr sz="1425" b="0">
+                <a:solidFill>
+                  <a:srgbClr val="7C766D"/>
+                </a:solidFill>
+                <a:latin typeface="IBM Plex Sans Arabic"/>
+                <a:ea typeface="IBM Plex Sans Arabic"/>
+                <a:cs typeface="IBM Plex Sans Arabic"/>
+              </a:rPr>
+              <a:t>دقيقتين للمصنع بدل يوم</a:t>
+            </a:r>
+          </a:p>
+        </p:txBody>
+      </p:sp>
+      <p:sp>
+        <p:nvSpPr>
+          <p:cNvPr id="28" name="Rectangle 27"/>
           <p:cNvSpPr/>
           <p:nvPr/>
         </p:nvSpPr>
         <p:spPr>
           <a:xfrm>
-            <a:off x="895350" y="6858000"/>
-            <a:ext cx="3848100" cy="590550"/>
-          </a:xfrm>
-          <a:prstGeom prst="rect">
-            <a:avLst/>
-          </a:prstGeom>
-          <a:solidFill>
-            <a:srgbClr val="1E100A"/>
-          </a:solidFill>
+            <a:off x="7715250" y="6724650"/>
+            <a:ext cx="1866900" cy="438150"/>
+          </a:xfrm>
+          <a:prstGeom prst="rect">
+            <a:avLst/>
+          </a:prstGeom>
+          <a:noFill/>
           <a:ln w="12700">
             <a:solidFill>
-              <a:srgbClr val="FF5C1A"/>
+              <a:srgbClr val="241F1B"/>
             </a:solidFill>
           </a:ln>
           <a:effectLst/>
@@ -14368,14 +13754,14 @@
       </p:sp>
       <p:sp>
         <p:nvSpPr>
-          <p:cNvPr id="32" name="TextBox 31"/>
-          <p:cNvSpPr txBox="1"/>
-          <p:nvPr/>
-        </p:nvSpPr>
-        <p:spPr>
-          <a:xfrm>
-            <a:off x="895350" y="7010400"/>
-            <a:ext cx="3848100" cy="495300"/>
+          <p:cNvPr id="29" name="TextBox 28"/>
+          <p:cNvSpPr txBox="1"/>
+          <p:nvPr/>
+        </p:nvSpPr>
+        <p:spPr>
+          <a:xfrm>
+            <a:off x="7715250" y="6848475"/>
+            <a:ext cx="1866900" cy="361950"/>
           </a:xfrm>
           <a:prstGeom prst="rect">
             <a:avLst/>
@@ -14394,15 +13780,98 @@
               </a:lnSpc>
             </a:pPr>
             <a:r>
-              <a:rPr sz="1950" b="1">
-                <a:solidFill>
-                  <a:srgbClr val="FF5C1A"/>
-                </a:solidFill>
-                <a:latin typeface="IBM Plex Sans Arabic"/>
-                <a:ea typeface="IBM Plex Sans Arabic"/>
-                <a:cs typeface="IBM Plex Sans Arabic"/>
-              </a:rPr>
-              <a:t>نسبة التغطية</a:t>
+              <a:rPr sz="1425" b="0">
+                <a:solidFill>
+                  <a:srgbClr val="7C766D"/>
+                </a:solidFill>
+                <a:latin typeface="IBM Plex Sans Arabic"/>
+                <a:ea typeface="IBM Plex Sans Arabic"/>
+                <a:cs typeface="IBM Plex Sans Arabic"/>
+              </a:rPr>
+              <a:t>٢٤ ساعة بلا توقف</a:t>
+            </a:r>
+          </a:p>
+        </p:txBody>
+      </p:sp>
+      <p:sp>
+        <p:nvSpPr>
+          <p:cNvPr id="30" name="Rectangle 29"/>
+          <p:cNvSpPr/>
+          <p:nvPr/>
+        </p:nvSpPr>
+        <p:spPr>
+          <a:xfrm>
+            <a:off x="5562600" y="6724650"/>
+            <a:ext cx="2038350" cy="438150"/>
+          </a:xfrm>
+          <a:prstGeom prst="rect">
+            <a:avLst/>
+          </a:prstGeom>
+          <a:noFill/>
+          <a:ln w="12700">
+            <a:solidFill>
+              <a:srgbClr val="241F1B"/>
+            </a:solidFill>
+          </a:ln>
+          <a:effectLst/>
+        </p:spPr>
+        <p:style>
+          <a:lnRef idx="1">
+            <a:schemeClr val="accent1"/>
+          </a:lnRef>
+          <a:fillRef idx="3">
+            <a:schemeClr val="accent1"/>
+          </a:fillRef>
+          <a:effectRef idx="2">
+            <a:schemeClr val="accent1"/>
+          </a:effectRef>
+          <a:fontRef idx="minor">
+            <a:schemeClr val="lt1"/>
+          </a:fontRef>
+        </p:style>
+        <p:txBody>
+          <a:bodyPr rtlCol="0" anchor="ctr"/>
+          <a:lstStyle/>
+          <a:p/>
+        </p:txBody>
+      </p:sp>
+      <p:sp>
+        <p:nvSpPr>
+          <p:cNvPr id="31" name="TextBox 30"/>
+          <p:cNvSpPr txBox="1"/>
+          <p:nvPr/>
+        </p:nvSpPr>
+        <p:spPr>
+          <a:xfrm>
+            <a:off x="5562600" y="6848475"/>
+            <a:ext cx="2038350" cy="361950"/>
+          </a:xfrm>
+          <a:prstGeom prst="rect">
+            <a:avLst/>
+          </a:prstGeom>
+          <a:noFill/>
+        </p:spPr>
+        <p:txBody>
+          <a:bodyPr wrap="square" lIns="0" rIns="0" tIns="0" bIns="0" anchor="t">
+            <a:spAutoFit/>
+          </a:bodyPr>
+          <a:lstStyle/>
+          <a:p>
+            <a:pPr algn="ctr" rtl="1">
+              <a:lnSpc>
+                <a:spcPct val="135000"/>
+              </a:lnSpc>
+            </a:pPr>
+            <a:r>
+              <a:rPr sz="1425" b="0">
+                <a:solidFill>
+                  <a:srgbClr val="7C766D"/>
+                </a:solidFill>
+                <a:latin typeface="IBM Plex Sans Arabic"/>
+                <a:ea typeface="IBM Plex Sans Arabic"/>
+                <a:cs typeface="IBM Plex Sans Arabic"/>
+              </a:rPr>
+              <a:t>ما ينسون ولا معلومة</a:t>
             </a:r>
           </a:p>
         </p:txBody>
@@ -14544,7 +14013,7 @@
                 <a:ea typeface="IBM Plex Sans Arabic"/>
                 <a:cs typeface="IBM Plex Sans Arabic"/>
               </a:rPr>
-              <a:t>طيب كيف نحلها؟</a:t>
+              <a:t>وش هو كامن؟</a:t>
             </a:r>
           </a:p>
         </p:txBody>
@@ -14627,7 +14096,7 @@
                 <a:ea typeface="IBM Plex Mono"/>
                 <a:cs typeface="IBM Plex Mono"/>
               </a:rPr>
-              <a:t>07 / 18</a:t>
+              <a:t>07 / 16</a:t>
             </a:r>
           </a:p>
         </p:txBody>
@@ -14673,16 +14142,40 @@
           </a:p>
         </p:txBody>
       </p:sp>
-      <p:sp>
-        <p:nvSpPr>
-          <p:cNvPr id="8" name="TextBox 7"/>
-          <p:cNvSpPr txBox="1"/>
-          <p:nvPr/>
-        </p:nvSpPr>
-        <p:spPr>
-          <a:xfrm>
-            <a:off x="990600" y="1600200"/>
-            <a:ext cx="13258800" cy="800100"/>
+      <p:pic>
+        <p:nvPicPr>
+          <p:cNvPr id="8" name="Picture 7" descr="KAMIN.png"/>
+          <p:cNvPicPr>
+            <a:picLocks noChangeAspect="1"/>
+          </p:cNvPicPr>
+          <p:nvPr/>
+        </p:nvPicPr>
+        <p:blipFill>
+          <a:blip r:embed="rId2"/>
+          <a:stretch>
+            <a:fillRect/>
+          </a:stretch>
+        </p:blipFill>
+        <p:spPr>
+          <a:xfrm>
+            <a:off x="12992100" y="2209800"/>
+            <a:ext cx="1257300" cy="1257300"/>
+          </a:xfrm>
+          <a:prstGeom prst="rect">
+            <a:avLst/>
+          </a:prstGeom>
+        </p:spPr>
+      </p:pic>
+      <p:sp>
+        <p:nvSpPr>
+          <p:cNvPr id="9" name="TextBox 8"/>
+          <p:cNvSpPr txBox="1"/>
+          <p:nvPr/>
+        </p:nvSpPr>
+        <p:spPr>
+          <a:xfrm>
+            <a:off x="8991600" y="2286000"/>
+            <a:ext cx="3810000" cy="1047750"/>
           </a:xfrm>
           <a:prstGeom prst="rect">
             <a:avLst/>
@@ -14697,11 +14190,11 @@
           <a:p>
             <a:pPr algn="r" rtl="1">
               <a:lnSpc>
-                <a:spcPct val="135000"/>
-              </a:lnSpc>
-            </a:pPr>
-            <a:r>
-              <a:rPr sz="4350" b="1">
+                <a:spcPct val="105000"/>
+              </a:lnSpc>
+            </a:pPr>
+            <a:r>
+              <a:rPr sz="6600" b="1">
                 <a:solidFill>
                   <a:srgbClr val="F7F3EC"/>
                 </a:solidFill>
@@ -14709,21 +14202,227 @@
                 <a:ea typeface="IBM Plex Sans Arabic"/>
                 <a:cs typeface="IBM Plex Sans Arabic"/>
               </a:rPr>
-              <a:t>ببساطة. نوظّف فريق.</a:t>
-            </a:r>
-          </a:p>
-        </p:txBody>
-      </p:sp>
-      <p:sp>
-        <p:nvSpPr>
-          <p:cNvPr id="9" name="Rectangle 8"/>
+              <a:t>كامن</a:t>
+            </a:r>
+          </a:p>
+        </p:txBody>
+      </p:sp>
+      <p:sp>
+        <p:nvSpPr>
+          <p:cNvPr id="10" name="TextBox 9"/>
+          <p:cNvSpPr txBox="1"/>
+          <p:nvPr/>
+        </p:nvSpPr>
+        <p:spPr>
+          <a:xfrm>
+            <a:off x="8991600" y="3333750"/>
+            <a:ext cx="3810000" cy="419100"/>
+          </a:xfrm>
+          <a:prstGeom prst="rect">
+            <a:avLst/>
+          </a:prstGeom>
+          <a:noFill/>
+        </p:spPr>
+        <p:txBody>
+          <a:bodyPr wrap="square" lIns="0" rIns="0" tIns="0" bIns="0" anchor="t">
+            <a:spAutoFit/>
+          </a:bodyPr>
+          <a:lstStyle/>
+          <a:p>
+            <a:pPr algn="r" rtl="1">
+              <a:lnSpc>
+                <a:spcPct val="135000"/>
+              </a:lnSpc>
+            </a:pPr>
+            <a:r>
+              <a:rPr sz="1650" b="0">
+                <a:solidFill>
+                  <a:srgbClr val="7C766D"/>
+                </a:solidFill>
+                <a:latin typeface="IBM Plex Sans Arabic"/>
+                <a:ea typeface="IBM Plex Sans Arabic"/>
+                <a:cs typeface="IBM Plex Sans Arabic"/>
+              </a:rPr>
+              <a:t>الموجود الغير مكتشف</a:t>
+            </a:r>
+          </a:p>
+        </p:txBody>
+      </p:sp>
+      <p:sp>
+        <p:nvSpPr>
+          <p:cNvPr id="11" name="TextBox 10"/>
+          <p:cNvSpPr txBox="1"/>
+          <p:nvPr/>
+        </p:nvSpPr>
+        <p:spPr>
+          <a:xfrm>
+            <a:off x="8991600" y="3657600"/>
+            <a:ext cx="3810000" cy="323850"/>
+          </a:xfrm>
+          <a:prstGeom prst="rect">
+            <a:avLst/>
+          </a:prstGeom>
+          <a:noFill/>
+        </p:spPr>
+        <p:txBody>
+          <a:bodyPr wrap="square" lIns="0" rIns="0" tIns="0" bIns="0" anchor="t">
+            <a:spAutoFit/>
+          </a:bodyPr>
+          <a:lstStyle/>
+          <a:p>
+            <a:pPr algn="r">
+              <a:lnSpc>
+                <a:spcPct val="135000"/>
+              </a:lnSpc>
+            </a:pPr>
+            <a:r>
+              <a:rPr sz="1275" b="0">
+                <a:solidFill>
+                  <a:srgbClr val="FF5C1A"/>
+                </a:solidFill>
+                <a:latin typeface="IBM Plex Mono"/>
+                <a:ea typeface="IBM Plex Mono"/>
+                <a:cs typeface="IBM Plex Mono"/>
+              </a:rPr>
+              <a:t>K A M I N</a:t>
+            </a:r>
+          </a:p>
+        </p:txBody>
+      </p:sp>
+      <p:sp>
+        <p:nvSpPr>
+          <p:cNvPr id="12" name="Rectangle 11"/>
           <p:cNvSpPr/>
           <p:nvPr/>
         </p:nvSpPr>
         <p:spPr>
           <a:xfrm>
-            <a:off x="11077575" y="2552700"/>
-            <a:ext cx="3171825" cy="28575"/>
+            <a:off x="8724900" y="2209800"/>
+            <a:ext cx="9525" cy="1619250"/>
+          </a:xfrm>
+          <a:prstGeom prst="rect">
+            <a:avLst/>
+          </a:prstGeom>
+          <a:solidFill>
+            <a:srgbClr val="241F1B"/>
+          </a:solidFill>
+          <a:ln>
+            <a:noFill/>
+          </a:ln>
+          <a:effectLst/>
+        </p:spPr>
+        <p:style>
+          <a:lnRef idx="1">
+            <a:schemeClr val="accent1"/>
+          </a:lnRef>
+          <a:fillRef idx="3">
+            <a:schemeClr val="accent1"/>
+          </a:fillRef>
+          <a:effectRef idx="2">
+            <a:schemeClr val="accent1"/>
+          </a:effectRef>
+          <a:fontRef idx="minor">
+            <a:schemeClr val="lt1"/>
+          </a:fontRef>
+        </p:style>
+        <p:txBody>
+          <a:bodyPr rtlCol="0" anchor="ctr"/>
+          <a:lstStyle/>
+          <a:p/>
+        </p:txBody>
+      </p:sp>
+      <p:sp>
+        <p:nvSpPr>
+          <p:cNvPr id="13" name="TextBox 12"/>
+          <p:cNvSpPr txBox="1"/>
+          <p:nvPr/>
+        </p:nvSpPr>
+        <p:spPr>
+          <a:xfrm>
+            <a:off x="990600" y="2247900"/>
+            <a:ext cx="7524750" cy="1143000"/>
+          </a:xfrm>
+          <a:prstGeom prst="rect">
+            <a:avLst/>
+          </a:prstGeom>
+          <a:noFill/>
+        </p:spPr>
+        <p:txBody>
+          <a:bodyPr wrap="square" lIns="0" rIns="0" tIns="0" bIns="0" anchor="t">
+            <a:spAutoFit/>
+          </a:bodyPr>
+          <a:lstStyle/>
+          <a:p>
+            <a:pPr algn="r" rtl="1">
+              <a:lnSpc>
+                <a:spcPct val="135000"/>
+              </a:lnSpc>
+            </a:pPr>
+            <a:r>
+              <a:rPr sz="3000" b="1">
+                <a:solidFill>
+                  <a:srgbClr val="F7F3EC"/>
+                </a:solidFill>
+                <a:latin typeface="IBM Plex Sans Arabic"/>
+                <a:ea typeface="IBM Plex Sans Arabic"/>
+                <a:cs typeface="IBM Plex Sans Arabic"/>
+              </a:rPr>
+              <a:t>منصّة وكلاء ذكاء اصطناعي تشتغل لحالها، على مدار الساعة.</a:t>
+            </a:r>
+          </a:p>
+        </p:txBody>
+      </p:sp>
+      <p:sp>
+        <p:nvSpPr>
+          <p:cNvPr id="14" name="TextBox 13"/>
+          <p:cNvSpPr txBox="1"/>
+          <p:nvPr/>
+        </p:nvSpPr>
+        <p:spPr>
+          <a:xfrm>
+            <a:off x="990600" y="3429000"/>
+            <a:ext cx="7524750" cy="857250"/>
+          </a:xfrm>
+          <a:prstGeom prst="rect">
+            <a:avLst/>
+          </a:prstGeom>
+          <a:noFill/>
+        </p:spPr>
+        <p:txBody>
+          <a:bodyPr wrap="square" lIns="0" rIns="0" tIns="0" bIns="0" anchor="t">
+            <a:spAutoFit/>
+          </a:bodyPr>
+          <a:lstStyle/>
+          <a:p>
+            <a:pPr algn="r" rtl="1">
+              <a:lnSpc>
+                <a:spcPct val="165000"/>
+              </a:lnSpc>
+            </a:pPr>
+            <a:r>
+              <a:rPr sz="1650" b="0">
+                <a:solidFill>
+                  <a:srgbClr val="7C766D"/>
+                </a:solidFill>
+                <a:latin typeface="IBM Plex Sans Arabic"/>
+                <a:ea typeface="IBM Plex Sans Arabic"/>
+                <a:cs typeface="IBM Plex Sans Arabic"/>
+              </a:rPr>
+              <a:t>تبني للصندوق خريطة حيّة للقدرات المحلية، وتربطها بطلب شركات المحفظة مجمّعاً، وتكمل الطريق للمورّد نفسه.</a:t>
+            </a:r>
+          </a:p>
+        </p:txBody>
+      </p:sp>
+      <p:sp>
+        <p:nvSpPr>
+          <p:cNvPr id="15" name="Rectangle 14"/>
+          <p:cNvSpPr/>
+          <p:nvPr/>
+        </p:nvSpPr>
+        <p:spPr>
+          <a:xfrm>
+            <a:off x="10039350" y="4838700"/>
+            <a:ext cx="4210050" cy="19050"/>
           </a:xfrm>
           <a:prstGeom prst="rect">
             <a:avLst/>
@@ -14756,59 +14455,35 @@
           <a:p/>
         </p:txBody>
       </p:sp>
-      <p:pic>
-        <p:nvPicPr>
-          <p:cNvPr id="10" name="Picture 9" descr="fig-coordinator.png"/>
-          <p:cNvPicPr>
-            <a:picLocks noChangeAspect="1"/>
-          </p:cNvPicPr>
-          <p:nvPr/>
-        </p:nvPicPr>
-        <p:blipFill>
-          <a:blip r:embed="rId2"/>
-          <a:stretch>
-            <a:fillRect/>
-          </a:stretch>
-        </p:blipFill>
-        <p:spPr>
-          <a:xfrm>
-            <a:off x="11991975" y="2724150"/>
-            <a:ext cx="1343025" cy="1492250"/>
-          </a:xfrm>
-          <a:prstGeom prst="rect">
-            <a:avLst/>
-          </a:prstGeom>
-        </p:spPr>
-      </p:pic>
-      <p:sp>
-        <p:nvSpPr>
-          <p:cNvPr id="11" name="TextBox 10"/>
-          <p:cNvSpPr txBox="1"/>
-          <p:nvPr/>
-        </p:nvSpPr>
-        <p:spPr>
-          <a:xfrm>
-            <a:off x="11077575" y="4610100"/>
-            <a:ext cx="3171825" cy="438150"/>
-          </a:xfrm>
-          <a:prstGeom prst="rect">
-            <a:avLst/>
-          </a:prstGeom>
-          <a:noFill/>
-        </p:spPr>
-        <p:txBody>
-          <a:bodyPr wrap="square" lIns="0" rIns="0" tIns="0" bIns="0" anchor="t">
-            <a:spAutoFit/>
-          </a:bodyPr>
-          <a:lstStyle/>
-          <a:p>
-            <a:pPr algn="ctr" rtl="1">
-              <a:lnSpc>
-                <a:spcPct val="135000"/>
-              </a:lnSpc>
-            </a:pPr>
-            <a:r>
-              <a:rPr sz="2400" b="1">
+      <p:sp>
+        <p:nvSpPr>
+          <p:cNvPr id="16" name="TextBox 15"/>
+          <p:cNvSpPr txBox="1"/>
+          <p:nvPr/>
+        </p:nvSpPr>
+        <p:spPr>
+          <a:xfrm>
+            <a:off x="10039350" y="5010150"/>
+            <a:ext cx="4210050" cy="419100"/>
+          </a:xfrm>
+          <a:prstGeom prst="rect">
+            <a:avLst/>
+          </a:prstGeom>
+          <a:noFill/>
+        </p:spPr>
+        <p:txBody>
+          <a:bodyPr wrap="square" lIns="0" rIns="0" tIns="0" bIns="0" anchor="t">
+            <a:spAutoFit/>
+          </a:bodyPr>
+          <a:lstStyle/>
+          <a:p>
+            <a:pPr algn="r" rtl="1">
+              <a:lnSpc>
+                <a:spcPct val="135000"/>
+              </a:lnSpc>
+            </a:pPr>
+            <a:r>
+              <a:rPr sz="2250" b="1">
                 <a:solidFill>
                   <a:srgbClr val="F7F3EC"/>
                 </a:solidFill>
@@ -14816,21 +14491,21 @@
                 <a:ea typeface="IBM Plex Sans Arabic"/>
                 <a:cs typeface="IBM Plex Sans Arabic"/>
               </a:rPr>
-              <a:t>المنسّق</a:t>
-            </a:r>
-          </a:p>
-        </p:txBody>
-      </p:sp>
-      <p:sp>
-        <p:nvSpPr>
-          <p:cNvPr id="12" name="Rectangle 11"/>
+              <a:t>مؤتمتة</a:t>
+            </a:r>
+          </a:p>
+        </p:txBody>
+      </p:sp>
+      <p:sp>
+        <p:nvSpPr>
+          <p:cNvPr id="17" name="Rectangle 16"/>
           <p:cNvSpPr/>
           <p:nvPr/>
         </p:nvSpPr>
         <p:spPr>
           <a:xfrm>
-            <a:off x="7715250" y="2552700"/>
-            <a:ext cx="3171825" cy="28575"/>
+            <a:off x="5505450" y="4838700"/>
+            <a:ext cx="4210050" cy="19050"/>
           </a:xfrm>
           <a:prstGeom prst="rect">
             <a:avLst/>
@@ -14863,9 +14538,50 @@
           <a:p/>
         </p:txBody>
       </p:sp>
+      <p:sp>
+        <p:nvSpPr>
+          <p:cNvPr id="18" name="TextBox 17"/>
+          <p:cNvSpPr txBox="1"/>
+          <p:nvPr/>
+        </p:nvSpPr>
+        <p:spPr>
+          <a:xfrm>
+            <a:off x="5505450" y="5010150"/>
+            <a:ext cx="4210050" cy="419100"/>
+          </a:xfrm>
+          <a:prstGeom prst="rect">
+            <a:avLst/>
+          </a:prstGeom>
+          <a:noFill/>
+        </p:spPr>
+        <p:txBody>
+          <a:bodyPr wrap="square" lIns="0" rIns="0" tIns="0" bIns="0" anchor="t">
+            <a:spAutoFit/>
+          </a:bodyPr>
+          <a:lstStyle/>
+          <a:p>
+            <a:pPr algn="r" rtl="1">
+              <a:lnSpc>
+                <a:spcPct val="135000"/>
+              </a:lnSpc>
+            </a:pPr>
+            <a:r>
+              <a:rPr sz="2250" b="1">
+                <a:solidFill>
+                  <a:srgbClr val="F7F3EC"/>
+                </a:solidFill>
+                <a:latin typeface="IBM Plex Sans Arabic"/>
+                <a:ea typeface="IBM Plex Sans Arabic"/>
+                <a:cs typeface="IBM Plex Sans Arabic"/>
+              </a:rPr>
+              <a:t>متعددة الوكلاء</a:t>
+            </a:r>
+          </a:p>
+        </p:txBody>
+      </p:sp>
       <p:pic>
         <p:nvPicPr>
-          <p:cNvPr id="13" name="Picture 12" descr="fig-detective.png"/>
+          <p:cNvPr id="19" name="Picture 18" descr="fig-coordinator.png"/>
           <p:cNvPicPr>
             <a:picLocks noChangeAspect="1"/>
           </p:cNvPicPr>
@@ -14879,65 +14595,96 @@
         </p:blipFill>
         <p:spPr>
           <a:xfrm>
-            <a:off x="8629650" y="2724150"/>
-            <a:ext cx="1343025" cy="1413711"/>
+            <a:off x="8839200" y="5505450"/>
+            <a:ext cx="800100" cy="889000"/>
           </a:xfrm>
           <a:prstGeom prst="rect">
             <a:avLst/>
           </a:prstGeom>
         </p:spPr>
       </p:pic>
-      <p:sp>
-        <p:nvSpPr>
-          <p:cNvPr id="14" name="TextBox 13"/>
-          <p:cNvSpPr txBox="1"/>
-          <p:nvPr/>
-        </p:nvSpPr>
-        <p:spPr>
-          <a:xfrm>
-            <a:off x="7715250" y="4610100"/>
-            <a:ext cx="3171825" cy="438150"/>
-          </a:xfrm>
-          <a:prstGeom prst="rect">
-            <a:avLst/>
-          </a:prstGeom>
-          <a:noFill/>
-        </p:spPr>
-        <p:txBody>
-          <a:bodyPr wrap="square" lIns="0" rIns="0" tIns="0" bIns="0" anchor="t">
-            <a:spAutoFit/>
-          </a:bodyPr>
-          <a:lstStyle/>
-          <a:p>
-            <a:pPr algn="ctr" rtl="1">
-              <a:lnSpc>
-                <a:spcPct val="135000"/>
-              </a:lnSpc>
-            </a:pPr>
-            <a:r>
-              <a:rPr sz="2400" b="1">
-                <a:solidFill>
-                  <a:srgbClr val="F7F3EC"/>
-                </a:solidFill>
-                <a:latin typeface="IBM Plex Sans Arabic"/>
-                <a:ea typeface="IBM Plex Sans Arabic"/>
-                <a:cs typeface="IBM Plex Sans Arabic"/>
-              </a:rPr>
-              <a:t>المحقّق</a:t>
-            </a:r>
-          </a:p>
-        </p:txBody>
-      </p:sp>
-      <p:sp>
-        <p:nvSpPr>
-          <p:cNvPr id="15" name="Rectangle 14"/>
+      <p:pic>
+        <p:nvPicPr>
+          <p:cNvPr id="20" name="Picture 19" descr="fig-detective.png"/>
+          <p:cNvPicPr>
+            <a:picLocks noChangeAspect="1"/>
+          </p:cNvPicPr>
+          <p:nvPr/>
+        </p:nvPicPr>
+        <p:blipFill>
+          <a:blip r:embed="rId4"/>
+          <a:stretch>
+            <a:fillRect/>
+          </a:stretch>
+        </p:blipFill>
+        <p:spPr>
+          <a:xfrm>
+            <a:off x="7924800" y="5505450"/>
+            <a:ext cx="800100" cy="842211"/>
+          </a:xfrm>
+          <a:prstGeom prst="rect">
+            <a:avLst/>
+          </a:prstGeom>
+        </p:spPr>
+      </p:pic>
+      <p:pic>
+        <p:nvPicPr>
+          <p:cNvPr id="21" name="Picture 20" descr="fig-auditor.png"/>
+          <p:cNvPicPr>
+            <a:picLocks noChangeAspect="1"/>
+          </p:cNvPicPr>
+          <p:nvPr/>
+        </p:nvPicPr>
+        <p:blipFill>
+          <a:blip r:embed="rId5"/>
+          <a:stretch>
+            <a:fillRect/>
+          </a:stretch>
+        </p:blipFill>
+        <p:spPr>
+          <a:xfrm>
+            <a:off x="7010400" y="5505450"/>
+            <a:ext cx="800100" cy="1107831"/>
+          </a:xfrm>
+          <a:prstGeom prst="rect">
+            <a:avLst/>
+          </a:prstGeom>
+        </p:spPr>
+      </p:pic>
+      <p:pic>
+        <p:nvPicPr>
+          <p:cNvPr id="22" name="Picture 21" descr="fig-advisor.png"/>
+          <p:cNvPicPr>
+            <a:picLocks noChangeAspect="1"/>
+          </p:cNvPicPr>
+          <p:nvPr/>
+        </p:nvPicPr>
+        <p:blipFill>
+          <a:blip r:embed="rId6"/>
+          <a:stretch>
+            <a:fillRect/>
+          </a:stretch>
+        </p:blipFill>
+        <p:spPr>
+          <a:xfrm>
+            <a:off x="6096000" y="5505450"/>
+            <a:ext cx="800100" cy="880844"/>
+          </a:xfrm>
+          <a:prstGeom prst="rect">
+            <a:avLst/>
+          </a:prstGeom>
+        </p:spPr>
+      </p:pic>
+      <p:sp>
+        <p:nvSpPr>
+          <p:cNvPr id="23" name="Rectangle 22"/>
           <p:cNvSpPr/>
           <p:nvPr/>
         </p:nvSpPr>
         <p:spPr>
           <a:xfrm>
-            <a:off x="4352925" y="2552700"/>
-            <a:ext cx="3171825" cy="28575"/>
+            <a:off x="971550" y="4838700"/>
+            <a:ext cx="4210050" cy="19050"/>
           </a:xfrm>
           <a:prstGeom prst="rect">
             <a:avLst/>
@@ -14970,59 +14717,35 @@
           <a:p/>
         </p:txBody>
       </p:sp>
-      <p:pic>
-        <p:nvPicPr>
-          <p:cNvPr id="16" name="Picture 15" descr="fig-auditor.png"/>
-          <p:cNvPicPr>
-            <a:picLocks noChangeAspect="1"/>
-          </p:cNvPicPr>
-          <p:nvPr/>
-        </p:nvPicPr>
-        <p:blipFill>
-          <a:blip r:embed="rId4"/>
-          <a:stretch>
-            <a:fillRect/>
-          </a:stretch>
-        </p:blipFill>
-        <p:spPr>
-          <a:xfrm>
-            <a:off x="5267325" y="2724150"/>
-            <a:ext cx="1343025" cy="1859573"/>
-          </a:xfrm>
-          <a:prstGeom prst="rect">
-            <a:avLst/>
-          </a:prstGeom>
-        </p:spPr>
-      </p:pic>
-      <p:sp>
-        <p:nvSpPr>
-          <p:cNvPr id="17" name="TextBox 16"/>
-          <p:cNvSpPr txBox="1"/>
-          <p:nvPr/>
-        </p:nvSpPr>
-        <p:spPr>
-          <a:xfrm>
-            <a:off x="4352925" y="4610100"/>
-            <a:ext cx="3171825" cy="438150"/>
-          </a:xfrm>
-          <a:prstGeom prst="rect">
-            <a:avLst/>
-          </a:prstGeom>
-          <a:noFill/>
-        </p:spPr>
-        <p:txBody>
-          <a:bodyPr wrap="square" lIns="0" rIns="0" tIns="0" bIns="0" anchor="t">
-            <a:spAutoFit/>
-          </a:bodyPr>
-          <a:lstStyle/>
-          <a:p>
-            <a:pPr algn="ctr" rtl="1">
-              <a:lnSpc>
-                <a:spcPct val="135000"/>
-              </a:lnSpc>
-            </a:pPr>
-            <a:r>
-              <a:rPr sz="2400" b="1">
+      <p:sp>
+        <p:nvSpPr>
+          <p:cNvPr id="24" name="TextBox 23"/>
+          <p:cNvSpPr txBox="1"/>
+          <p:nvPr/>
+        </p:nvSpPr>
+        <p:spPr>
+          <a:xfrm>
+            <a:off x="971550" y="5010150"/>
+            <a:ext cx="4210050" cy="419100"/>
+          </a:xfrm>
+          <a:prstGeom prst="rect">
+            <a:avLst/>
+          </a:prstGeom>
+          <a:noFill/>
+        </p:spPr>
+        <p:txBody>
+          <a:bodyPr wrap="square" lIns="0" rIns="0" tIns="0" bIns="0" anchor="t">
+            <a:spAutoFit/>
+          </a:bodyPr>
+          <a:lstStyle/>
+          <a:p>
+            <a:pPr algn="r" rtl="1">
+              <a:lnSpc>
+                <a:spcPct val="135000"/>
+              </a:lnSpc>
+            </a:pPr>
+            <a:r>
+              <a:rPr sz="2250" b="1">
                 <a:solidFill>
                   <a:srgbClr val="F7F3EC"/>
                 </a:solidFill>
@@ -15030,127 +14753,20 @@
                 <a:ea typeface="IBM Plex Sans Arabic"/>
                 <a:cs typeface="IBM Plex Sans Arabic"/>
               </a:rPr>
-              <a:t>المدقّق</a:t>
-            </a:r>
-          </a:p>
-        </p:txBody>
-      </p:sp>
-      <p:sp>
-        <p:nvSpPr>
-          <p:cNvPr id="18" name="Rectangle 17"/>
+              <a:t>ما توقف</a:t>
+            </a:r>
+          </a:p>
+        </p:txBody>
+      </p:sp>
+      <p:sp>
+        <p:nvSpPr>
+          <p:cNvPr id="25" name="Rectangle 24"/>
           <p:cNvSpPr/>
           <p:nvPr/>
         </p:nvSpPr>
         <p:spPr>
           <a:xfrm>
-            <a:off x="990600" y="2552700"/>
-            <a:ext cx="3171825" cy="28575"/>
-          </a:xfrm>
-          <a:prstGeom prst="rect">
-            <a:avLst/>
-          </a:prstGeom>
-          <a:solidFill>
-            <a:srgbClr val="FF5C1A"/>
-          </a:solidFill>
-          <a:ln>
-            <a:noFill/>
-          </a:ln>
-          <a:effectLst/>
-        </p:spPr>
-        <p:style>
-          <a:lnRef idx="1">
-            <a:schemeClr val="accent1"/>
-          </a:lnRef>
-          <a:fillRef idx="3">
-            <a:schemeClr val="accent1"/>
-          </a:fillRef>
-          <a:effectRef idx="2">
-            <a:schemeClr val="accent1"/>
-          </a:effectRef>
-          <a:fontRef idx="minor">
-            <a:schemeClr val="lt1"/>
-          </a:fontRef>
-        </p:style>
-        <p:txBody>
-          <a:bodyPr rtlCol="0" anchor="ctr"/>
-          <a:lstStyle/>
-          <a:p/>
-        </p:txBody>
-      </p:sp>
-      <p:pic>
-        <p:nvPicPr>
-          <p:cNvPr id="19" name="Picture 18" descr="fig-advisor.png"/>
-          <p:cNvPicPr>
-            <a:picLocks noChangeAspect="1"/>
-          </p:cNvPicPr>
-          <p:nvPr/>
-        </p:nvPicPr>
-        <p:blipFill>
-          <a:blip r:embed="rId5"/>
-          <a:stretch>
-            <a:fillRect/>
-          </a:stretch>
-        </p:blipFill>
-        <p:spPr>
-          <a:xfrm>
-            <a:off x="1905000" y="2724150"/>
-            <a:ext cx="1343025" cy="1478560"/>
-          </a:xfrm>
-          <a:prstGeom prst="rect">
-            <a:avLst/>
-          </a:prstGeom>
-        </p:spPr>
-      </p:pic>
-      <p:sp>
-        <p:nvSpPr>
-          <p:cNvPr id="20" name="TextBox 19"/>
-          <p:cNvSpPr txBox="1"/>
-          <p:nvPr/>
-        </p:nvSpPr>
-        <p:spPr>
-          <a:xfrm>
-            <a:off x="990600" y="4610100"/>
-            <a:ext cx="3171825" cy="438150"/>
-          </a:xfrm>
-          <a:prstGeom prst="rect">
-            <a:avLst/>
-          </a:prstGeom>
-          <a:noFill/>
-        </p:spPr>
-        <p:txBody>
-          <a:bodyPr wrap="square" lIns="0" rIns="0" tIns="0" bIns="0" anchor="t">
-            <a:spAutoFit/>
-          </a:bodyPr>
-          <a:lstStyle/>
-          <a:p>
-            <a:pPr algn="ctr" rtl="1">
-              <a:lnSpc>
-                <a:spcPct val="135000"/>
-              </a:lnSpc>
-            </a:pPr>
-            <a:r>
-              <a:rPr sz="2400" b="1">
-                <a:solidFill>
-                  <a:srgbClr val="F7F3EC"/>
-                </a:solidFill>
-                <a:latin typeface="IBM Plex Sans Arabic"/>
-                <a:ea typeface="IBM Plex Sans Arabic"/>
-                <a:cs typeface="IBM Plex Sans Arabic"/>
-              </a:rPr>
-              <a:t>المستشار</a:t>
-            </a:r>
-          </a:p>
-        </p:txBody>
-      </p:sp>
-      <p:sp>
-        <p:nvSpPr>
-          <p:cNvPr id="21" name="Rectangle 20"/>
-          <p:cNvSpPr/>
-          <p:nvPr/>
-        </p:nvSpPr>
-        <p:spPr>
-          <a:xfrm>
-            <a:off x="990600" y="5391150"/>
+            <a:off x="990600" y="6667500"/>
             <a:ext cx="13258800" cy="9525"/>
           </a:xfrm>
           <a:prstGeom prst="rect">
@@ -15186,14 +14802,14 @@
       </p:sp>
       <p:sp>
         <p:nvSpPr>
-          <p:cNvPr id="22" name="TextBox 21"/>
-          <p:cNvSpPr txBox="1"/>
-          <p:nvPr/>
-        </p:nvSpPr>
-        <p:spPr>
-          <a:xfrm>
-            <a:off x="9525000" y="5638800"/>
-            <a:ext cx="4724400" cy="628650"/>
+          <p:cNvPr id="26" name="TextBox 25"/>
+          <p:cNvSpPr txBox="1"/>
+          <p:nvPr/>
+        </p:nvSpPr>
+        <p:spPr>
+          <a:xfrm>
+            <a:off x="13296900" y="7010400"/>
+            <a:ext cx="952500" cy="400050"/>
           </a:xfrm>
           <a:prstGeom prst="rect">
             <a:avLst/>
@@ -15212,7 +14828,7 @@
               </a:lnSpc>
             </a:pPr>
             <a:r>
-              <a:rPr sz="3450" b="1">
+              <a:rPr sz="1575" b="0">
                 <a:solidFill>
                   <a:srgbClr val="7C766D"/>
                 </a:solidFill>
@@ -15220,68 +14836,27 @@
                 <a:ea typeface="IBM Plex Sans Arabic"/>
                 <a:cs typeface="IBM Plex Sans Arabic"/>
               </a:rPr>
-              <a:t>احنا ما نوظّفهم.</a:t>
-            </a:r>
-          </a:p>
-        </p:txBody>
-      </p:sp>
-      <p:sp>
-        <p:nvSpPr>
-          <p:cNvPr id="23" name="TextBox 22"/>
-          <p:cNvSpPr txBox="1"/>
-          <p:nvPr/>
-        </p:nvSpPr>
-        <p:spPr>
-          <a:xfrm>
-            <a:off x="6096000" y="5505450"/>
-            <a:ext cx="3238500" cy="1066800"/>
-          </a:xfrm>
-          <a:prstGeom prst="rect">
-            <a:avLst/>
-          </a:prstGeom>
-          <a:noFill/>
-        </p:spPr>
-        <p:txBody>
-          <a:bodyPr wrap="square" lIns="0" rIns="0" tIns="0" bIns="0" anchor="t">
-            <a:spAutoFit/>
-          </a:bodyPr>
-          <a:lstStyle/>
-          <a:p>
-            <a:pPr algn="r" rtl="1">
-              <a:lnSpc>
-                <a:spcPct val="110000"/>
-              </a:lnSpc>
-            </a:pPr>
-            <a:r>
-              <a:rPr sz="6300" b="1">
-                <a:solidFill>
-                  <a:srgbClr val="FF5C1A"/>
-                </a:solidFill>
-                <a:latin typeface="IBM Plex Sans Arabic"/>
-                <a:ea typeface="IBM Plex Sans Arabic"/>
-                <a:cs typeface="IBM Plex Sans Arabic"/>
-              </a:rPr>
-              <a:t>نشغّلهم.</a:t>
-            </a:r>
-          </a:p>
-        </p:txBody>
-      </p:sp>
-      <p:sp>
-        <p:nvSpPr>
-          <p:cNvPr id="24" name="Rectangle 23"/>
+              <a:t>والمُخرج</a:t>
+            </a:r>
+          </a:p>
+        </p:txBody>
+      </p:sp>
+      <p:sp>
+        <p:nvSpPr>
+          <p:cNvPr id="27" name="Rectangle 26"/>
           <p:cNvSpPr/>
           <p:nvPr/>
         </p:nvSpPr>
         <p:spPr>
           <a:xfrm>
-            <a:off x="12192000" y="6724650"/>
-            <a:ext cx="2057400" cy="438150"/>
+            <a:off x="8972550" y="6858000"/>
+            <a:ext cx="3848100" cy="590550"/>
           </a:xfrm>
           <a:prstGeom prst="rect">
             <a:avLst/>
           </a:prstGeom>
           <a:solidFill>
-            <a:srgbClr val="2A140B"/>
+            <a:srgbClr val="1E100A"/>
           </a:solidFill>
           <a:ln w="12700">
             <a:solidFill>
@@ -15312,14 +14887,14 @@
       </p:sp>
       <p:sp>
         <p:nvSpPr>
-          <p:cNvPr id="25" name="TextBox 24"/>
-          <p:cNvSpPr txBox="1"/>
-          <p:nvPr/>
-        </p:nvSpPr>
-        <p:spPr>
-          <a:xfrm>
-            <a:off x="12192000" y="6848475"/>
-            <a:ext cx="2057400" cy="361950"/>
+          <p:cNvPr id="28" name="TextBox 27"/>
+          <p:cNvSpPr txBox="1"/>
+          <p:nvPr/>
+        </p:nvSpPr>
+        <p:spPr>
+          <a:xfrm>
+            <a:off x="8972550" y="7010400"/>
+            <a:ext cx="3848100" cy="495300"/>
           </a:xfrm>
           <a:prstGeom prst="rect">
             <a:avLst/>
@@ -15338,7 +14913,7 @@
               </a:lnSpc>
             </a:pPr>
             <a:r>
-              <a:rPr sz="1425" b="0">
+              <a:rPr sz="1950" b="1">
                 <a:solidFill>
                   <a:srgbClr val="FF5C1A"/>
                 </a:solidFill>
@@ -15346,29 +14921,31 @@
                 <a:ea typeface="IBM Plex Sans Arabic"/>
                 <a:cs typeface="IBM Plex Sans Arabic"/>
               </a:rPr>
-              <a:t>وكلاء ذكاء اصطناعي</a:t>
-            </a:r>
-          </a:p>
-        </p:txBody>
-      </p:sp>
-      <p:sp>
-        <p:nvSpPr>
-          <p:cNvPr id="26" name="Rectangle 25"/>
+              <a:t>موردون موثّقون</a:t>
+            </a:r>
+          </a:p>
+        </p:txBody>
+      </p:sp>
+      <p:sp>
+        <p:nvSpPr>
+          <p:cNvPr id="29" name="Rectangle 28"/>
           <p:cNvSpPr/>
           <p:nvPr/>
         </p:nvSpPr>
         <p:spPr>
           <a:xfrm>
-            <a:off x="9696450" y="6724650"/>
-            <a:ext cx="2381250" cy="438150"/>
-          </a:xfrm>
-          <a:prstGeom prst="rect">
-            <a:avLst/>
-          </a:prstGeom>
-          <a:noFill/>
+            <a:off x="4933950" y="6858000"/>
+            <a:ext cx="3848100" cy="590550"/>
+          </a:xfrm>
+          <a:prstGeom prst="rect">
+            <a:avLst/>
+          </a:prstGeom>
+          <a:solidFill>
+            <a:srgbClr val="1E100A"/>
+          </a:solidFill>
           <a:ln w="12700">
             <a:solidFill>
-              <a:srgbClr val="241F1B"/>
+              <a:srgbClr val="FF5C1A"/>
             </a:solidFill>
           </a:ln>
           <a:effectLst/>
@@ -15395,14 +14972,14 @@
       </p:sp>
       <p:sp>
         <p:nvSpPr>
-          <p:cNvPr id="27" name="TextBox 26"/>
-          <p:cNvSpPr txBox="1"/>
-          <p:nvPr/>
-        </p:nvSpPr>
-        <p:spPr>
-          <a:xfrm>
-            <a:off x="9696450" y="6848475"/>
-            <a:ext cx="2381250" cy="361950"/>
+          <p:cNvPr id="30" name="TextBox 29"/>
+          <p:cNvSpPr txBox="1"/>
+          <p:nvPr/>
+        </p:nvSpPr>
+        <p:spPr>
+          <a:xfrm>
+            <a:off x="4933950" y="7010400"/>
+            <a:ext cx="3848100" cy="495300"/>
           </a:xfrm>
           <a:prstGeom prst="rect">
             <a:avLst/>
@@ -15421,37 +14998,39 @@
               </a:lnSpc>
             </a:pPr>
             <a:r>
-              <a:rPr sz="1425" b="0">
-                <a:solidFill>
-                  <a:srgbClr val="7C766D"/>
-                </a:solidFill>
-                <a:latin typeface="IBM Plex Sans Arabic"/>
-                <a:ea typeface="IBM Plex Sans Arabic"/>
-                <a:cs typeface="IBM Plex Sans Arabic"/>
-              </a:rPr>
-              <a:t>دقيقتين للمصنع بدل يوم</a:t>
-            </a:r>
-          </a:p>
-        </p:txBody>
-      </p:sp>
-      <p:sp>
-        <p:nvSpPr>
-          <p:cNvPr id="28" name="Rectangle 27"/>
+              <a:rPr sz="1950" b="1">
+                <a:solidFill>
+                  <a:srgbClr val="FF5C1A"/>
+                </a:solidFill>
+                <a:latin typeface="IBM Plex Sans Arabic"/>
+                <a:ea typeface="IBM Plex Sans Arabic"/>
+                <a:cs typeface="IBM Plex Sans Arabic"/>
+              </a:rPr>
+              <a:t>سجل الفجوات</a:t>
+            </a:r>
+          </a:p>
+        </p:txBody>
+      </p:sp>
+      <p:sp>
+        <p:nvSpPr>
+          <p:cNvPr id="31" name="Rectangle 30"/>
           <p:cNvSpPr/>
           <p:nvPr/>
         </p:nvSpPr>
         <p:spPr>
           <a:xfrm>
-            <a:off x="7715250" y="6724650"/>
-            <a:ext cx="1866900" cy="438150"/>
-          </a:xfrm>
-          <a:prstGeom prst="rect">
-            <a:avLst/>
-          </a:prstGeom>
-          <a:noFill/>
+            <a:off x="895350" y="6858000"/>
+            <a:ext cx="3848100" cy="590550"/>
+          </a:xfrm>
+          <a:prstGeom prst="rect">
+            <a:avLst/>
+          </a:prstGeom>
+          <a:solidFill>
+            <a:srgbClr val="1E100A"/>
+          </a:solidFill>
           <a:ln w="12700">
             <a:solidFill>
-              <a:srgbClr val="241F1B"/>
+              <a:srgbClr val="FF5C1A"/>
             </a:solidFill>
           </a:ln>
           <a:effectLst/>
@@ -15478,14 +15057,14 @@
       </p:sp>
       <p:sp>
         <p:nvSpPr>
-          <p:cNvPr id="29" name="TextBox 28"/>
-          <p:cNvSpPr txBox="1"/>
-          <p:nvPr/>
-        </p:nvSpPr>
-        <p:spPr>
-          <a:xfrm>
-            <a:off x="7715250" y="6848475"/>
-            <a:ext cx="1866900" cy="361950"/>
+          <p:cNvPr id="32" name="TextBox 31"/>
+          <p:cNvSpPr txBox="1"/>
+          <p:nvPr/>
+        </p:nvSpPr>
+        <p:spPr>
+          <a:xfrm>
+            <a:off x="895350" y="7010400"/>
+            <a:ext cx="3848100" cy="495300"/>
           </a:xfrm>
           <a:prstGeom prst="rect">
             <a:avLst/>
@@ -15504,98 +15083,15 @@
               </a:lnSpc>
             </a:pPr>
             <a:r>
-              <a:rPr sz="1425" b="0">
-                <a:solidFill>
-                  <a:srgbClr val="7C766D"/>
-                </a:solidFill>
-                <a:latin typeface="IBM Plex Sans Arabic"/>
-                <a:ea typeface="IBM Plex Sans Arabic"/>
-                <a:cs typeface="IBM Plex Sans Arabic"/>
-              </a:rPr>
-              <a:t>٢٤ ساعة بلا توقف</a:t>
-            </a:r>
-          </a:p>
-        </p:txBody>
-      </p:sp>
-      <p:sp>
-        <p:nvSpPr>
-          <p:cNvPr id="30" name="Rectangle 29"/>
-          <p:cNvSpPr/>
-          <p:nvPr/>
-        </p:nvSpPr>
-        <p:spPr>
-          <a:xfrm>
-            <a:off x="5562600" y="6724650"/>
-            <a:ext cx="2038350" cy="438150"/>
-          </a:xfrm>
-          <a:prstGeom prst="rect">
-            <a:avLst/>
-          </a:prstGeom>
-          <a:noFill/>
-          <a:ln w="12700">
-            <a:solidFill>
-              <a:srgbClr val="241F1B"/>
-            </a:solidFill>
-          </a:ln>
-          <a:effectLst/>
-        </p:spPr>
-        <p:style>
-          <a:lnRef idx="1">
-            <a:schemeClr val="accent1"/>
-          </a:lnRef>
-          <a:fillRef idx="3">
-            <a:schemeClr val="accent1"/>
-          </a:fillRef>
-          <a:effectRef idx="2">
-            <a:schemeClr val="accent1"/>
-          </a:effectRef>
-          <a:fontRef idx="minor">
-            <a:schemeClr val="lt1"/>
-          </a:fontRef>
-        </p:style>
-        <p:txBody>
-          <a:bodyPr rtlCol="0" anchor="ctr"/>
-          <a:lstStyle/>
-          <a:p/>
-        </p:txBody>
-      </p:sp>
-      <p:sp>
-        <p:nvSpPr>
-          <p:cNvPr id="31" name="TextBox 30"/>
-          <p:cNvSpPr txBox="1"/>
-          <p:nvPr/>
-        </p:nvSpPr>
-        <p:spPr>
-          <a:xfrm>
-            <a:off x="5562600" y="6848475"/>
-            <a:ext cx="2038350" cy="361950"/>
-          </a:xfrm>
-          <a:prstGeom prst="rect">
-            <a:avLst/>
-          </a:prstGeom>
-          <a:noFill/>
-        </p:spPr>
-        <p:txBody>
-          <a:bodyPr wrap="square" lIns="0" rIns="0" tIns="0" bIns="0" anchor="t">
-            <a:spAutoFit/>
-          </a:bodyPr>
-          <a:lstStyle/>
-          <a:p>
-            <a:pPr algn="ctr" rtl="1">
-              <a:lnSpc>
-                <a:spcPct val="135000"/>
-              </a:lnSpc>
-            </a:pPr>
-            <a:r>
-              <a:rPr sz="1425" b="0">
-                <a:solidFill>
-                  <a:srgbClr val="7C766D"/>
-                </a:solidFill>
-                <a:latin typeface="IBM Plex Sans Arabic"/>
-                <a:ea typeface="IBM Plex Sans Arabic"/>
-                <a:cs typeface="IBM Plex Sans Arabic"/>
-              </a:rPr>
-              <a:t>ما ينسون ولا معلومة</a:t>
+              <a:rPr sz="1950" b="1">
+                <a:solidFill>
+                  <a:srgbClr val="FF5C1A"/>
+                </a:solidFill>
+                <a:latin typeface="IBM Plex Sans Arabic"/>
+                <a:ea typeface="IBM Plex Sans Arabic"/>
+                <a:cs typeface="IBM Plex Sans Arabic"/>
+              </a:rPr>
+              <a:t>نسبة التغطية</a:t>
             </a:r>
           </a:p>
         </p:txBody>
@@ -15820,7 +15316,7 @@
                 <a:ea typeface="IBM Plex Mono"/>
                 <a:cs typeface="IBM Plex Mono"/>
               </a:rPr>
-              <a:t>08 / 18</a:t>
+              <a:t>08 / 16</a:t>
             </a:r>
           </a:p>
         </p:txBody>
@@ -16911,7 +16407,7 @@
                 <a:ea typeface="IBM Plex Mono"/>
                 <a:cs typeface="IBM Plex Mono"/>
               </a:rPr>
-              <a:t>09 / 18</a:t>
+              <a:t>09 / 16</a:t>
             </a:r>
           </a:p>
         </p:txBody>
@@ -16965,7 +16461,7 @@
         </p:nvSpPr>
         <p:spPr>
           <a:xfrm>
-            <a:off x="990600" y="2171700"/>
+            <a:off x="990600" y="1600200"/>
             <a:ext cx="13258800" cy="704850"/>
           </a:xfrm>
           <a:prstGeom prst="rect">
@@ -16994,13 +16490,54 @@
                 <a:cs typeface="IBM Plex Sans Arabic"/>
               </a:rPr>
               <a:t>خريطة كامن للقدرات المحلية</a:t>
+            </a:r>
+          </a:p>
+        </p:txBody>
+      </p:sp>
+      <p:sp>
+        <p:nvSpPr>
+          <p:cNvPr id="9" name="TextBox 8"/>
+          <p:cNvSpPr txBox="1"/>
+          <p:nvPr/>
+        </p:nvSpPr>
+        <p:spPr>
+          <a:xfrm>
+            <a:off x="990600" y="1771650"/>
+            <a:ext cx="2857500" cy="323850"/>
+          </a:xfrm>
+          <a:prstGeom prst="rect">
+            <a:avLst/>
+          </a:prstGeom>
+          <a:noFill/>
+        </p:spPr>
+        <p:txBody>
+          <a:bodyPr wrap="square" lIns="0" rIns="0" tIns="0" bIns="0" anchor="t">
+            <a:spAutoFit/>
+          </a:bodyPr>
+          <a:lstStyle/>
+          <a:p>
+            <a:pPr algn="r" rtl="1">
+              <a:lnSpc>
+                <a:spcPct val="135000"/>
+              </a:lnSpc>
+            </a:pPr>
+            <a:r>
+              <a:rPr sz="1275" b="0">
+                <a:solidFill>
+                  <a:srgbClr val="7C766D"/>
+                </a:solidFill>
+                <a:latin typeface="IBM Plex Sans Arabic"/>
+                <a:ea typeface="IBM Plex Sans Arabic"/>
+                <a:cs typeface="IBM Plex Sans Arabic"/>
+              </a:rPr>
+              <a:t>✦  وكيل ذكاء اصطناعي</a:t>
             </a:r>
           </a:p>
         </p:txBody>
       </p:sp>
       <p:pic>
         <p:nvPicPr>
-          <p:cNvPr id="9" name="Picture 8" descr="map.png"/>
+          <p:cNvPr id="10" name="Picture 9" descr="map.png"/>
           <p:cNvPicPr>
             <a:picLocks noChangeAspect="1"/>
           </p:cNvPicPr>
@@ -17014,8 +16551,8 @@
         </p:blipFill>
         <p:spPr>
           <a:xfrm>
-            <a:off x="990600" y="3048000"/>
-            <a:ext cx="13258800" cy="3238500"/>
+            <a:off x="990600" y="2362200"/>
+            <a:ext cx="13258800" cy="5110162"/>
           </a:xfrm>
           <a:prstGeom prst="rect">
             <a:avLst/>
